--- a/tools/FreeP.RenderCompare/corpus/14-smartart-live.pptx
+++ b/tools/FreeP.RenderCompare/corpus/14-smartart-live.pptx
@@ -1,6 +1,6 @@
 
 <file path=ppt/presentation.xml><?xml version="1.0" encoding="utf-8"?>
-<p:presentation xmlns:a="http://schemas.openxmlformats.org/drawingml/2006/main" xmlns:r="http://schemas.openxmlformats.org/officeDocument/2006/relationships" xmlns:p="http://schemas.openxmlformats.org/presentationml/2006/main" saveSubsetFonts="1">
+<p:presentation xmlns:a="http://schemas.openxmlformats.org/drawingml/2006/main" xmlns:r="http://schemas.openxmlformats.org/officeDocument/2006/relationships" xmlns:p="http://schemas.openxmlformats.org/presentationml/2006/main" xmlns:p15="http://schemas.microsoft.com/office/powerpoint/2012/main" saveSubsetFonts="1">
   <p:sldMasterIdLst>
     <p:sldMasterId id="2147483648" r:id="rId1"/>
   </p:sldMasterIdLst>
@@ -107,6 +107,11 @@
       </a:defRPr>
     </a:lvl9pPr>
   </p:defaultTextStyle>
+  <p:extLst>
+    <p:ext uri="{EFAFB233-063F-42B5-8137-9DF3F51BA10A}">
+      <p15:sldGuideLst/>
+    </p:ext>
+  </p:extLst>
 </p:presentation>
 </file>
 
@@ -3101,7 +3106,7 @@
 <file path=ppt/diagrams/data1.xml><?xml version="1.0" encoding="utf-8"?>
 <dgm:dataModel xmlns:dgm="http://schemas.openxmlformats.org/drawingml/2006/diagram" xmlns:a="http://schemas.openxmlformats.org/drawingml/2006/main">
   <dgm:ptLst>
-    <dgm:pt modelId="{9986E0FA-0BDA-418C-BA42-538DDD18FF02}" type="doc">
+    <dgm:pt modelId="{3E0F075D-BCDB-40BC-8DC5-03303CBD345E}" type="doc">
       <dgm:prSet loTypeId="urn:microsoft.com/office/officeart/2008/layout/IncreasingCircleProcess" loCatId="list" qsTypeId="urn:microsoft.com/office/officeart/2005/8/quickstyle/simple1" qsCatId="simple" csTypeId="urn:microsoft.com/office/officeart/2005/8/colors/accent1_2" csCatId="accent1" phldr="1"/>
       <dgm:spPr/>
       <dgm:t>
@@ -3112,7 +3117,7 @@
         </a:p>
       </dgm:t>
     </dgm:pt>
-    <dgm:pt modelId="{7335A1FB-EED7-4DE3-9C06-F3EAA42D8F5E}">
+    <dgm:pt modelId="{015D6240-DA03-42B6-9DEA-DD29A7AE06ED}">
       <dgm:prSet phldrT="[Text]"/>
       <dgm:spPr/>
       <dgm:t>
@@ -3126,7 +3131,7 @@
         </a:p>
       </dgm:t>
     </dgm:pt>
-    <dgm:pt modelId="{054D5A81-1C9B-4756-A0CC-4201CF32F40D}" type="parTrans" cxnId="{05576170-8720-498E-A61A-31D4350116AB}">
+    <dgm:pt modelId="{EFEE050C-E2C8-427E-8BFC-4F3C8441E51A}" type="parTrans" cxnId="{628CDFB1-A557-4F8C-946F-A62F697069EF}">
       <dgm:prSet/>
       <dgm:spPr/>
       <dgm:t>
@@ -3137,7 +3142,7 @@
         </a:p>
       </dgm:t>
     </dgm:pt>
-    <dgm:pt modelId="{826D559B-1EFD-4367-933C-22DB6B7634F0}" type="sibTrans" cxnId="{05576170-8720-498E-A61A-31D4350116AB}">
+    <dgm:pt modelId="{D6E36454-9674-434A-A77B-ED184E000876}" type="sibTrans" cxnId="{628CDFB1-A557-4F8C-946F-A62F697069EF}">
       <dgm:prSet/>
       <dgm:spPr/>
       <dgm:t>
@@ -3148,7 +3153,7 @@
         </a:p>
       </dgm:t>
     </dgm:pt>
-    <dgm:pt modelId="{6583A78C-B33C-4935-99A6-DDC15D3E3644}">
+    <dgm:pt modelId="{365942A2-A31B-4AB5-BB7F-A91CBBD8DC11}">
       <dgm:prSet phldrT="[Text]"/>
       <dgm:spPr/>
       <dgm:t>
@@ -3162,7 +3167,7 @@
         </a:p>
       </dgm:t>
     </dgm:pt>
-    <dgm:pt modelId="{F01D1550-DFB5-48E1-A1BB-AA0A15A79AB3}" type="parTrans" cxnId="{8172E5F7-8039-4B30-8569-C1C3CC30E6B4}">
+    <dgm:pt modelId="{BEFBA1E0-09F3-4010-8352-41E5B7D71F97}" type="parTrans" cxnId="{B9F9BF63-0549-46DB-A648-968EE587FF54}">
       <dgm:prSet/>
       <dgm:spPr/>
       <dgm:t>
@@ -3173,7 +3178,7 @@
         </a:p>
       </dgm:t>
     </dgm:pt>
-    <dgm:pt modelId="{E6C17513-BC73-4D10-A682-2B4F0DBDC2C3}" type="sibTrans" cxnId="{8172E5F7-8039-4B30-8569-C1C3CC30E6B4}">
+    <dgm:pt modelId="{7252A203-DD45-4513-9B47-134B0958ABE9}" type="sibTrans" cxnId="{B9F9BF63-0549-46DB-A648-968EE587FF54}">
       <dgm:prSet/>
       <dgm:spPr/>
       <dgm:t>
@@ -3184,7 +3189,7 @@
         </a:p>
       </dgm:t>
     </dgm:pt>
-    <dgm:pt modelId="{25C3DAF5-B1D5-415D-9FE4-72F45554AEB2}">
+    <dgm:pt modelId="{0DD3D14F-65AE-4DFB-A219-E3315073D2A3}">
       <dgm:prSet phldrT="[Text]"/>
       <dgm:spPr/>
       <dgm:t>
@@ -3198,7 +3203,7 @@
         </a:p>
       </dgm:t>
     </dgm:pt>
-    <dgm:pt modelId="{C7E34383-D608-4237-BCBD-5007AAA11752}" type="parTrans" cxnId="{E3C1824B-6E33-4C75-B146-4F3BED0619A5}">
+    <dgm:pt modelId="{1EF11426-2302-4884-A323-48A8F898BE03}" type="parTrans" cxnId="{15F3E09B-F4AA-41C8-B7B7-9A99F1C4C2ED}">
       <dgm:prSet/>
       <dgm:spPr/>
       <dgm:t>
@@ -3209,7 +3214,7 @@
         </a:p>
       </dgm:t>
     </dgm:pt>
-    <dgm:pt modelId="{9274B0E9-A7B0-440D-BBC8-2787D4815662}" type="sibTrans" cxnId="{E3C1824B-6E33-4C75-B146-4F3BED0619A5}">
+    <dgm:pt modelId="{9ADC6558-090A-4036-8B43-F57755832FE2}" type="sibTrans" cxnId="{15F3E09B-F4AA-41C8-B7B7-9A99F1C4C2ED}">
       <dgm:prSet/>
       <dgm:spPr/>
       <dgm:t>
@@ -3220,7 +3225,7 @@
         </a:p>
       </dgm:t>
     </dgm:pt>
-    <dgm:pt modelId="{8BE04D66-E2F4-4CF2-8191-7FBD72F94FC5}">
+    <dgm:pt modelId="{37663761-B58F-4A7D-BE0B-986E735CEA03}">
       <dgm:prSet phldrT="[Text]"/>
       <dgm:spPr/>
       <dgm:t>
@@ -3234,7 +3239,7 @@
         </a:p>
       </dgm:t>
     </dgm:pt>
-    <dgm:pt modelId="{085A42D5-32AD-4A85-BD67-FD4B98502C92}" type="parTrans" cxnId="{5F0083F1-EEA0-44E7-ACA1-28F32CD4E2D7}">
+    <dgm:pt modelId="{2F9AEBFA-0EAA-40FC-8B73-BCCA55276D69}" type="parTrans" cxnId="{609D9B68-F882-4935-B6C0-E4432C6F983B}">
       <dgm:prSet/>
       <dgm:spPr/>
       <dgm:t>
@@ -3245,7 +3250,7 @@
         </a:p>
       </dgm:t>
     </dgm:pt>
-    <dgm:pt modelId="{1502A3F4-A236-479A-B7F9-9D429B6F5E59}" type="sibTrans" cxnId="{5F0083F1-EEA0-44E7-ACA1-28F32CD4E2D7}">
+    <dgm:pt modelId="{B85B39CB-2D06-4A91-8620-DD14182E11C7}" type="sibTrans" cxnId="{609D9B68-F882-4935-B6C0-E4432C6F983B}">
       <dgm:prSet/>
       <dgm:spPr/>
       <dgm:t>
@@ -3256,7 +3261,7 @@
         </a:p>
       </dgm:t>
     </dgm:pt>
-    <dgm:pt modelId="{9A39324C-498B-4422-9993-CEF3E521F44E}">
+    <dgm:pt modelId="{141ECBA5-91F9-4F47-8B54-898596A08D9D}">
       <dgm:prSet phldrT="[Text]"/>
       <dgm:spPr/>
       <dgm:t>
@@ -3270,7 +3275,7 @@
         </a:p>
       </dgm:t>
     </dgm:pt>
-    <dgm:pt modelId="{43824B51-FEC2-4C80-AFDC-412B4880A6E2}" type="parTrans" cxnId="{C4143440-D374-493D-8BEE-3FCD7162B44A}">
+    <dgm:pt modelId="{9EC21B02-6214-4D69-B2C9-2538C6A66523}" type="parTrans" cxnId="{91D8C2EC-D34B-43D6-9D93-64D02169C1AC}">
       <dgm:prSet/>
       <dgm:spPr/>
       <dgm:t>
@@ -3281,7 +3286,7 @@
         </a:p>
       </dgm:t>
     </dgm:pt>
-    <dgm:pt modelId="{DE5569F3-1222-4D8E-AA9C-4B7C3D2C5FB0}" type="sibTrans" cxnId="{C4143440-D374-493D-8BEE-3FCD7162B44A}">
+    <dgm:pt modelId="{8C5C011E-AAE6-4639-8EFD-5C7C6D9BA7DA}" type="sibTrans" cxnId="{91D8C2EC-D34B-43D6-9D93-64D02169C1AC}">
       <dgm:prSet/>
       <dgm:spPr/>
       <dgm:t>
@@ -3292,7 +3297,7 @@
         </a:p>
       </dgm:t>
     </dgm:pt>
-    <dgm:pt modelId="{6FC474FF-1D63-4AA0-A644-29753C47E109}">
+    <dgm:pt modelId="{37E5E37F-C7B8-4F12-BBAE-959D61B51915}">
       <dgm:prSet phldrT="[Text]" phldr="1"/>
       <dgm:spPr/>
       <dgm:t>
@@ -3303,7 +3308,7 @@
         </a:p>
       </dgm:t>
     </dgm:pt>
-    <dgm:pt modelId="{A952A94A-43F5-40D9-806D-5BD93BBEA2DB}" type="parTrans" cxnId="{49137FE1-090B-4154-A497-428B420D9B54}">
+    <dgm:pt modelId="{CD3008C1-6B4F-4790-9B3D-1F6002760529}" type="parTrans" cxnId="{0D739645-0310-4F21-BD63-F20E2A4E258C}">
       <dgm:prSet/>
       <dgm:spPr/>
       <dgm:t>
@@ -3314,7 +3319,7 @@
         </a:p>
       </dgm:t>
     </dgm:pt>
-    <dgm:pt modelId="{13C21D75-F944-42DE-8980-09E0CF69EC97}" type="sibTrans" cxnId="{49137FE1-090B-4154-A497-428B420D9B54}">
+    <dgm:pt modelId="{6419BBA1-882A-4EA5-BCE0-B04109FE3622}" type="sibTrans" cxnId="{0D739645-0310-4F21-BD63-F20E2A4E258C}">
       <dgm:prSet/>
       <dgm:spPr/>
       <dgm:t>
@@ -3325,8 +3330,8 @@
         </a:p>
       </dgm:t>
     </dgm:pt>
-    <dgm:pt modelId="{A3273CB6-B883-4290-B899-CA6BF643ABBB}" type="pres">
-      <dgm:prSet presAssocID="{9986E0FA-0BDA-418C-BA42-538DDD18FF02}" presName="Name0" presStyleCnt="0">
+    <dgm:pt modelId="{AE001C91-1D9F-4A9C-958D-DD0EB6925FF1}" type="pres">
+      <dgm:prSet presAssocID="{3E0F075D-BCDB-40BC-8DC5-03303CBD345E}" presName="Name0" presStyleCnt="0">
         <dgm:presLayoutVars>
           <dgm:chMax val="7"/>
           <dgm:chPref val="7"/>
@@ -3337,20 +3342,20 @@
       </dgm:prSet>
       <dgm:spPr/>
     </dgm:pt>
-    <dgm:pt modelId="{2A42BFEF-A32F-4657-B803-7B2ACF41CE81}" type="pres">
-      <dgm:prSet presAssocID="{7335A1FB-EED7-4DE3-9C06-F3EAA42D8F5E}" presName="composite" presStyleCnt="0"/>
+    <dgm:pt modelId="{F415AA97-014C-4BDA-BF2B-8D129830700D}" type="pres">
+      <dgm:prSet presAssocID="{015D6240-DA03-42B6-9DEA-DD29A7AE06ED}" presName="composite" presStyleCnt="0"/>
       <dgm:spPr/>
     </dgm:pt>
-    <dgm:pt modelId="{4F8231EB-3CE0-4F91-9854-2FCA67C6C964}" type="pres">
-      <dgm:prSet presAssocID="{7335A1FB-EED7-4DE3-9C06-F3EAA42D8F5E}" presName="BackAccent" presStyleLbl="bgShp" presStyleIdx="0" presStyleCnt="3"/>
+    <dgm:pt modelId="{13928B8B-99D9-4F5B-AD51-C2D1B8C98831}" type="pres">
+      <dgm:prSet presAssocID="{015D6240-DA03-42B6-9DEA-DD29A7AE06ED}" presName="BackAccent" presStyleLbl="bgShp" presStyleIdx="0" presStyleCnt="3"/>
       <dgm:spPr/>
     </dgm:pt>
-    <dgm:pt modelId="{4DB0A476-0581-49D1-97DA-A4DE8E5F3911}" type="pres">
-      <dgm:prSet presAssocID="{7335A1FB-EED7-4DE3-9C06-F3EAA42D8F5E}" presName="Accent" presStyleLbl="alignNode1" presStyleIdx="0" presStyleCnt="3"/>
+    <dgm:pt modelId="{B8538921-88AB-477C-9316-C6174802317E}" type="pres">
+      <dgm:prSet presAssocID="{015D6240-DA03-42B6-9DEA-DD29A7AE06ED}" presName="Accent" presStyleLbl="alignNode1" presStyleIdx="0" presStyleCnt="3"/>
       <dgm:spPr/>
     </dgm:pt>
-    <dgm:pt modelId="{5B6AE87D-8DC8-464B-B873-D5C573F577EA}" type="pres">
-      <dgm:prSet presAssocID="{7335A1FB-EED7-4DE3-9C06-F3EAA42D8F5E}" presName="Child" presStyleLbl="revTx" presStyleIdx="0" presStyleCnt="6">
+    <dgm:pt modelId="{6015518C-1A08-4E5E-9AE8-47929964CF72}" type="pres">
+      <dgm:prSet presAssocID="{015D6240-DA03-42B6-9DEA-DD29A7AE06ED}" presName="Child" presStyleLbl="revTx" presStyleIdx="0" presStyleCnt="6">
         <dgm:presLayoutVars>
           <dgm:chMax val="0"/>
           <dgm:chPref val="0"/>
@@ -3359,8 +3364,8 @@
       </dgm:prSet>
       <dgm:spPr/>
     </dgm:pt>
-    <dgm:pt modelId="{3ED45AF8-FE4C-4717-9FC0-0D99075E5BF5}" type="pres">
-      <dgm:prSet presAssocID="{7335A1FB-EED7-4DE3-9C06-F3EAA42D8F5E}" presName="Parent" presStyleLbl="revTx" presStyleIdx="1" presStyleCnt="6">
+    <dgm:pt modelId="{BF6F942A-DAA1-467D-A813-D80E4A10A270}" type="pres">
+      <dgm:prSet presAssocID="{015D6240-DA03-42B6-9DEA-DD29A7AE06ED}" presName="Parent" presStyleLbl="revTx" presStyleIdx="1" presStyleCnt="6">
         <dgm:presLayoutVars>
           <dgm:chMax val="1"/>
           <dgm:chPref val="1"/>
@@ -3369,24 +3374,24 @@
       </dgm:prSet>
       <dgm:spPr/>
     </dgm:pt>
-    <dgm:pt modelId="{E0677CC6-FEE5-4EEF-B6CB-E2D8089D361E}" type="pres">
-      <dgm:prSet presAssocID="{826D559B-1EFD-4367-933C-22DB6B7634F0}" presName="sibTrans" presStyleCnt="0"/>
+    <dgm:pt modelId="{D8DB01C5-CA79-4631-8BE6-F2553A0B0048}" type="pres">
+      <dgm:prSet presAssocID="{D6E36454-9674-434A-A77B-ED184E000876}" presName="sibTrans" presStyleCnt="0"/>
       <dgm:spPr/>
     </dgm:pt>
-    <dgm:pt modelId="{8E3B5FC7-396D-4468-823D-F4B8E3ACE39C}" type="pres">
-      <dgm:prSet presAssocID="{25C3DAF5-B1D5-415D-9FE4-72F45554AEB2}" presName="composite" presStyleCnt="0"/>
+    <dgm:pt modelId="{E4E03E75-2737-4019-83EE-ECEFF5D20E1D}" type="pres">
+      <dgm:prSet presAssocID="{0DD3D14F-65AE-4DFB-A219-E3315073D2A3}" presName="composite" presStyleCnt="0"/>
       <dgm:spPr/>
     </dgm:pt>
-    <dgm:pt modelId="{35C8319C-DF4C-4551-A942-0EDF4B164AD0}" type="pres">
-      <dgm:prSet presAssocID="{25C3DAF5-B1D5-415D-9FE4-72F45554AEB2}" presName="BackAccent" presStyleLbl="bgShp" presStyleIdx="1" presStyleCnt="3"/>
+    <dgm:pt modelId="{C5EED73C-4D07-4A80-BDBA-0F8E701CF91D}" type="pres">
+      <dgm:prSet presAssocID="{0DD3D14F-65AE-4DFB-A219-E3315073D2A3}" presName="BackAccent" presStyleLbl="bgShp" presStyleIdx="1" presStyleCnt="3"/>
       <dgm:spPr/>
     </dgm:pt>
-    <dgm:pt modelId="{84B26A6A-4B88-4BA7-ABF6-80AE6059761A}" type="pres">
-      <dgm:prSet presAssocID="{25C3DAF5-B1D5-415D-9FE4-72F45554AEB2}" presName="Accent" presStyleLbl="alignNode1" presStyleIdx="1" presStyleCnt="3"/>
+    <dgm:pt modelId="{BB4733EE-AC16-4FC5-BFB3-A1ADC0880B0B}" type="pres">
+      <dgm:prSet presAssocID="{0DD3D14F-65AE-4DFB-A219-E3315073D2A3}" presName="Accent" presStyleLbl="alignNode1" presStyleIdx="1" presStyleCnt="3"/>
       <dgm:spPr/>
     </dgm:pt>
-    <dgm:pt modelId="{B5FB0697-2FC2-42F7-BDF3-E76985CDF035}" type="pres">
-      <dgm:prSet presAssocID="{25C3DAF5-B1D5-415D-9FE4-72F45554AEB2}" presName="Child" presStyleLbl="revTx" presStyleIdx="2" presStyleCnt="6">
+    <dgm:pt modelId="{4E7340F6-9A6E-433E-A406-2FA8DBAF00C2}" type="pres">
+      <dgm:prSet presAssocID="{0DD3D14F-65AE-4DFB-A219-E3315073D2A3}" presName="Child" presStyleLbl="revTx" presStyleIdx="2" presStyleCnt="6">
         <dgm:presLayoutVars>
           <dgm:chMax val="0"/>
           <dgm:chPref val="0"/>
@@ -3395,8 +3400,8 @@
       </dgm:prSet>
       <dgm:spPr/>
     </dgm:pt>
-    <dgm:pt modelId="{5EBEE6AC-A7EB-4506-AA0A-D5ED13ADA255}" type="pres">
-      <dgm:prSet presAssocID="{25C3DAF5-B1D5-415D-9FE4-72F45554AEB2}" presName="Parent" presStyleLbl="revTx" presStyleIdx="3" presStyleCnt="6">
+    <dgm:pt modelId="{5B185A13-B5F2-4999-ACFC-EE52E3D69499}" type="pres">
+      <dgm:prSet presAssocID="{0DD3D14F-65AE-4DFB-A219-E3315073D2A3}" presName="Parent" presStyleLbl="revTx" presStyleIdx="3" presStyleCnt="6">
         <dgm:presLayoutVars>
           <dgm:chMax val="1"/>
           <dgm:chPref val="1"/>
@@ -3405,24 +3410,24 @@
       </dgm:prSet>
       <dgm:spPr/>
     </dgm:pt>
-    <dgm:pt modelId="{03057B8E-193C-48A4-AECC-482938470E25}" type="pres">
-      <dgm:prSet presAssocID="{9274B0E9-A7B0-440D-BBC8-2787D4815662}" presName="sibTrans" presStyleCnt="0"/>
+    <dgm:pt modelId="{75CE8DFA-149F-4D4C-8A1E-194AEFB40D1E}" type="pres">
+      <dgm:prSet presAssocID="{9ADC6558-090A-4036-8B43-F57755832FE2}" presName="sibTrans" presStyleCnt="0"/>
       <dgm:spPr/>
     </dgm:pt>
-    <dgm:pt modelId="{23C31225-01B3-4490-A532-B6774C34A8B6}" type="pres">
-      <dgm:prSet presAssocID="{9A39324C-498B-4422-9993-CEF3E521F44E}" presName="composite" presStyleCnt="0"/>
+    <dgm:pt modelId="{0819BFD1-8CA1-44F6-988F-C8FED7A19B68}" type="pres">
+      <dgm:prSet presAssocID="{141ECBA5-91F9-4F47-8B54-898596A08D9D}" presName="composite" presStyleCnt="0"/>
       <dgm:spPr/>
     </dgm:pt>
-    <dgm:pt modelId="{6C95D7F6-90A1-4713-86D4-456E56977F9E}" type="pres">
-      <dgm:prSet presAssocID="{9A39324C-498B-4422-9993-CEF3E521F44E}" presName="BackAccent" presStyleLbl="bgShp" presStyleIdx="2" presStyleCnt="3"/>
+    <dgm:pt modelId="{171B63C5-631D-469A-9F4F-15BE63439720}" type="pres">
+      <dgm:prSet presAssocID="{141ECBA5-91F9-4F47-8B54-898596A08D9D}" presName="BackAccent" presStyleLbl="bgShp" presStyleIdx="2" presStyleCnt="3"/>
       <dgm:spPr/>
     </dgm:pt>
-    <dgm:pt modelId="{2F794272-4F57-4451-BBE4-8203F3ECED97}" type="pres">
-      <dgm:prSet presAssocID="{9A39324C-498B-4422-9993-CEF3E521F44E}" presName="Accent" presStyleLbl="alignNode1" presStyleIdx="2" presStyleCnt="3"/>
+    <dgm:pt modelId="{3C512A18-1021-4CAB-9F2D-6F9D12DF5A9D}" type="pres">
+      <dgm:prSet presAssocID="{141ECBA5-91F9-4F47-8B54-898596A08D9D}" presName="Accent" presStyleLbl="alignNode1" presStyleIdx="2" presStyleCnt="3"/>
       <dgm:spPr/>
     </dgm:pt>
-    <dgm:pt modelId="{5D696007-246F-4C35-9886-67C0E2A9E05E}" type="pres">
-      <dgm:prSet presAssocID="{9A39324C-498B-4422-9993-CEF3E521F44E}" presName="Child" presStyleLbl="revTx" presStyleIdx="4" presStyleCnt="6">
+    <dgm:pt modelId="{E4E2A3B7-96F9-4989-A2C4-F2D2B219BA75}" type="pres">
+      <dgm:prSet presAssocID="{141ECBA5-91F9-4F47-8B54-898596A08D9D}" presName="Child" presStyleLbl="revTx" presStyleIdx="4" presStyleCnt="6">
         <dgm:presLayoutVars>
           <dgm:chMax val="0"/>
           <dgm:chPref val="0"/>
@@ -3431,8 +3436,8 @@
       </dgm:prSet>
       <dgm:spPr/>
     </dgm:pt>
-    <dgm:pt modelId="{B72821BF-50F1-4870-B73F-053D7C3F5FFE}" type="pres">
-      <dgm:prSet presAssocID="{9A39324C-498B-4422-9993-CEF3E521F44E}" presName="Parent" presStyleLbl="revTx" presStyleIdx="5" presStyleCnt="6">
+    <dgm:pt modelId="{F7B20A09-93B0-4B89-8BED-77C245789921}" type="pres">
+      <dgm:prSet presAssocID="{141ECBA5-91F9-4F47-8B54-898596A08D9D}" presName="Parent" presStyleLbl="revTx" presStyleIdx="5" presStyleCnt="6">
         <dgm:presLayoutVars>
           <dgm:chMax val="1"/>
           <dgm:chPref val="1"/>
@@ -3443,36 +3448,36 @@
     </dgm:pt>
   </dgm:ptLst>
   <dgm:cxnLst>
-    <dgm:cxn modelId="{D8C9800F-9F7E-4C17-8284-24B5BD942889}" type="presOf" srcId="{8BE04D66-E2F4-4CF2-8191-7FBD72F94FC5}" destId="{B5FB0697-2FC2-42F7-BDF3-E76985CDF035}" srcOrd="0" destOrd="0" presId="urn:microsoft.com/office/officeart/2008/layout/IncreasingCircleProcess"/>
-    <dgm:cxn modelId="{FB36833B-49F1-4BF7-BB76-D59065BB81E8}" type="presOf" srcId="{6FC474FF-1D63-4AA0-A644-29753C47E109}" destId="{5D696007-246F-4C35-9886-67C0E2A9E05E}" srcOrd="0" destOrd="0" presId="urn:microsoft.com/office/officeart/2008/layout/IncreasingCircleProcess"/>
-    <dgm:cxn modelId="{C4143440-D374-493D-8BEE-3FCD7162B44A}" srcId="{9986E0FA-0BDA-418C-BA42-538DDD18FF02}" destId="{9A39324C-498B-4422-9993-CEF3E521F44E}" srcOrd="2" destOrd="0" parTransId="{43824B51-FEC2-4C80-AFDC-412B4880A6E2}" sibTransId="{DE5569F3-1222-4D8E-AA9C-4B7C3D2C5FB0}"/>
-    <dgm:cxn modelId="{E3C1824B-6E33-4C75-B146-4F3BED0619A5}" srcId="{9986E0FA-0BDA-418C-BA42-538DDD18FF02}" destId="{25C3DAF5-B1D5-415D-9FE4-72F45554AEB2}" srcOrd="1" destOrd="0" parTransId="{C7E34383-D608-4237-BCBD-5007AAA11752}" sibTransId="{9274B0E9-A7B0-440D-BBC8-2787D4815662}"/>
-    <dgm:cxn modelId="{05576170-8720-498E-A61A-31D4350116AB}" srcId="{9986E0FA-0BDA-418C-BA42-538DDD18FF02}" destId="{7335A1FB-EED7-4DE3-9C06-F3EAA42D8F5E}" srcOrd="0" destOrd="0" parTransId="{054D5A81-1C9B-4756-A0CC-4201CF32F40D}" sibTransId="{826D559B-1EFD-4367-933C-22DB6B7634F0}"/>
-    <dgm:cxn modelId="{4B017D71-04AB-4DA2-814C-47CE98D6CE1E}" type="presOf" srcId="{7335A1FB-EED7-4DE3-9C06-F3EAA42D8F5E}" destId="{3ED45AF8-FE4C-4717-9FC0-0D99075E5BF5}" srcOrd="0" destOrd="0" presId="urn:microsoft.com/office/officeart/2008/layout/IncreasingCircleProcess"/>
-    <dgm:cxn modelId="{2E03D888-A455-496C-96EF-2B6A7B0EC8F8}" type="presOf" srcId="{25C3DAF5-B1D5-415D-9FE4-72F45554AEB2}" destId="{5EBEE6AC-A7EB-4506-AA0A-D5ED13ADA255}" srcOrd="0" destOrd="0" presId="urn:microsoft.com/office/officeart/2008/layout/IncreasingCircleProcess"/>
-    <dgm:cxn modelId="{49137FE1-090B-4154-A497-428B420D9B54}" srcId="{9A39324C-498B-4422-9993-CEF3E521F44E}" destId="{6FC474FF-1D63-4AA0-A644-29753C47E109}" srcOrd="0" destOrd="0" parTransId="{A952A94A-43F5-40D9-806D-5BD93BBEA2DB}" sibTransId="{13C21D75-F944-42DE-8980-09E0CF69EC97}"/>
-    <dgm:cxn modelId="{303853E5-8114-4C00-BD3D-FF0C405E4435}" type="presOf" srcId="{6583A78C-B33C-4935-99A6-DDC15D3E3644}" destId="{5B6AE87D-8DC8-464B-B873-D5C573F577EA}" srcOrd="0" destOrd="0" presId="urn:microsoft.com/office/officeart/2008/layout/IncreasingCircleProcess"/>
-    <dgm:cxn modelId="{5F0083F1-EEA0-44E7-ACA1-28F32CD4E2D7}" srcId="{25C3DAF5-B1D5-415D-9FE4-72F45554AEB2}" destId="{8BE04D66-E2F4-4CF2-8191-7FBD72F94FC5}" srcOrd="0" destOrd="0" parTransId="{085A42D5-32AD-4A85-BD67-FD4B98502C92}" sibTransId="{1502A3F4-A236-479A-B7F9-9D429B6F5E59}"/>
-    <dgm:cxn modelId="{8172E5F7-8039-4B30-8569-C1C3CC30E6B4}" srcId="{7335A1FB-EED7-4DE3-9C06-F3EAA42D8F5E}" destId="{6583A78C-B33C-4935-99A6-DDC15D3E3644}" srcOrd="0" destOrd="0" parTransId="{F01D1550-DFB5-48E1-A1BB-AA0A15A79AB3}" sibTransId="{E6C17513-BC73-4D10-A682-2B4F0DBDC2C3}"/>
-    <dgm:cxn modelId="{B12771FC-2C42-4052-ADA9-155F45D68965}" type="presOf" srcId="{9986E0FA-0BDA-418C-BA42-538DDD18FF02}" destId="{A3273CB6-B883-4290-B899-CA6BF643ABBB}" srcOrd="0" destOrd="0" presId="urn:microsoft.com/office/officeart/2008/layout/IncreasingCircleProcess"/>
-    <dgm:cxn modelId="{6BE2F6FC-78C2-4573-8E99-052135EF6E97}" type="presOf" srcId="{9A39324C-498B-4422-9993-CEF3E521F44E}" destId="{B72821BF-50F1-4870-B73F-053D7C3F5FFE}" srcOrd="0" destOrd="0" presId="urn:microsoft.com/office/officeart/2008/layout/IncreasingCircleProcess"/>
-    <dgm:cxn modelId="{849579B3-C00B-41D4-9BCC-BA22A02260CB}" type="presParOf" srcId="{A3273CB6-B883-4290-B899-CA6BF643ABBB}" destId="{2A42BFEF-A32F-4657-B803-7B2ACF41CE81}" srcOrd="0" destOrd="0" presId="urn:microsoft.com/office/officeart/2008/layout/IncreasingCircleProcess"/>
-    <dgm:cxn modelId="{2CAEF07B-3181-4037-896A-5C41D4EE2AB4}" type="presParOf" srcId="{2A42BFEF-A32F-4657-B803-7B2ACF41CE81}" destId="{4F8231EB-3CE0-4F91-9854-2FCA67C6C964}" srcOrd="0" destOrd="0" presId="urn:microsoft.com/office/officeart/2008/layout/IncreasingCircleProcess"/>
-    <dgm:cxn modelId="{8DB6CB14-3AD0-4154-BC45-4FFA734AEBDC}" type="presParOf" srcId="{2A42BFEF-A32F-4657-B803-7B2ACF41CE81}" destId="{4DB0A476-0581-49D1-97DA-A4DE8E5F3911}" srcOrd="1" destOrd="0" presId="urn:microsoft.com/office/officeart/2008/layout/IncreasingCircleProcess"/>
-    <dgm:cxn modelId="{A4CD9AC9-3A96-457D-9C86-94FCB0D7EB96}" type="presParOf" srcId="{2A42BFEF-A32F-4657-B803-7B2ACF41CE81}" destId="{5B6AE87D-8DC8-464B-B873-D5C573F577EA}" srcOrd="2" destOrd="0" presId="urn:microsoft.com/office/officeart/2008/layout/IncreasingCircleProcess"/>
-    <dgm:cxn modelId="{33EE69E9-85A6-4298-A5B5-51F0C4984204}" type="presParOf" srcId="{2A42BFEF-A32F-4657-B803-7B2ACF41CE81}" destId="{3ED45AF8-FE4C-4717-9FC0-0D99075E5BF5}" srcOrd="3" destOrd="0" presId="urn:microsoft.com/office/officeart/2008/layout/IncreasingCircleProcess"/>
-    <dgm:cxn modelId="{B5D81F2A-D487-43A3-9D28-3DAA187A3F5D}" type="presParOf" srcId="{A3273CB6-B883-4290-B899-CA6BF643ABBB}" destId="{E0677CC6-FEE5-4EEF-B6CB-E2D8089D361E}" srcOrd="1" destOrd="0" presId="urn:microsoft.com/office/officeart/2008/layout/IncreasingCircleProcess"/>
-    <dgm:cxn modelId="{6B8AC209-85D6-418E-97E1-9BF204C6A959}" type="presParOf" srcId="{A3273CB6-B883-4290-B899-CA6BF643ABBB}" destId="{8E3B5FC7-396D-4468-823D-F4B8E3ACE39C}" srcOrd="2" destOrd="0" presId="urn:microsoft.com/office/officeart/2008/layout/IncreasingCircleProcess"/>
-    <dgm:cxn modelId="{16C490F2-9E25-421B-9CF2-533566C0D4DC}" type="presParOf" srcId="{8E3B5FC7-396D-4468-823D-F4B8E3ACE39C}" destId="{35C8319C-DF4C-4551-A942-0EDF4B164AD0}" srcOrd="0" destOrd="0" presId="urn:microsoft.com/office/officeart/2008/layout/IncreasingCircleProcess"/>
-    <dgm:cxn modelId="{4BB1CDB8-3371-489B-99B7-2D3515DABE80}" type="presParOf" srcId="{8E3B5FC7-396D-4468-823D-F4B8E3ACE39C}" destId="{84B26A6A-4B88-4BA7-ABF6-80AE6059761A}" srcOrd="1" destOrd="0" presId="urn:microsoft.com/office/officeart/2008/layout/IncreasingCircleProcess"/>
-    <dgm:cxn modelId="{DCF818E4-7026-45A3-99CF-A3B77A39C8A5}" type="presParOf" srcId="{8E3B5FC7-396D-4468-823D-F4B8E3ACE39C}" destId="{B5FB0697-2FC2-42F7-BDF3-E76985CDF035}" srcOrd="2" destOrd="0" presId="urn:microsoft.com/office/officeart/2008/layout/IncreasingCircleProcess"/>
-    <dgm:cxn modelId="{92BD8AE2-94B5-40F4-A43A-23A1C13B553C}" type="presParOf" srcId="{8E3B5FC7-396D-4468-823D-F4B8E3ACE39C}" destId="{5EBEE6AC-A7EB-4506-AA0A-D5ED13ADA255}" srcOrd="3" destOrd="0" presId="urn:microsoft.com/office/officeart/2008/layout/IncreasingCircleProcess"/>
-    <dgm:cxn modelId="{0B1FC1D6-BE27-450D-A91B-E33B8C05EC30}" type="presParOf" srcId="{A3273CB6-B883-4290-B899-CA6BF643ABBB}" destId="{03057B8E-193C-48A4-AECC-482938470E25}" srcOrd="3" destOrd="0" presId="urn:microsoft.com/office/officeart/2008/layout/IncreasingCircleProcess"/>
-    <dgm:cxn modelId="{4D58D285-AFFD-417D-BFB8-09534969132F}" type="presParOf" srcId="{A3273CB6-B883-4290-B899-CA6BF643ABBB}" destId="{23C31225-01B3-4490-A532-B6774C34A8B6}" srcOrd="4" destOrd="0" presId="urn:microsoft.com/office/officeart/2008/layout/IncreasingCircleProcess"/>
-    <dgm:cxn modelId="{1AA0D7AA-07F1-4BF9-B9A2-4D7D3482EFE3}" type="presParOf" srcId="{23C31225-01B3-4490-A532-B6774C34A8B6}" destId="{6C95D7F6-90A1-4713-86D4-456E56977F9E}" srcOrd="0" destOrd="0" presId="urn:microsoft.com/office/officeart/2008/layout/IncreasingCircleProcess"/>
-    <dgm:cxn modelId="{F3FDDB1C-1B50-439B-8D89-1AE580264068}" type="presParOf" srcId="{23C31225-01B3-4490-A532-B6774C34A8B6}" destId="{2F794272-4F57-4451-BBE4-8203F3ECED97}" srcOrd="1" destOrd="0" presId="urn:microsoft.com/office/officeart/2008/layout/IncreasingCircleProcess"/>
-    <dgm:cxn modelId="{E33E5880-0C04-4A61-A936-6FF7BC9AB62F}" type="presParOf" srcId="{23C31225-01B3-4490-A532-B6774C34A8B6}" destId="{5D696007-246F-4C35-9886-67C0E2A9E05E}" srcOrd="2" destOrd="0" presId="urn:microsoft.com/office/officeart/2008/layout/IncreasingCircleProcess"/>
-    <dgm:cxn modelId="{FF9EF1DF-C2A9-4D5D-8A05-8B4C0EDCD702}" type="presParOf" srcId="{23C31225-01B3-4490-A532-B6774C34A8B6}" destId="{B72821BF-50F1-4870-B73F-053D7C3F5FFE}" srcOrd="3" destOrd="0" presId="urn:microsoft.com/office/officeart/2008/layout/IncreasingCircleProcess"/>
+    <dgm:cxn modelId="{99512729-F9EA-4F39-96A6-82336DCF7845}" type="presOf" srcId="{015D6240-DA03-42B6-9DEA-DD29A7AE06ED}" destId="{BF6F942A-DAA1-467D-A813-D80E4A10A270}" srcOrd="0" destOrd="0" presId="urn:microsoft.com/office/officeart/2008/layout/IncreasingCircleProcess"/>
+    <dgm:cxn modelId="{B53F7A3B-6389-4959-AE81-3E57EE9D7ECE}" type="presOf" srcId="{141ECBA5-91F9-4F47-8B54-898596A08D9D}" destId="{F7B20A09-93B0-4B89-8BED-77C245789921}" srcOrd="0" destOrd="0" presId="urn:microsoft.com/office/officeart/2008/layout/IncreasingCircleProcess"/>
+    <dgm:cxn modelId="{ADB98142-C04A-477A-BC17-5034BE18ACA5}" type="presOf" srcId="{37663761-B58F-4A7D-BE0B-986E735CEA03}" destId="{4E7340F6-9A6E-433E-A406-2FA8DBAF00C2}" srcOrd="0" destOrd="0" presId="urn:microsoft.com/office/officeart/2008/layout/IncreasingCircleProcess"/>
+    <dgm:cxn modelId="{E2099162-3C1C-4D61-B75F-DA826D4EBDC1}" type="presOf" srcId="{365942A2-A31B-4AB5-BB7F-A91CBBD8DC11}" destId="{6015518C-1A08-4E5E-9AE8-47929964CF72}" srcOrd="0" destOrd="0" presId="urn:microsoft.com/office/officeart/2008/layout/IncreasingCircleProcess"/>
+    <dgm:cxn modelId="{B9F9BF63-0549-46DB-A648-968EE587FF54}" srcId="{015D6240-DA03-42B6-9DEA-DD29A7AE06ED}" destId="{365942A2-A31B-4AB5-BB7F-A91CBBD8DC11}" srcOrd="0" destOrd="0" parTransId="{BEFBA1E0-09F3-4010-8352-41E5B7D71F97}" sibTransId="{7252A203-DD45-4513-9B47-134B0958ABE9}"/>
+    <dgm:cxn modelId="{0D739645-0310-4F21-BD63-F20E2A4E258C}" srcId="{141ECBA5-91F9-4F47-8B54-898596A08D9D}" destId="{37E5E37F-C7B8-4F12-BBAE-959D61B51915}" srcOrd="0" destOrd="0" parTransId="{CD3008C1-6B4F-4790-9B3D-1F6002760529}" sibTransId="{6419BBA1-882A-4EA5-BCE0-B04109FE3622}"/>
+    <dgm:cxn modelId="{609D9B68-F882-4935-B6C0-E4432C6F983B}" srcId="{0DD3D14F-65AE-4DFB-A219-E3315073D2A3}" destId="{37663761-B58F-4A7D-BE0B-986E735CEA03}" srcOrd="0" destOrd="0" parTransId="{2F9AEBFA-0EAA-40FC-8B73-BCCA55276D69}" sibTransId="{B85B39CB-2D06-4A91-8620-DD14182E11C7}"/>
+    <dgm:cxn modelId="{C9B28596-C344-4295-84B8-F6DA6DBF5C7B}" type="presOf" srcId="{3E0F075D-BCDB-40BC-8DC5-03303CBD345E}" destId="{AE001C91-1D9F-4A9C-958D-DD0EB6925FF1}" srcOrd="0" destOrd="0" presId="urn:microsoft.com/office/officeart/2008/layout/IncreasingCircleProcess"/>
+    <dgm:cxn modelId="{15F3E09B-F4AA-41C8-B7B7-9A99F1C4C2ED}" srcId="{3E0F075D-BCDB-40BC-8DC5-03303CBD345E}" destId="{0DD3D14F-65AE-4DFB-A219-E3315073D2A3}" srcOrd="1" destOrd="0" parTransId="{1EF11426-2302-4884-A323-48A8F898BE03}" sibTransId="{9ADC6558-090A-4036-8B43-F57755832FE2}"/>
+    <dgm:cxn modelId="{628CDFB1-A557-4F8C-946F-A62F697069EF}" srcId="{3E0F075D-BCDB-40BC-8DC5-03303CBD345E}" destId="{015D6240-DA03-42B6-9DEA-DD29A7AE06ED}" srcOrd="0" destOrd="0" parTransId="{EFEE050C-E2C8-427E-8BFC-4F3C8441E51A}" sibTransId="{D6E36454-9674-434A-A77B-ED184E000876}"/>
+    <dgm:cxn modelId="{C103E0D3-DF77-40C6-B131-EA1BEF669F8B}" type="presOf" srcId="{37E5E37F-C7B8-4F12-BBAE-959D61B51915}" destId="{E4E2A3B7-96F9-4989-A2C4-F2D2B219BA75}" srcOrd="0" destOrd="0" presId="urn:microsoft.com/office/officeart/2008/layout/IncreasingCircleProcess"/>
+    <dgm:cxn modelId="{91D8C2EC-D34B-43D6-9D93-64D02169C1AC}" srcId="{3E0F075D-BCDB-40BC-8DC5-03303CBD345E}" destId="{141ECBA5-91F9-4F47-8B54-898596A08D9D}" srcOrd="2" destOrd="0" parTransId="{9EC21B02-6214-4D69-B2C9-2538C6A66523}" sibTransId="{8C5C011E-AAE6-4639-8EFD-5C7C6D9BA7DA}"/>
+    <dgm:cxn modelId="{DCFFE0EE-2882-4D9D-BBA5-89BCD129E6A5}" type="presOf" srcId="{0DD3D14F-65AE-4DFB-A219-E3315073D2A3}" destId="{5B185A13-B5F2-4999-ACFC-EE52E3D69499}" srcOrd="0" destOrd="0" presId="urn:microsoft.com/office/officeart/2008/layout/IncreasingCircleProcess"/>
+    <dgm:cxn modelId="{F3DD87E7-A57B-4D36-87F0-68AE1BD8CE65}" type="presParOf" srcId="{AE001C91-1D9F-4A9C-958D-DD0EB6925FF1}" destId="{F415AA97-014C-4BDA-BF2B-8D129830700D}" srcOrd="0" destOrd="0" presId="urn:microsoft.com/office/officeart/2008/layout/IncreasingCircleProcess"/>
+    <dgm:cxn modelId="{84D3D47D-A67A-4865-B93C-0843DD5E0B77}" type="presParOf" srcId="{F415AA97-014C-4BDA-BF2B-8D129830700D}" destId="{13928B8B-99D9-4F5B-AD51-C2D1B8C98831}" srcOrd="0" destOrd="0" presId="urn:microsoft.com/office/officeart/2008/layout/IncreasingCircleProcess"/>
+    <dgm:cxn modelId="{014164B7-E2EF-48E1-A19E-EC7C0912A64F}" type="presParOf" srcId="{F415AA97-014C-4BDA-BF2B-8D129830700D}" destId="{B8538921-88AB-477C-9316-C6174802317E}" srcOrd="1" destOrd="0" presId="urn:microsoft.com/office/officeart/2008/layout/IncreasingCircleProcess"/>
+    <dgm:cxn modelId="{F00D445D-DEC8-44BF-BEE1-1BF57F6B8EEF}" type="presParOf" srcId="{F415AA97-014C-4BDA-BF2B-8D129830700D}" destId="{6015518C-1A08-4E5E-9AE8-47929964CF72}" srcOrd="2" destOrd="0" presId="urn:microsoft.com/office/officeart/2008/layout/IncreasingCircleProcess"/>
+    <dgm:cxn modelId="{8367A290-D816-4E6F-9E7E-878692840F39}" type="presParOf" srcId="{F415AA97-014C-4BDA-BF2B-8D129830700D}" destId="{BF6F942A-DAA1-467D-A813-D80E4A10A270}" srcOrd="3" destOrd="0" presId="urn:microsoft.com/office/officeart/2008/layout/IncreasingCircleProcess"/>
+    <dgm:cxn modelId="{287FD1FB-8F45-44D5-ABD0-44C69367769F}" type="presParOf" srcId="{AE001C91-1D9F-4A9C-958D-DD0EB6925FF1}" destId="{D8DB01C5-CA79-4631-8BE6-F2553A0B0048}" srcOrd="1" destOrd="0" presId="urn:microsoft.com/office/officeart/2008/layout/IncreasingCircleProcess"/>
+    <dgm:cxn modelId="{6A396618-31AF-4964-8959-80BC737DDE3D}" type="presParOf" srcId="{AE001C91-1D9F-4A9C-958D-DD0EB6925FF1}" destId="{E4E03E75-2737-4019-83EE-ECEFF5D20E1D}" srcOrd="2" destOrd="0" presId="urn:microsoft.com/office/officeart/2008/layout/IncreasingCircleProcess"/>
+    <dgm:cxn modelId="{532CAF29-FAF3-49AD-9524-F4E286873565}" type="presParOf" srcId="{E4E03E75-2737-4019-83EE-ECEFF5D20E1D}" destId="{C5EED73C-4D07-4A80-BDBA-0F8E701CF91D}" srcOrd="0" destOrd="0" presId="urn:microsoft.com/office/officeart/2008/layout/IncreasingCircleProcess"/>
+    <dgm:cxn modelId="{8BFD293B-C1BA-4FE6-954C-B58E4CFF4E35}" type="presParOf" srcId="{E4E03E75-2737-4019-83EE-ECEFF5D20E1D}" destId="{BB4733EE-AC16-4FC5-BFB3-A1ADC0880B0B}" srcOrd="1" destOrd="0" presId="urn:microsoft.com/office/officeart/2008/layout/IncreasingCircleProcess"/>
+    <dgm:cxn modelId="{95F6E611-ECF9-47E0-9D6C-33BC434D7FB9}" type="presParOf" srcId="{E4E03E75-2737-4019-83EE-ECEFF5D20E1D}" destId="{4E7340F6-9A6E-433E-A406-2FA8DBAF00C2}" srcOrd="2" destOrd="0" presId="urn:microsoft.com/office/officeart/2008/layout/IncreasingCircleProcess"/>
+    <dgm:cxn modelId="{EBAC9B3A-C329-4C95-BE06-EF77F6CE526D}" type="presParOf" srcId="{E4E03E75-2737-4019-83EE-ECEFF5D20E1D}" destId="{5B185A13-B5F2-4999-ACFC-EE52E3D69499}" srcOrd="3" destOrd="0" presId="urn:microsoft.com/office/officeart/2008/layout/IncreasingCircleProcess"/>
+    <dgm:cxn modelId="{E42F4A27-F678-41F4-8C46-98452AE20F65}" type="presParOf" srcId="{AE001C91-1D9F-4A9C-958D-DD0EB6925FF1}" destId="{75CE8DFA-149F-4D4C-8A1E-194AEFB40D1E}" srcOrd="3" destOrd="0" presId="urn:microsoft.com/office/officeart/2008/layout/IncreasingCircleProcess"/>
+    <dgm:cxn modelId="{B0F60E78-CF44-4310-9479-A9DF812AF6E2}" type="presParOf" srcId="{AE001C91-1D9F-4A9C-958D-DD0EB6925FF1}" destId="{0819BFD1-8CA1-44F6-988F-C8FED7A19B68}" srcOrd="4" destOrd="0" presId="urn:microsoft.com/office/officeart/2008/layout/IncreasingCircleProcess"/>
+    <dgm:cxn modelId="{4B3276B3-826C-4BCE-A8FB-971E6EDBB072}" type="presParOf" srcId="{0819BFD1-8CA1-44F6-988F-C8FED7A19B68}" destId="{171B63C5-631D-469A-9F4F-15BE63439720}" srcOrd="0" destOrd="0" presId="urn:microsoft.com/office/officeart/2008/layout/IncreasingCircleProcess"/>
+    <dgm:cxn modelId="{EC6F445B-7B06-4FBB-83B0-4175CF5C2334}" type="presParOf" srcId="{0819BFD1-8CA1-44F6-988F-C8FED7A19B68}" destId="{3C512A18-1021-4CAB-9F2D-6F9D12DF5A9D}" srcOrd="1" destOrd="0" presId="urn:microsoft.com/office/officeart/2008/layout/IncreasingCircleProcess"/>
+    <dgm:cxn modelId="{9EE05C58-2F26-420F-84C6-541337726DBD}" type="presParOf" srcId="{0819BFD1-8CA1-44F6-988F-C8FED7A19B68}" destId="{E4E2A3B7-96F9-4989-A2C4-F2D2B219BA75}" srcOrd="2" destOrd="0" presId="urn:microsoft.com/office/officeart/2008/layout/IncreasingCircleProcess"/>
+    <dgm:cxn modelId="{92A55E14-A563-4A65-99EC-28AA8EF00BD2}" type="presParOf" srcId="{0819BFD1-8CA1-44F6-988F-C8FED7A19B68}" destId="{F7B20A09-93B0-4B89-8BED-77C245789921}" srcOrd="3" destOrd="0" presId="urn:microsoft.com/office/officeart/2008/layout/IncreasingCircleProcess"/>
   </dgm:cxnLst>
   <dgm:bg/>
   <dgm:whole/>
@@ -3487,7 +3492,7 @@
 <file path=ppt/diagrams/data2.xml><?xml version="1.0" encoding="utf-8"?>
 <dgm:dataModel xmlns:dgm="http://schemas.openxmlformats.org/drawingml/2006/diagram" xmlns:a="http://schemas.openxmlformats.org/drawingml/2006/main">
   <dgm:ptLst>
-    <dgm:pt modelId="{37349473-D883-4816-A463-0C15A24EDC65}" type="doc">
+    <dgm:pt modelId="{F20B2F05-6AB1-4158-81FD-1CB385ACE642}" type="doc">
       <dgm:prSet loTypeId="urn:microsoft.com/office/officeart/2005/8/layout/hierarchy3" loCatId="hierarchy" qsTypeId="urn:microsoft.com/office/officeart/2005/8/quickstyle/simple1" qsCatId="simple" csTypeId="urn:microsoft.com/office/officeart/2005/8/colors/accent1_2" csCatId="accent1" phldr="1"/>
       <dgm:spPr/>
       <dgm:t>
@@ -3498,7 +3503,7 @@
         </a:p>
       </dgm:t>
     </dgm:pt>
-    <dgm:pt modelId="{534D2C72-A5DC-49BC-A7BA-A0A7D724538B}">
+    <dgm:pt modelId="{183B589A-80A6-42F5-B6A5-59541A70A9CB}">
       <dgm:prSet phldrT="[Text]"/>
       <dgm:spPr/>
       <dgm:t>
@@ -3512,7 +3517,7 @@
         </a:p>
       </dgm:t>
     </dgm:pt>
-    <dgm:pt modelId="{461C9A58-B04B-4289-8413-552A7BFAACD7}" type="parTrans" cxnId="{B2F9E59D-15C9-4D43-B7F8-71260B6A9608}">
+    <dgm:pt modelId="{72560BE5-18F1-4FE2-B3D6-E389C44CA67D}" type="parTrans" cxnId="{2A6990C0-9946-4500-BCEA-0FF92664CCD1}">
       <dgm:prSet/>
       <dgm:spPr/>
       <dgm:t>
@@ -3523,7 +3528,7 @@
         </a:p>
       </dgm:t>
     </dgm:pt>
-    <dgm:pt modelId="{7400ACD3-70B8-4C7C-9024-A7D5344EF650}" type="sibTrans" cxnId="{B2F9E59D-15C9-4D43-B7F8-71260B6A9608}">
+    <dgm:pt modelId="{BE983595-4724-4B9C-A04F-A5DD1A48E9E4}" type="sibTrans" cxnId="{2A6990C0-9946-4500-BCEA-0FF92664CCD1}">
       <dgm:prSet/>
       <dgm:spPr/>
       <dgm:t>
@@ -3534,7 +3539,7 @@
         </a:p>
       </dgm:t>
     </dgm:pt>
-    <dgm:pt modelId="{45B55983-9F99-4466-97CC-E9562B942667}">
+    <dgm:pt modelId="{D84398AA-58E0-4855-B45B-F0A4C9356173}">
       <dgm:prSet phldrT="[Text]"/>
       <dgm:spPr/>
       <dgm:t>
@@ -3548,7 +3553,7 @@
         </a:p>
       </dgm:t>
     </dgm:pt>
-    <dgm:pt modelId="{D54E9FD6-4688-4D4C-A333-0C97253A7DF8}" type="parTrans" cxnId="{5444F9C2-CE7B-4198-9466-F3054E1B5979}">
+    <dgm:pt modelId="{42D30908-A991-4159-A982-3996501CD656}" type="parTrans" cxnId="{558561DD-2D54-4521-9FFB-F3E7DB57B05C}">
       <dgm:prSet/>
       <dgm:spPr/>
       <dgm:t>
@@ -3559,7 +3564,7 @@
         </a:p>
       </dgm:t>
     </dgm:pt>
-    <dgm:pt modelId="{C014E950-4643-40F0-A5FD-A520E7AFBA5E}" type="sibTrans" cxnId="{5444F9C2-CE7B-4198-9466-F3054E1B5979}">
+    <dgm:pt modelId="{79F92556-33B4-4DE2-9C7E-C66C3A127FEA}" type="sibTrans" cxnId="{558561DD-2D54-4521-9FFB-F3E7DB57B05C}">
       <dgm:prSet/>
       <dgm:spPr/>
       <dgm:t>
@@ -3570,7 +3575,7 @@
         </a:p>
       </dgm:t>
     </dgm:pt>
-    <dgm:pt modelId="{61A21472-7F9F-4129-AE31-71B647EE3B3F}">
+    <dgm:pt modelId="{8F0D45A1-2763-4456-BE09-6C1302220405}">
       <dgm:prSet phldrT="[Text]"/>
       <dgm:spPr/>
       <dgm:t>
@@ -3584,7 +3589,7 @@
         </a:p>
       </dgm:t>
     </dgm:pt>
-    <dgm:pt modelId="{A53C24F7-0D99-4519-B3D9-FB69E7A182C0}" type="parTrans" cxnId="{5102C672-3988-46E5-9DB4-AF81B7660DE8}">
+    <dgm:pt modelId="{C56FD1B1-408F-46FC-8FD1-BCD2F7F58D09}" type="parTrans" cxnId="{CDC08F55-5E33-4BD7-8120-71AB13036872}">
       <dgm:prSet/>
       <dgm:spPr/>
       <dgm:t>
@@ -3595,7 +3600,7 @@
         </a:p>
       </dgm:t>
     </dgm:pt>
-    <dgm:pt modelId="{FDFB5F06-5229-415B-81E1-308621921818}" type="sibTrans" cxnId="{5102C672-3988-46E5-9DB4-AF81B7660DE8}">
+    <dgm:pt modelId="{A4522B62-13B5-45D6-953E-C8897A3BC1DA}" type="sibTrans" cxnId="{CDC08F55-5E33-4BD7-8120-71AB13036872}">
       <dgm:prSet/>
       <dgm:spPr/>
       <dgm:t>
@@ -3606,7 +3611,7 @@
         </a:p>
       </dgm:t>
     </dgm:pt>
-    <dgm:pt modelId="{E2B84B84-9D8E-4690-A824-87B100E169F7}">
+    <dgm:pt modelId="{432002E7-001D-4213-BE71-8DF49CC86377}">
       <dgm:prSet phldrT="[Text]"/>
       <dgm:spPr/>
       <dgm:t>
@@ -3620,7 +3625,7 @@
         </a:p>
       </dgm:t>
     </dgm:pt>
-    <dgm:pt modelId="{9ED507BA-1EC1-4D4F-807E-B04D1418053B}" type="parTrans" cxnId="{71DE435D-536D-450D-80C2-5EF5306899DE}">
+    <dgm:pt modelId="{1E89C041-4DB6-4218-83EE-193D59EEDFCB}" type="parTrans" cxnId="{01C22F00-29FB-4084-B67B-E945D1554A4E}">
       <dgm:prSet/>
       <dgm:spPr/>
       <dgm:t>
@@ -3631,7 +3636,7 @@
         </a:p>
       </dgm:t>
     </dgm:pt>
-    <dgm:pt modelId="{803EE5BC-2018-4819-B2EF-C404EB1F3EFD}" type="sibTrans" cxnId="{71DE435D-536D-450D-80C2-5EF5306899DE}">
+    <dgm:pt modelId="{8DE813C7-A336-43CC-A40E-F0F12DDA5D9A}" type="sibTrans" cxnId="{01C22F00-29FB-4084-B67B-E945D1554A4E}">
       <dgm:prSet/>
       <dgm:spPr/>
       <dgm:t>
@@ -3642,7 +3647,7 @@
         </a:p>
       </dgm:t>
     </dgm:pt>
-    <dgm:pt modelId="{C58BCD76-30E2-4B3A-B019-07AC5431B5E0}">
+    <dgm:pt modelId="{3C69ECDE-2C59-45CE-A6D9-C476BEC2E535}">
       <dgm:prSet phldrT="[Text]" phldr="1"/>
       <dgm:spPr/>
       <dgm:t>
@@ -3653,7 +3658,7 @@
         </a:p>
       </dgm:t>
     </dgm:pt>
-    <dgm:pt modelId="{90DA2489-F9D5-467C-A448-6B56781DA21B}" type="parTrans" cxnId="{94085273-82D5-4795-9D55-26522FF63435}">
+    <dgm:pt modelId="{86CBA0AD-2679-4F58-B94C-C71507C43C68}" type="parTrans" cxnId="{C1CC20D0-F132-4020-9B0F-0C40A7E474C5}">
       <dgm:prSet/>
       <dgm:spPr/>
       <dgm:t>
@@ -3664,7 +3669,7 @@
         </a:p>
       </dgm:t>
     </dgm:pt>
-    <dgm:pt modelId="{60D6A496-BC88-46F1-9049-D12310DE7787}" type="sibTrans" cxnId="{94085273-82D5-4795-9D55-26522FF63435}">
+    <dgm:pt modelId="{22B8204E-1B27-42FE-A0F2-A566F1567544}" type="sibTrans" cxnId="{C1CC20D0-F132-4020-9B0F-0C40A7E474C5}">
       <dgm:prSet/>
       <dgm:spPr/>
       <dgm:t>
@@ -3675,7 +3680,7 @@
         </a:p>
       </dgm:t>
     </dgm:pt>
-    <dgm:pt modelId="{7931D355-A19E-4053-9423-7937793ED756}">
+    <dgm:pt modelId="{3B1D60FF-8256-42F3-BFBB-4DCCC5A72E58}">
       <dgm:prSet phldrT="[Text]" phldr="1"/>
       <dgm:spPr/>
       <dgm:t>
@@ -3686,7 +3691,7 @@
         </a:p>
       </dgm:t>
     </dgm:pt>
-    <dgm:pt modelId="{BF19A5AE-410F-46B2-873A-4935968E4BCC}" type="parTrans" cxnId="{DF20D164-91A8-483D-89F1-E699CC74C99C}">
+    <dgm:pt modelId="{B249091D-E8B7-4FD0-87B0-B7761AA18A60}" type="parTrans" cxnId="{0A4D7E54-8915-473A-AEAC-6050B275D51B}">
       <dgm:prSet/>
       <dgm:spPr/>
       <dgm:t>
@@ -3697,7 +3702,7 @@
         </a:p>
       </dgm:t>
     </dgm:pt>
-    <dgm:pt modelId="{3E44C20F-9698-4ACB-AAA1-0058F94E2B77}" type="sibTrans" cxnId="{DF20D164-91A8-483D-89F1-E699CC74C99C}">
+    <dgm:pt modelId="{CB3B49D0-6055-423B-AE59-A647ED5243FE}" type="sibTrans" cxnId="{0A4D7E54-8915-473A-AEAC-6050B275D51B}">
       <dgm:prSet/>
       <dgm:spPr/>
       <dgm:t>
@@ -3708,8 +3713,8 @@
         </a:p>
       </dgm:t>
     </dgm:pt>
-    <dgm:pt modelId="{F245AF5F-DE36-47BE-BE51-B111498824B1}" type="pres">
-      <dgm:prSet presAssocID="{37349473-D883-4816-A463-0C15A24EDC65}" presName="diagram" presStyleCnt="0">
+    <dgm:pt modelId="{3E35C587-33C0-486C-813B-341C36FEC11E}" type="pres">
+      <dgm:prSet presAssocID="{F20B2F05-6AB1-4158-81FD-1CB385ACE642}" presName="diagram" presStyleCnt="0">
         <dgm:presLayoutVars>
           <dgm:chPref val="1"/>
           <dgm:dir/>
@@ -3720,88 +3725,88 @@
       </dgm:prSet>
       <dgm:spPr/>
     </dgm:pt>
-    <dgm:pt modelId="{DC6F3C24-7523-44DF-B9FC-F3BF2520B356}" type="pres">
-      <dgm:prSet presAssocID="{534D2C72-A5DC-49BC-A7BA-A0A7D724538B}" presName="root" presStyleCnt="0"/>
+    <dgm:pt modelId="{93B1AFDA-B74F-453D-BA91-E22DFE2A4BE4}" type="pres">
+      <dgm:prSet presAssocID="{183B589A-80A6-42F5-B6A5-59541A70A9CB}" presName="root" presStyleCnt="0"/>
       <dgm:spPr/>
     </dgm:pt>
-    <dgm:pt modelId="{2FC91E5A-2A53-4E54-ABEB-80F89CF65EEF}" type="pres">
-      <dgm:prSet presAssocID="{534D2C72-A5DC-49BC-A7BA-A0A7D724538B}" presName="rootComposite" presStyleCnt="0"/>
+    <dgm:pt modelId="{EA112394-318A-4711-9C46-EEE99DC40966}" type="pres">
+      <dgm:prSet presAssocID="{183B589A-80A6-42F5-B6A5-59541A70A9CB}" presName="rootComposite" presStyleCnt="0"/>
       <dgm:spPr/>
     </dgm:pt>
-    <dgm:pt modelId="{F848075B-122D-453D-A631-F3627336B129}" type="pres">
-      <dgm:prSet presAssocID="{534D2C72-A5DC-49BC-A7BA-A0A7D724538B}" presName="rootText" presStyleLbl="node1" presStyleIdx="0" presStyleCnt="2"/>
+    <dgm:pt modelId="{3BBFCB52-02FC-4FBF-9261-DC3C26CF9450}" type="pres">
+      <dgm:prSet presAssocID="{183B589A-80A6-42F5-B6A5-59541A70A9CB}" presName="rootText" presStyleLbl="node1" presStyleIdx="0" presStyleCnt="2"/>
       <dgm:spPr/>
     </dgm:pt>
-    <dgm:pt modelId="{8A9CA754-5B60-454F-9D31-E36126E2AA4E}" type="pres">
-      <dgm:prSet presAssocID="{534D2C72-A5DC-49BC-A7BA-A0A7D724538B}" presName="rootConnector" presStyleLbl="node1" presStyleIdx="0" presStyleCnt="2"/>
+    <dgm:pt modelId="{D35E0319-3AA0-4B7E-AC11-3E0F5FB227FF}" type="pres">
+      <dgm:prSet presAssocID="{183B589A-80A6-42F5-B6A5-59541A70A9CB}" presName="rootConnector" presStyleLbl="node1" presStyleIdx="0" presStyleCnt="2"/>
       <dgm:spPr/>
     </dgm:pt>
-    <dgm:pt modelId="{1B9B8155-66ED-486E-88D4-E5F16F373E4D}" type="pres">
-      <dgm:prSet presAssocID="{534D2C72-A5DC-49BC-A7BA-A0A7D724538B}" presName="childShape" presStyleCnt="0"/>
+    <dgm:pt modelId="{470C4308-5BF3-44CD-BD6F-18E4B4C2ACEB}" type="pres">
+      <dgm:prSet presAssocID="{183B589A-80A6-42F5-B6A5-59541A70A9CB}" presName="childShape" presStyleCnt="0"/>
       <dgm:spPr/>
     </dgm:pt>
-    <dgm:pt modelId="{BE75C443-C2DB-477D-B893-B14DBDB7CDD3}" type="pres">
-      <dgm:prSet presAssocID="{D54E9FD6-4688-4D4C-A333-0C97253A7DF8}" presName="Name13" presStyleLbl="parChTrans1D2" presStyleIdx="0" presStyleCnt="4"/>
+    <dgm:pt modelId="{97B19CC5-E5F5-41D7-B6CF-8FB86B4F6191}" type="pres">
+      <dgm:prSet presAssocID="{42D30908-A991-4159-A982-3996501CD656}" presName="Name13" presStyleLbl="parChTrans1D2" presStyleIdx="0" presStyleCnt="4"/>
       <dgm:spPr/>
     </dgm:pt>
-    <dgm:pt modelId="{7D6DCFF5-03A0-4B98-AE49-17B92EE6E429}" type="pres">
-      <dgm:prSet presAssocID="{45B55983-9F99-4466-97CC-E9562B942667}" presName="childText" presStyleLbl="bgAcc1" presStyleIdx="0" presStyleCnt="4">
+    <dgm:pt modelId="{FBFD10FE-FEB6-42DF-BFFF-FD6922243D9E}" type="pres">
+      <dgm:prSet presAssocID="{D84398AA-58E0-4855-B45B-F0A4C9356173}" presName="childText" presStyleLbl="bgAcc1" presStyleIdx="0" presStyleCnt="4">
         <dgm:presLayoutVars>
           <dgm:bulletEnabled val="1"/>
         </dgm:presLayoutVars>
       </dgm:prSet>
       <dgm:spPr/>
     </dgm:pt>
-    <dgm:pt modelId="{786E06C5-DAEE-4C21-91B2-E3E3F6B45B37}" type="pres">
-      <dgm:prSet presAssocID="{A53C24F7-0D99-4519-B3D9-FB69E7A182C0}" presName="Name13" presStyleLbl="parChTrans1D2" presStyleIdx="1" presStyleCnt="4"/>
+    <dgm:pt modelId="{BB25DAD5-CC61-4586-B127-D114D32E8C05}" type="pres">
+      <dgm:prSet presAssocID="{C56FD1B1-408F-46FC-8FD1-BCD2F7F58D09}" presName="Name13" presStyleLbl="parChTrans1D2" presStyleIdx="1" presStyleCnt="4"/>
       <dgm:spPr/>
     </dgm:pt>
-    <dgm:pt modelId="{DF2E0F93-0E94-48A9-8A74-73D0B71F6086}" type="pres">
-      <dgm:prSet presAssocID="{61A21472-7F9F-4129-AE31-71B647EE3B3F}" presName="childText" presStyleLbl="bgAcc1" presStyleIdx="1" presStyleCnt="4">
+    <dgm:pt modelId="{50BCA223-E11A-46C2-90D6-9753E8DA26C6}" type="pres">
+      <dgm:prSet presAssocID="{8F0D45A1-2763-4456-BE09-6C1302220405}" presName="childText" presStyleLbl="bgAcc1" presStyleIdx="1" presStyleCnt="4">
         <dgm:presLayoutVars>
           <dgm:bulletEnabled val="1"/>
         </dgm:presLayoutVars>
       </dgm:prSet>
       <dgm:spPr/>
     </dgm:pt>
-    <dgm:pt modelId="{BD96A3E0-0A5C-4263-B93B-937A8FBAFFBF}" type="pres">
-      <dgm:prSet presAssocID="{E2B84B84-9D8E-4690-A824-87B100E169F7}" presName="root" presStyleCnt="0"/>
+    <dgm:pt modelId="{C4E674FF-6933-4E81-9974-58858D59FE46}" type="pres">
+      <dgm:prSet presAssocID="{432002E7-001D-4213-BE71-8DF49CC86377}" presName="root" presStyleCnt="0"/>
       <dgm:spPr/>
     </dgm:pt>
-    <dgm:pt modelId="{1D807B4E-4E1B-4E6F-883F-D328AE66E85A}" type="pres">
-      <dgm:prSet presAssocID="{E2B84B84-9D8E-4690-A824-87B100E169F7}" presName="rootComposite" presStyleCnt="0"/>
+    <dgm:pt modelId="{E2D7923B-FC9B-4D7E-BCE3-77F87DAE85D3}" type="pres">
+      <dgm:prSet presAssocID="{432002E7-001D-4213-BE71-8DF49CC86377}" presName="rootComposite" presStyleCnt="0"/>
       <dgm:spPr/>
     </dgm:pt>
-    <dgm:pt modelId="{C05D6E24-5975-4E7C-9E2C-D017BB42C878}" type="pres">
-      <dgm:prSet presAssocID="{E2B84B84-9D8E-4690-A824-87B100E169F7}" presName="rootText" presStyleLbl="node1" presStyleIdx="1" presStyleCnt="2"/>
+    <dgm:pt modelId="{31C77B65-7606-4162-9DE9-6E45F042A5C0}" type="pres">
+      <dgm:prSet presAssocID="{432002E7-001D-4213-BE71-8DF49CC86377}" presName="rootText" presStyleLbl="node1" presStyleIdx="1" presStyleCnt="2"/>
       <dgm:spPr/>
     </dgm:pt>
-    <dgm:pt modelId="{4726D325-C57F-4AAF-891C-99CD786C270A}" type="pres">
-      <dgm:prSet presAssocID="{E2B84B84-9D8E-4690-A824-87B100E169F7}" presName="rootConnector" presStyleLbl="node1" presStyleIdx="1" presStyleCnt="2"/>
+    <dgm:pt modelId="{2D5C6BCB-7BBF-4A9D-B591-210458BCED67}" type="pres">
+      <dgm:prSet presAssocID="{432002E7-001D-4213-BE71-8DF49CC86377}" presName="rootConnector" presStyleLbl="node1" presStyleIdx="1" presStyleCnt="2"/>
       <dgm:spPr/>
     </dgm:pt>
-    <dgm:pt modelId="{A8F20C6E-4C4A-434F-A02D-4FC640ACE660}" type="pres">
-      <dgm:prSet presAssocID="{E2B84B84-9D8E-4690-A824-87B100E169F7}" presName="childShape" presStyleCnt="0"/>
+    <dgm:pt modelId="{8F0BC7B0-818E-424D-B52A-009E8445CB81}" type="pres">
+      <dgm:prSet presAssocID="{432002E7-001D-4213-BE71-8DF49CC86377}" presName="childShape" presStyleCnt="0"/>
       <dgm:spPr/>
     </dgm:pt>
-    <dgm:pt modelId="{5D65F3E8-6D91-45D9-9ED7-2E9BF89EA528}" type="pres">
-      <dgm:prSet presAssocID="{90DA2489-F9D5-467C-A448-6B56781DA21B}" presName="Name13" presStyleLbl="parChTrans1D2" presStyleIdx="2" presStyleCnt="4"/>
+    <dgm:pt modelId="{E366FA6F-D514-4722-ADD2-8B8C4E7DB876}" type="pres">
+      <dgm:prSet presAssocID="{86CBA0AD-2679-4F58-B94C-C71507C43C68}" presName="Name13" presStyleLbl="parChTrans1D2" presStyleIdx="2" presStyleCnt="4"/>
       <dgm:spPr/>
     </dgm:pt>
-    <dgm:pt modelId="{CDEBAF4D-8D8F-4092-A954-0C7F15AE902D}" type="pres">
-      <dgm:prSet presAssocID="{C58BCD76-30E2-4B3A-B019-07AC5431B5E0}" presName="childText" presStyleLbl="bgAcc1" presStyleIdx="2" presStyleCnt="4">
+    <dgm:pt modelId="{9ADBB84D-DE6C-4B9A-B5B0-B3B2A94CC975}" type="pres">
+      <dgm:prSet presAssocID="{3C69ECDE-2C59-45CE-A6D9-C476BEC2E535}" presName="childText" presStyleLbl="bgAcc1" presStyleIdx="2" presStyleCnt="4">
         <dgm:presLayoutVars>
           <dgm:bulletEnabled val="1"/>
         </dgm:presLayoutVars>
       </dgm:prSet>
       <dgm:spPr/>
     </dgm:pt>
-    <dgm:pt modelId="{806B75C1-4C46-4B8E-9CE6-18E25F711339}" type="pres">
-      <dgm:prSet presAssocID="{BF19A5AE-410F-46B2-873A-4935968E4BCC}" presName="Name13" presStyleLbl="parChTrans1D2" presStyleIdx="3" presStyleCnt="4"/>
+    <dgm:pt modelId="{D87CB2CE-737E-461A-B20C-8B63923DECC7}" type="pres">
+      <dgm:prSet presAssocID="{B249091D-E8B7-4FD0-87B0-B7761AA18A60}" presName="Name13" presStyleLbl="parChTrans1D2" presStyleIdx="3" presStyleCnt="4"/>
       <dgm:spPr/>
     </dgm:pt>
-    <dgm:pt modelId="{FEFF3AFD-B1E3-4F9D-8AAF-35DCE9D25457}" type="pres">
-      <dgm:prSet presAssocID="{7931D355-A19E-4053-9423-7937793ED756}" presName="childText" presStyleLbl="bgAcc1" presStyleIdx="3" presStyleCnt="4">
+    <dgm:pt modelId="{F3B2C1E5-3812-495B-A0F3-D6725C26DD31}" type="pres">
+      <dgm:prSet presAssocID="{3B1D60FF-8256-42F3-BFBB-4DCCC5A72E58}" presName="childText" presStyleLbl="bgAcc1" presStyleIdx="3" presStyleCnt="4">
         <dgm:presLayoutVars>
           <dgm:bulletEnabled val="1"/>
         </dgm:presLayoutVars>
@@ -3810,43 +3815,43 @@
     </dgm:pt>
   </dgm:ptLst>
   <dgm:cxnLst>
-    <dgm:cxn modelId="{1D4A8C02-FF07-4E3C-B0F1-58B0D96546B6}" type="presOf" srcId="{61A21472-7F9F-4129-AE31-71B647EE3B3F}" destId="{DF2E0F93-0E94-48A9-8A74-73D0B71F6086}" srcOrd="0" destOrd="0" presId="urn:microsoft.com/office/officeart/2005/8/layout/hierarchy3"/>
-    <dgm:cxn modelId="{8CC80709-A3D0-4C4D-8402-727109FC1AA3}" type="presOf" srcId="{E2B84B84-9D8E-4690-A824-87B100E169F7}" destId="{4726D325-C57F-4AAF-891C-99CD786C270A}" srcOrd="1" destOrd="0" presId="urn:microsoft.com/office/officeart/2005/8/layout/hierarchy3"/>
-    <dgm:cxn modelId="{8266DF0B-A566-409A-8344-8E7064AB5A1B}" type="presOf" srcId="{7931D355-A19E-4053-9423-7937793ED756}" destId="{FEFF3AFD-B1E3-4F9D-8AAF-35DCE9D25457}" srcOrd="0" destOrd="0" presId="urn:microsoft.com/office/officeart/2005/8/layout/hierarchy3"/>
-    <dgm:cxn modelId="{71DE435D-536D-450D-80C2-5EF5306899DE}" srcId="{37349473-D883-4816-A463-0C15A24EDC65}" destId="{E2B84B84-9D8E-4690-A824-87B100E169F7}" srcOrd="1" destOrd="0" parTransId="{9ED507BA-1EC1-4D4F-807E-B04D1418053B}" sibTransId="{803EE5BC-2018-4819-B2EF-C404EB1F3EFD}"/>
-    <dgm:cxn modelId="{DF20D164-91A8-483D-89F1-E699CC74C99C}" srcId="{E2B84B84-9D8E-4690-A824-87B100E169F7}" destId="{7931D355-A19E-4053-9423-7937793ED756}" srcOrd="1" destOrd="0" parTransId="{BF19A5AE-410F-46B2-873A-4935968E4BCC}" sibTransId="{3E44C20F-9698-4ACB-AAA1-0058F94E2B77}"/>
-    <dgm:cxn modelId="{E56E6845-41AB-49B6-A443-CFF773A2E531}" type="presOf" srcId="{90DA2489-F9D5-467C-A448-6B56781DA21B}" destId="{5D65F3E8-6D91-45D9-9ED7-2E9BF89EA528}" srcOrd="0" destOrd="0" presId="urn:microsoft.com/office/officeart/2005/8/layout/hierarchy3"/>
-    <dgm:cxn modelId="{5102C672-3988-46E5-9DB4-AF81B7660DE8}" srcId="{534D2C72-A5DC-49BC-A7BA-A0A7D724538B}" destId="{61A21472-7F9F-4129-AE31-71B647EE3B3F}" srcOrd="1" destOrd="0" parTransId="{A53C24F7-0D99-4519-B3D9-FB69E7A182C0}" sibTransId="{FDFB5F06-5229-415B-81E1-308621921818}"/>
-    <dgm:cxn modelId="{94085273-82D5-4795-9D55-26522FF63435}" srcId="{E2B84B84-9D8E-4690-A824-87B100E169F7}" destId="{C58BCD76-30E2-4B3A-B019-07AC5431B5E0}" srcOrd="0" destOrd="0" parTransId="{90DA2489-F9D5-467C-A448-6B56781DA21B}" sibTransId="{60D6A496-BC88-46F1-9049-D12310DE7787}"/>
-    <dgm:cxn modelId="{B49D3155-01C7-4B5A-869A-8DB8BF49C772}" type="presOf" srcId="{534D2C72-A5DC-49BC-A7BA-A0A7D724538B}" destId="{F848075B-122D-453D-A631-F3627336B129}" srcOrd="0" destOrd="0" presId="urn:microsoft.com/office/officeart/2005/8/layout/hierarchy3"/>
-    <dgm:cxn modelId="{12202482-FC76-4308-9822-6E29549F18DE}" type="presOf" srcId="{E2B84B84-9D8E-4690-A824-87B100E169F7}" destId="{C05D6E24-5975-4E7C-9E2C-D017BB42C878}" srcOrd="0" destOrd="0" presId="urn:microsoft.com/office/officeart/2005/8/layout/hierarchy3"/>
-    <dgm:cxn modelId="{A9AACA87-24D3-4142-AD64-C82177127920}" type="presOf" srcId="{BF19A5AE-410F-46B2-873A-4935968E4BCC}" destId="{806B75C1-4C46-4B8E-9CE6-18E25F711339}" srcOrd="0" destOrd="0" presId="urn:microsoft.com/office/officeart/2005/8/layout/hierarchy3"/>
-    <dgm:cxn modelId="{B2F9E59D-15C9-4D43-B7F8-71260B6A9608}" srcId="{37349473-D883-4816-A463-0C15A24EDC65}" destId="{534D2C72-A5DC-49BC-A7BA-A0A7D724538B}" srcOrd="0" destOrd="0" parTransId="{461C9A58-B04B-4289-8413-552A7BFAACD7}" sibTransId="{7400ACD3-70B8-4C7C-9024-A7D5344EF650}"/>
-    <dgm:cxn modelId="{5444F9C2-CE7B-4198-9466-F3054E1B5979}" srcId="{534D2C72-A5DC-49BC-A7BA-A0A7D724538B}" destId="{45B55983-9F99-4466-97CC-E9562B942667}" srcOrd="0" destOrd="0" parTransId="{D54E9FD6-4688-4D4C-A333-0C97253A7DF8}" sibTransId="{C014E950-4643-40F0-A5FD-A520E7AFBA5E}"/>
-    <dgm:cxn modelId="{109B95C4-5AE9-400C-85DE-AD9D02F6C7BB}" type="presOf" srcId="{D54E9FD6-4688-4D4C-A333-0C97253A7DF8}" destId="{BE75C443-C2DB-477D-B893-B14DBDB7CDD3}" srcOrd="0" destOrd="0" presId="urn:microsoft.com/office/officeart/2005/8/layout/hierarchy3"/>
-    <dgm:cxn modelId="{DB607ACD-C1B0-4546-B696-061A34B55DDC}" type="presOf" srcId="{C58BCD76-30E2-4B3A-B019-07AC5431B5E0}" destId="{CDEBAF4D-8D8F-4092-A954-0C7F15AE902D}" srcOrd="0" destOrd="0" presId="urn:microsoft.com/office/officeart/2005/8/layout/hierarchy3"/>
-    <dgm:cxn modelId="{F77BB8D1-315F-4CCC-888D-E557DECE7D6B}" type="presOf" srcId="{37349473-D883-4816-A463-0C15A24EDC65}" destId="{F245AF5F-DE36-47BE-BE51-B111498824B1}" srcOrd="0" destOrd="0" presId="urn:microsoft.com/office/officeart/2005/8/layout/hierarchy3"/>
-    <dgm:cxn modelId="{971CB2D5-D88F-4A30-917E-83A92E1F2F9F}" type="presOf" srcId="{A53C24F7-0D99-4519-B3D9-FB69E7A182C0}" destId="{786E06C5-DAEE-4C21-91B2-E3E3F6B45B37}" srcOrd="0" destOrd="0" presId="urn:microsoft.com/office/officeart/2005/8/layout/hierarchy3"/>
-    <dgm:cxn modelId="{D29D39E4-F972-435F-96E0-70629A9B75B5}" type="presOf" srcId="{534D2C72-A5DC-49BC-A7BA-A0A7D724538B}" destId="{8A9CA754-5B60-454F-9D31-E36126E2AA4E}" srcOrd="1" destOrd="0" presId="urn:microsoft.com/office/officeart/2005/8/layout/hierarchy3"/>
-    <dgm:cxn modelId="{FA39E0EB-253B-4ABB-AB68-40D2E510A3C0}" type="presOf" srcId="{45B55983-9F99-4466-97CC-E9562B942667}" destId="{7D6DCFF5-03A0-4B98-AE49-17B92EE6E429}" srcOrd="0" destOrd="0" presId="urn:microsoft.com/office/officeart/2005/8/layout/hierarchy3"/>
-    <dgm:cxn modelId="{58D15E74-1141-473A-B7EB-C24966F98B88}" type="presParOf" srcId="{F245AF5F-DE36-47BE-BE51-B111498824B1}" destId="{DC6F3C24-7523-44DF-B9FC-F3BF2520B356}" srcOrd="0" destOrd="0" presId="urn:microsoft.com/office/officeart/2005/8/layout/hierarchy3"/>
-    <dgm:cxn modelId="{C5439204-F6E1-404B-BD24-3EC4A5F5E4E3}" type="presParOf" srcId="{DC6F3C24-7523-44DF-B9FC-F3BF2520B356}" destId="{2FC91E5A-2A53-4E54-ABEB-80F89CF65EEF}" srcOrd="0" destOrd="0" presId="urn:microsoft.com/office/officeart/2005/8/layout/hierarchy3"/>
-    <dgm:cxn modelId="{AE136DD5-25DC-4668-9EF5-964A77B6B470}" type="presParOf" srcId="{2FC91E5A-2A53-4E54-ABEB-80F89CF65EEF}" destId="{F848075B-122D-453D-A631-F3627336B129}" srcOrd="0" destOrd="0" presId="urn:microsoft.com/office/officeart/2005/8/layout/hierarchy3"/>
-    <dgm:cxn modelId="{2DA9C200-408B-4CEA-B438-2CC1661AB271}" type="presParOf" srcId="{2FC91E5A-2A53-4E54-ABEB-80F89CF65EEF}" destId="{8A9CA754-5B60-454F-9D31-E36126E2AA4E}" srcOrd="1" destOrd="0" presId="urn:microsoft.com/office/officeart/2005/8/layout/hierarchy3"/>
-    <dgm:cxn modelId="{DAF8A9E4-962E-47B4-B02D-C52BF296E882}" type="presParOf" srcId="{DC6F3C24-7523-44DF-B9FC-F3BF2520B356}" destId="{1B9B8155-66ED-486E-88D4-E5F16F373E4D}" srcOrd="1" destOrd="0" presId="urn:microsoft.com/office/officeart/2005/8/layout/hierarchy3"/>
-    <dgm:cxn modelId="{2543424E-3C37-4528-B066-59E5BA09D9B0}" type="presParOf" srcId="{1B9B8155-66ED-486E-88D4-E5F16F373E4D}" destId="{BE75C443-C2DB-477D-B893-B14DBDB7CDD3}" srcOrd="0" destOrd="0" presId="urn:microsoft.com/office/officeart/2005/8/layout/hierarchy3"/>
-    <dgm:cxn modelId="{A8D59D3B-9774-4F65-B77A-02CA6925F892}" type="presParOf" srcId="{1B9B8155-66ED-486E-88D4-E5F16F373E4D}" destId="{7D6DCFF5-03A0-4B98-AE49-17B92EE6E429}" srcOrd="1" destOrd="0" presId="urn:microsoft.com/office/officeart/2005/8/layout/hierarchy3"/>
-    <dgm:cxn modelId="{AAA8B6A9-4233-4FD3-B957-80ECDD784976}" type="presParOf" srcId="{1B9B8155-66ED-486E-88D4-E5F16F373E4D}" destId="{786E06C5-DAEE-4C21-91B2-E3E3F6B45B37}" srcOrd="2" destOrd="0" presId="urn:microsoft.com/office/officeart/2005/8/layout/hierarchy3"/>
-    <dgm:cxn modelId="{EDC5CA66-83D4-49AA-BC74-D8786301B663}" type="presParOf" srcId="{1B9B8155-66ED-486E-88D4-E5F16F373E4D}" destId="{DF2E0F93-0E94-48A9-8A74-73D0B71F6086}" srcOrd="3" destOrd="0" presId="urn:microsoft.com/office/officeart/2005/8/layout/hierarchy3"/>
-    <dgm:cxn modelId="{7D795612-67E0-4227-8FAE-9F94FC3620D8}" type="presParOf" srcId="{F245AF5F-DE36-47BE-BE51-B111498824B1}" destId="{BD96A3E0-0A5C-4263-B93B-937A8FBAFFBF}" srcOrd="1" destOrd="0" presId="urn:microsoft.com/office/officeart/2005/8/layout/hierarchy3"/>
-    <dgm:cxn modelId="{67FE0E8D-4F55-4DF9-AC02-FD788E87F2E6}" type="presParOf" srcId="{BD96A3E0-0A5C-4263-B93B-937A8FBAFFBF}" destId="{1D807B4E-4E1B-4E6F-883F-D328AE66E85A}" srcOrd="0" destOrd="0" presId="urn:microsoft.com/office/officeart/2005/8/layout/hierarchy3"/>
-    <dgm:cxn modelId="{89EE94A9-7FEC-4FE8-98B5-59EF8EE638D0}" type="presParOf" srcId="{1D807B4E-4E1B-4E6F-883F-D328AE66E85A}" destId="{C05D6E24-5975-4E7C-9E2C-D017BB42C878}" srcOrd="0" destOrd="0" presId="urn:microsoft.com/office/officeart/2005/8/layout/hierarchy3"/>
-    <dgm:cxn modelId="{771C9FDB-9C27-4F4E-9483-C2287AD08D61}" type="presParOf" srcId="{1D807B4E-4E1B-4E6F-883F-D328AE66E85A}" destId="{4726D325-C57F-4AAF-891C-99CD786C270A}" srcOrd="1" destOrd="0" presId="urn:microsoft.com/office/officeart/2005/8/layout/hierarchy3"/>
-    <dgm:cxn modelId="{D879BB7C-2570-4DF4-9E3F-6E5752619EEA}" type="presParOf" srcId="{BD96A3E0-0A5C-4263-B93B-937A8FBAFFBF}" destId="{A8F20C6E-4C4A-434F-A02D-4FC640ACE660}" srcOrd="1" destOrd="0" presId="urn:microsoft.com/office/officeart/2005/8/layout/hierarchy3"/>
-    <dgm:cxn modelId="{0699605A-840B-4680-B7DC-97520940703A}" type="presParOf" srcId="{A8F20C6E-4C4A-434F-A02D-4FC640ACE660}" destId="{5D65F3E8-6D91-45D9-9ED7-2E9BF89EA528}" srcOrd="0" destOrd="0" presId="urn:microsoft.com/office/officeart/2005/8/layout/hierarchy3"/>
-    <dgm:cxn modelId="{4EB70E08-3490-44AD-A283-86611E4D3F65}" type="presParOf" srcId="{A8F20C6E-4C4A-434F-A02D-4FC640ACE660}" destId="{CDEBAF4D-8D8F-4092-A954-0C7F15AE902D}" srcOrd="1" destOrd="0" presId="urn:microsoft.com/office/officeart/2005/8/layout/hierarchy3"/>
-    <dgm:cxn modelId="{120C356A-BABE-4572-8135-DE54CA69CFDB}" type="presParOf" srcId="{A8F20C6E-4C4A-434F-A02D-4FC640ACE660}" destId="{806B75C1-4C46-4B8E-9CE6-18E25F711339}" srcOrd="2" destOrd="0" presId="urn:microsoft.com/office/officeart/2005/8/layout/hierarchy3"/>
-    <dgm:cxn modelId="{7B2D9A80-CFB0-492B-ABA7-0503C088D6CE}" type="presParOf" srcId="{A8F20C6E-4C4A-434F-A02D-4FC640ACE660}" destId="{FEFF3AFD-B1E3-4F9D-8AAF-35DCE9D25457}" srcOrd="3" destOrd="0" presId="urn:microsoft.com/office/officeart/2005/8/layout/hierarchy3"/>
+    <dgm:cxn modelId="{01C22F00-29FB-4084-B67B-E945D1554A4E}" srcId="{F20B2F05-6AB1-4158-81FD-1CB385ACE642}" destId="{432002E7-001D-4213-BE71-8DF49CC86377}" srcOrd="1" destOrd="0" parTransId="{1E89C041-4DB6-4218-83EE-193D59EEDFCB}" sibTransId="{8DE813C7-A336-43CC-A40E-F0F12DDA5D9A}"/>
+    <dgm:cxn modelId="{D0672D4E-FED3-4314-AF79-65813A4C106D}" type="presOf" srcId="{86CBA0AD-2679-4F58-B94C-C71507C43C68}" destId="{E366FA6F-D514-4722-ADD2-8B8C4E7DB876}" srcOrd="0" destOrd="0" presId="urn:microsoft.com/office/officeart/2005/8/layout/hierarchy3"/>
+    <dgm:cxn modelId="{D7D8A34F-00D2-4F73-A9B1-0F843C2D6E08}" type="presOf" srcId="{42D30908-A991-4159-A982-3996501CD656}" destId="{97B19CC5-E5F5-41D7-B6CF-8FB86B4F6191}" srcOrd="0" destOrd="0" presId="urn:microsoft.com/office/officeart/2005/8/layout/hierarchy3"/>
+    <dgm:cxn modelId="{0A4D7E54-8915-473A-AEAC-6050B275D51B}" srcId="{432002E7-001D-4213-BE71-8DF49CC86377}" destId="{3B1D60FF-8256-42F3-BFBB-4DCCC5A72E58}" srcOrd="1" destOrd="0" parTransId="{B249091D-E8B7-4FD0-87B0-B7761AA18A60}" sibTransId="{CB3B49D0-6055-423B-AE59-A647ED5243FE}"/>
+    <dgm:cxn modelId="{CDC08F55-5E33-4BD7-8120-71AB13036872}" srcId="{183B589A-80A6-42F5-B6A5-59541A70A9CB}" destId="{8F0D45A1-2763-4456-BE09-6C1302220405}" srcOrd="1" destOrd="0" parTransId="{C56FD1B1-408F-46FC-8FD1-BCD2F7F58D09}" sibTransId="{A4522B62-13B5-45D6-953E-C8897A3BC1DA}"/>
+    <dgm:cxn modelId="{62EF0458-0AE3-429D-BE28-426734FAB497}" type="presOf" srcId="{8F0D45A1-2763-4456-BE09-6C1302220405}" destId="{50BCA223-E11A-46C2-90D6-9753E8DA26C6}" srcOrd="0" destOrd="0" presId="urn:microsoft.com/office/officeart/2005/8/layout/hierarchy3"/>
+    <dgm:cxn modelId="{543AC27C-54C6-4D7F-AF60-7CC3C2248C32}" type="presOf" srcId="{432002E7-001D-4213-BE71-8DF49CC86377}" destId="{31C77B65-7606-4162-9DE9-6E45F042A5C0}" srcOrd="0" destOrd="0" presId="urn:microsoft.com/office/officeart/2005/8/layout/hierarchy3"/>
+    <dgm:cxn modelId="{06311E8B-FFD0-4BEB-9C35-B0183A78A395}" type="presOf" srcId="{3C69ECDE-2C59-45CE-A6D9-C476BEC2E535}" destId="{9ADBB84D-DE6C-4B9A-B5B0-B3B2A94CC975}" srcOrd="0" destOrd="0" presId="urn:microsoft.com/office/officeart/2005/8/layout/hierarchy3"/>
+    <dgm:cxn modelId="{886E1E95-1016-4726-AD53-FA2377AEF47D}" type="presOf" srcId="{183B589A-80A6-42F5-B6A5-59541A70A9CB}" destId="{D35E0319-3AA0-4B7E-AC11-3E0F5FB227FF}" srcOrd="1" destOrd="0" presId="urn:microsoft.com/office/officeart/2005/8/layout/hierarchy3"/>
+    <dgm:cxn modelId="{7ECC5198-9540-435E-BF4B-643B1AA4903D}" type="presOf" srcId="{C56FD1B1-408F-46FC-8FD1-BCD2F7F58D09}" destId="{BB25DAD5-CC61-4586-B127-D114D32E8C05}" srcOrd="0" destOrd="0" presId="urn:microsoft.com/office/officeart/2005/8/layout/hierarchy3"/>
+    <dgm:cxn modelId="{E1F750A5-EB54-4E3C-8C42-261C3C16DEBE}" type="presOf" srcId="{B249091D-E8B7-4FD0-87B0-B7761AA18A60}" destId="{D87CB2CE-737E-461A-B20C-8B63923DECC7}" srcOrd="0" destOrd="0" presId="urn:microsoft.com/office/officeart/2005/8/layout/hierarchy3"/>
+    <dgm:cxn modelId="{0B42F3AD-8674-4258-87D8-EAE04E79FF0E}" type="presOf" srcId="{432002E7-001D-4213-BE71-8DF49CC86377}" destId="{2D5C6BCB-7BBF-4A9D-B591-210458BCED67}" srcOrd="1" destOrd="0" presId="urn:microsoft.com/office/officeart/2005/8/layout/hierarchy3"/>
+    <dgm:cxn modelId="{2A6990C0-9946-4500-BCEA-0FF92664CCD1}" srcId="{F20B2F05-6AB1-4158-81FD-1CB385ACE642}" destId="{183B589A-80A6-42F5-B6A5-59541A70A9CB}" srcOrd="0" destOrd="0" parTransId="{72560BE5-18F1-4FE2-B3D6-E389C44CA67D}" sibTransId="{BE983595-4724-4B9C-A04F-A5DD1A48E9E4}"/>
+    <dgm:cxn modelId="{CC8949C6-21BD-4976-9198-BCC6234AAE47}" type="presOf" srcId="{3B1D60FF-8256-42F3-BFBB-4DCCC5A72E58}" destId="{F3B2C1E5-3812-495B-A0F3-D6725C26DD31}" srcOrd="0" destOrd="0" presId="urn:microsoft.com/office/officeart/2005/8/layout/hierarchy3"/>
+    <dgm:cxn modelId="{471DD4C9-9C34-409A-8BA9-C1B7491B1D2D}" type="presOf" srcId="{D84398AA-58E0-4855-B45B-F0A4C9356173}" destId="{FBFD10FE-FEB6-42DF-BFFF-FD6922243D9E}" srcOrd="0" destOrd="0" presId="urn:microsoft.com/office/officeart/2005/8/layout/hierarchy3"/>
+    <dgm:cxn modelId="{C1CC20D0-F132-4020-9B0F-0C40A7E474C5}" srcId="{432002E7-001D-4213-BE71-8DF49CC86377}" destId="{3C69ECDE-2C59-45CE-A6D9-C476BEC2E535}" srcOrd="0" destOrd="0" parTransId="{86CBA0AD-2679-4F58-B94C-C71507C43C68}" sibTransId="{22B8204E-1B27-42FE-A0F2-A566F1567544}"/>
+    <dgm:cxn modelId="{558561DD-2D54-4521-9FFB-F3E7DB57B05C}" srcId="{183B589A-80A6-42F5-B6A5-59541A70A9CB}" destId="{D84398AA-58E0-4855-B45B-F0A4C9356173}" srcOrd="0" destOrd="0" parTransId="{42D30908-A991-4159-A982-3996501CD656}" sibTransId="{79F92556-33B4-4DE2-9C7E-C66C3A127FEA}"/>
+    <dgm:cxn modelId="{C8FD9DF6-3C79-43CA-9C52-27268691FC9B}" type="presOf" srcId="{183B589A-80A6-42F5-B6A5-59541A70A9CB}" destId="{3BBFCB52-02FC-4FBF-9261-DC3C26CF9450}" srcOrd="0" destOrd="0" presId="urn:microsoft.com/office/officeart/2005/8/layout/hierarchy3"/>
+    <dgm:cxn modelId="{9EBC23F8-C2ED-413F-AF12-3B52245BCF60}" type="presOf" srcId="{F20B2F05-6AB1-4158-81FD-1CB385ACE642}" destId="{3E35C587-33C0-486C-813B-341C36FEC11E}" srcOrd="0" destOrd="0" presId="urn:microsoft.com/office/officeart/2005/8/layout/hierarchy3"/>
+    <dgm:cxn modelId="{B9E5BDD4-DEA1-4829-8D17-02CB2FB24E36}" type="presParOf" srcId="{3E35C587-33C0-486C-813B-341C36FEC11E}" destId="{93B1AFDA-B74F-453D-BA91-E22DFE2A4BE4}" srcOrd="0" destOrd="0" presId="urn:microsoft.com/office/officeart/2005/8/layout/hierarchy3"/>
+    <dgm:cxn modelId="{A60B7FE3-ADDC-4C33-9EAF-9B88227660B7}" type="presParOf" srcId="{93B1AFDA-B74F-453D-BA91-E22DFE2A4BE4}" destId="{EA112394-318A-4711-9C46-EEE99DC40966}" srcOrd="0" destOrd="0" presId="urn:microsoft.com/office/officeart/2005/8/layout/hierarchy3"/>
+    <dgm:cxn modelId="{2AC52FC3-8A06-4AEF-BF63-4965A4859EEE}" type="presParOf" srcId="{EA112394-318A-4711-9C46-EEE99DC40966}" destId="{3BBFCB52-02FC-4FBF-9261-DC3C26CF9450}" srcOrd="0" destOrd="0" presId="urn:microsoft.com/office/officeart/2005/8/layout/hierarchy3"/>
+    <dgm:cxn modelId="{C824C050-6B44-4C3D-856B-1DE94076E15F}" type="presParOf" srcId="{EA112394-318A-4711-9C46-EEE99DC40966}" destId="{D35E0319-3AA0-4B7E-AC11-3E0F5FB227FF}" srcOrd="1" destOrd="0" presId="urn:microsoft.com/office/officeart/2005/8/layout/hierarchy3"/>
+    <dgm:cxn modelId="{0954550C-3398-4844-8681-0EA1E685C12B}" type="presParOf" srcId="{93B1AFDA-B74F-453D-BA91-E22DFE2A4BE4}" destId="{470C4308-5BF3-44CD-BD6F-18E4B4C2ACEB}" srcOrd="1" destOrd="0" presId="urn:microsoft.com/office/officeart/2005/8/layout/hierarchy3"/>
+    <dgm:cxn modelId="{A18A113A-F546-497E-BA19-6B9C896792C8}" type="presParOf" srcId="{470C4308-5BF3-44CD-BD6F-18E4B4C2ACEB}" destId="{97B19CC5-E5F5-41D7-B6CF-8FB86B4F6191}" srcOrd="0" destOrd="0" presId="urn:microsoft.com/office/officeart/2005/8/layout/hierarchy3"/>
+    <dgm:cxn modelId="{0954B53F-8C4F-436E-9B4D-B941EDB15DEA}" type="presParOf" srcId="{470C4308-5BF3-44CD-BD6F-18E4B4C2ACEB}" destId="{FBFD10FE-FEB6-42DF-BFFF-FD6922243D9E}" srcOrd="1" destOrd="0" presId="urn:microsoft.com/office/officeart/2005/8/layout/hierarchy3"/>
+    <dgm:cxn modelId="{7B27708B-D870-43D4-8160-CB44C826236B}" type="presParOf" srcId="{470C4308-5BF3-44CD-BD6F-18E4B4C2ACEB}" destId="{BB25DAD5-CC61-4586-B127-D114D32E8C05}" srcOrd="2" destOrd="0" presId="urn:microsoft.com/office/officeart/2005/8/layout/hierarchy3"/>
+    <dgm:cxn modelId="{435D29AA-8913-4BA7-A211-43648DB25548}" type="presParOf" srcId="{470C4308-5BF3-44CD-BD6F-18E4B4C2ACEB}" destId="{50BCA223-E11A-46C2-90D6-9753E8DA26C6}" srcOrd="3" destOrd="0" presId="urn:microsoft.com/office/officeart/2005/8/layout/hierarchy3"/>
+    <dgm:cxn modelId="{E0027918-80C2-4177-A543-DB9D601BD15E}" type="presParOf" srcId="{3E35C587-33C0-486C-813B-341C36FEC11E}" destId="{C4E674FF-6933-4E81-9974-58858D59FE46}" srcOrd="1" destOrd="0" presId="urn:microsoft.com/office/officeart/2005/8/layout/hierarchy3"/>
+    <dgm:cxn modelId="{C1EC3D1C-D296-4FB1-AC77-2A654DAF0379}" type="presParOf" srcId="{C4E674FF-6933-4E81-9974-58858D59FE46}" destId="{E2D7923B-FC9B-4D7E-BCE3-77F87DAE85D3}" srcOrd="0" destOrd="0" presId="urn:microsoft.com/office/officeart/2005/8/layout/hierarchy3"/>
+    <dgm:cxn modelId="{A76A763F-3572-4CC1-97D3-BC625E9A0DBD}" type="presParOf" srcId="{E2D7923B-FC9B-4D7E-BCE3-77F87DAE85D3}" destId="{31C77B65-7606-4162-9DE9-6E45F042A5C0}" srcOrd="0" destOrd="0" presId="urn:microsoft.com/office/officeart/2005/8/layout/hierarchy3"/>
+    <dgm:cxn modelId="{EB201DAD-7C8F-49A6-BCA0-C8C0D6013818}" type="presParOf" srcId="{E2D7923B-FC9B-4D7E-BCE3-77F87DAE85D3}" destId="{2D5C6BCB-7BBF-4A9D-B591-210458BCED67}" srcOrd="1" destOrd="0" presId="urn:microsoft.com/office/officeart/2005/8/layout/hierarchy3"/>
+    <dgm:cxn modelId="{BA5CD11E-3EDC-4DC9-A155-66A4FC373B98}" type="presParOf" srcId="{C4E674FF-6933-4E81-9974-58858D59FE46}" destId="{8F0BC7B0-818E-424D-B52A-009E8445CB81}" srcOrd="1" destOrd="0" presId="urn:microsoft.com/office/officeart/2005/8/layout/hierarchy3"/>
+    <dgm:cxn modelId="{1EA8D873-BD28-4371-953C-8A8663C39BCF}" type="presParOf" srcId="{8F0BC7B0-818E-424D-B52A-009E8445CB81}" destId="{E366FA6F-D514-4722-ADD2-8B8C4E7DB876}" srcOrd="0" destOrd="0" presId="urn:microsoft.com/office/officeart/2005/8/layout/hierarchy3"/>
+    <dgm:cxn modelId="{DFA3CD36-4442-4D80-88BF-6956D7C91970}" type="presParOf" srcId="{8F0BC7B0-818E-424D-B52A-009E8445CB81}" destId="{9ADBB84D-DE6C-4B9A-B5B0-B3B2A94CC975}" srcOrd="1" destOrd="0" presId="urn:microsoft.com/office/officeart/2005/8/layout/hierarchy3"/>
+    <dgm:cxn modelId="{17B3B488-D602-40CF-A673-0944D0F5014F}" type="presParOf" srcId="{8F0BC7B0-818E-424D-B52A-009E8445CB81}" destId="{D87CB2CE-737E-461A-B20C-8B63923DECC7}" srcOrd="2" destOrd="0" presId="urn:microsoft.com/office/officeart/2005/8/layout/hierarchy3"/>
+    <dgm:cxn modelId="{DA9684E9-EA0C-456E-B2C2-11BFF24386FF}" type="presParOf" srcId="{8F0BC7B0-818E-424D-B52A-009E8445CB81}" destId="{F3B2C1E5-3812-495B-A0F3-D6725C26DD31}" srcOrd="3" destOrd="0" presId="urn:microsoft.com/office/officeart/2005/8/layout/hierarchy3"/>
   </dgm:cxnLst>
   <dgm:bg/>
   <dgm:whole/>
@@ -3861,7 +3866,7 @@
 <file path=ppt/diagrams/data3.xml><?xml version="1.0" encoding="utf-8"?>
 <dgm:dataModel xmlns:dgm="http://schemas.openxmlformats.org/drawingml/2006/diagram" xmlns:a="http://schemas.openxmlformats.org/drawingml/2006/main">
   <dgm:ptLst>
-    <dgm:pt modelId="{4A6167A9-B9B0-4AC9-B3BB-065E556FF90D}" type="doc">
+    <dgm:pt modelId="{33593B13-573B-46CE-8FCA-7C2A68872B1D}" type="doc">
       <dgm:prSet loTypeId="urn:microsoft.com/office/officeart/2005/8/layout/cycle2" loCatId="cycle" qsTypeId="urn:microsoft.com/office/officeart/2005/8/quickstyle/simple1" qsCatId="simple" csTypeId="urn:microsoft.com/office/officeart/2005/8/colors/accent1_2" csCatId="accent1" phldr="1"/>
       <dgm:spPr/>
       <dgm:t>
@@ -3872,7 +3877,7 @@
         </a:p>
       </dgm:t>
     </dgm:pt>
-    <dgm:pt modelId="{A46EBA9A-81FF-48E8-BF4E-01956A42AF1A}">
+    <dgm:pt modelId="{80EE36D8-EA2C-4AE8-AC80-C1F3854DF796}">
       <dgm:prSet phldrT="[Text]"/>
       <dgm:spPr/>
       <dgm:t>
@@ -3886,7 +3891,7 @@
         </a:p>
       </dgm:t>
     </dgm:pt>
-    <dgm:pt modelId="{6D38D8DE-3A09-4A37-8840-2AF36D828434}" type="parTrans" cxnId="{D08E4B10-D311-44B7-A3D2-FDE26A5B0042}">
+    <dgm:pt modelId="{325F4D9E-28FE-42AE-8CCB-EF5DAB1DDDED}" type="parTrans" cxnId="{580841E5-E19D-4368-992B-9854D72AC34C}">
       <dgm:prSet/>
       <dgm:spPr/>
       <dgm:t>
@@ -3897,7 +3902,7 @@
         </a:p>
       </dgm:t>
     </dgm:pt>
-    <dgm:pt modelId="{264E157C-7884-448D-812D-6DC960DD84BD}" type="sibTrans" cxnId="{D08E4B10-D311-44B7-A3D2-FDE26A5B0042}">
+    <dgm:pt modelId="{DD1E9127-438E-44E8-B1AE-23C0F67DBBD5}" type="sibTrans" cxnId="{580841E5-E19D-4368-992B-9854D72AC34C}">
       <dgm:prSet/>
       <dgm:spPr/>
       <dgm:t>
@@ -3908,7 +3913,7 @@
         </a:p>
       </dgm:t>
     </dgm:pt>
-    <dgm:pt modelId="{DB9B50F6-881B-42AB-AC02-66E1B3BE2B87}">
+    <dgm:pt modelId="{5DAFE5AF-FF55-4E4F-BA23-C5C1FF201593}">
       <dgm:prSet phldrT="[Text]"/>
       <dgm:spPr/>
       <dgm:t>
@@ -3922,7 +3927,7 @@
         </a:p>
       </dgm:t>
     </dgm:pt>
-    <dgm:pt modelId="{B4986D27-B7CB-4E4D-B0EF-4A07CBE699B6}" type="parTrans" cxnId="{D8993CF0-2C03-4851-A8EF-DE15D7E74010}">
+    <dgm:pt modelId="{64EA23CE-89CA-4C2D-B973-8D82BD9FFD7D}" type="parTrans" cxnId="{65FC3145-9A4C-4A4F-AF14-49764628EBD3}">
       <dgm:prSet/>
       <dgm:spPr/>
       <dgm:t>
@@ -3933,7 +3938,7 @@
         </a:p>
       </dgm:t>
     </dgm:pt>
-    <dgm:pt modelId="{26E3A2E0-7E74-43AC-9B0F-B29C336507A1}" type="sibTrans" cxnId="{D8993CF0-2C03-4851-A8EF-DE15D7E74010}">
+    <dgm:pt modelId="{50B0BE9F-A167-4D2A-A85F-949AC98106E7}" type="sibTrans" cxnId="{65FC3145-9A4C-4A4F-AF14-49764628EBD3}">
       <dgm:prSet/>
       <dgm:spPr/>
       <dgm:t>
@@ -3944,7 +3949,7 @@
         </a:p>
       </dgm:t>
     </dgm:pt>
-    <dgm:pt modelId="{C118E0FF-B465-4B8F-B3C4-5E65203F5545}">
+    <dgm:pt modelId="{2AD74F87-084C-45DC-B4FE-B16B41D14166}">
       <dgm:prSet phldrT="[Text]"/>
       <dgm:spPr/>
       <dgm:t>
@@ -3958,7 +3963,7 @@
         </a:p>
       </dgm:t>
     </dgm:pt>
-    <dgm:pt modelId="{2D822334-F39E-4A19-91E9-5ACED9808905}" type="parTrans" cxnId="{BC294D24-F3AC-4AD0-8236-E5163AE323C2}">
+    <dgm:pt modelId="{D2B409CA-1666-4320-9FF4-E329512AAC09}" type="parTrans" cxnId="{15307ADA-A073-4843-91CC-ED95E2E88AA5}">
       <dgm:prSet/>
       <dgm:spPr/>
       <dgm:t>
@@ -3969,7 +3974,7 @@
         </a:p>
       </dgm:t>
     </dgm:pt>
-    <dgm:pt modelId="{364B8363-E624-4697-B75F-60B49648FCC5}" type="sibTrans" cxnId="{BC294D24-F3AC-4AD0-8236-E5163AE323C2}">
+    <dgm:pt modelId="{6587E555-C29A-4460-969B-18FD83DBB236}" type="sibTrans" cxnId="{15307ADA-A073-4843-91CC-ED95E2E88AA5}">
       <dgm:prSet/>
       <dgm:spPr/>
       <dgm:t>
@@ -3980,7 +3985,7 @@
         </a:p>
       </dgm:t>
     </dgm:pt>
-    <dgm:pt modelId="{050CFA2F-CCD2-445B-BF9A-1D5B1769EB85}">
+    <dgm:pt modelId="{980534B3-138A-4BF0-811C-2880A364E5E3}">
       <dgm:prSet phldrT="[Text]"/>
       <dgm:spPr/>
       <dgm:t>
@@ -3994,7 +3999,7 @@
         </a:p>
       </dgm:t>
     </dgm:pt>
-    <dgm:pt modelId="{90B84F9A-13C4-49D6-9E02-1507682C710E}" type="parTrans" cxnId="{18990C3A-291F-4759-AF80-603BDAD0A3B1}">
+    <dgm:pt modelId="{224624C8-B18C-4596-9933-9EE084321652}" type="parTrans" cxnId="{1737366B-069F-4EDE-8128-3A7BCB7D06C4}">
       <dgm:prSet/>
       <dgm:spPr/>
       <dgm:t>
@@ -4005,7 +4010,7 @@
         </a:p>
       </dgm:t>
     </dgm:pt>
-    <dgm:pt modelId="{77D1C0ED-4F9A-465E-BE38-8D5C1208DDB1}" type="sibTrans" cxnId="{18990C3A-291F-4759-AF80-603BDAD0A3B1}">
+    <dgm:pt modelId="{69ECA4A4-C40E-4711-9862-D9EDFEA58DFD}" type="sibTrans" cxnId="{1737366B-069F-4EDE-8128-3A7BCB7D06C4}">
       <dgm:prSet/>
       <dgm:spPr/>
       <dgm:t>
@@ -4016,7 +4021,7 @@
         </a:p>
       </dgm:t>
     </dgm:pt>
-    <dgm:pt modelId="{5E3E81DB-2D37-4530-ABD5-26F8B12C262C}">
+    <dgm:pt modelId="{28B58F8B-BA5B-4E28-911B-D5D3E9926F0A}">
       <dgm:prSet phldrT="[Text]"/>
       <dgm:spPr/>
       <dgm:t>
@@ -4030,7 +4035,7 @@
         </a:p>
       </dgm:t>
     </dgm:pt>
-    <dgm:pt modelId="{50EB2E10-29FD-466E-B854-872C95A0F45F}" type="parTrans" cxnId="{84059CF3-F752-4A54-8F5A-C04D3263F342}">
+    <dgm:pt modelId="{41078E34-4901-47A6-81AA-E80BE5B426E6}" type="parTrans" cxnId="{C3934173-8B2F-44C2-8DEF-FF7AB0FB9B1E}">
       <dgm:prSet/>
       <dgm:spPr/>
       <dgm:t>
@@ -4041,7 +4046,7 @@
         </a:p>
       </dgm:t>
     </dgm:pt>
-    <dgm:pt modelId="{383AB8AC-AB2C-46FE-8287-4A3E40CB7DD8}" type="sibTrans" cxnId="{84059CF3-F752-4A54-8F5A-C04D3263F342}">
+    <dgm:pt modelId="{C2A30FED-D09D-45BB-B356-CDFA7382C98E}" type="sibTrans" cxnId="{C3934173-8B2F-44C2-8DEF-FF7AB0FB9B1E}">
       <dgm:prSet/>
       <dgm:spPr/>
       <dgm:t>
@@ -4052,8 +4057,8 @@
         </a:p>
       </dgm:t>
     </dgm:pt>
-    <dgm:pt modelId="{9ED23FB5-8DB8-4574-8011-31D399561765}" type="pres">
-      <dgm:prSet presAssocID="{4A6167A9-B9B0-4AC9-B3BB-065E556FF90D}" presName="cycle" presStyleCnt="0">
+    <dgm:pt modelId="{EE3C674C-5639-4358-B549-4476C8B30A68}" type="pres">
+      <dgm:prSet presAssocID="{33593B13-573B-46CE-8FCA-7C2A68872B1D}" presName="cycle" presStyleCnt="0">
         <dgm:presLayoutVars>
           <dgm:dir/>
           <dgm:resizeHandles val="exact"/>
@@ -4061,124 +4066,124 @@
       </dgm:prSet>
       <dgm:spPr/>
     </dgm:pt>
-    <dgm:pt modelId="{99D1FDD7-DA14-4232-BDF0-6E1CAE4ED092}" type="pres">
-      <dgm:prSet presAssocID="{A46EBA9A-81FF-48E8-BF4E-01956A42AF1A}" presName="node" presStyleLbl="node1" presStyleIdx="0" presStyleCnt="5">
+    <dgm:pt modelId="{98B95665-7430-4C57-9D11-EB344D6EA583}" type="pres">
+      <dgm:prSet presAssocID="{80EE36D8-EA2C-4AE8-AC80-C1F3854DF796}" presName="node" presStyleLbl="node1" presStyleIdx="0" presStyleCnt="5">
         <dgm:presLayoutVars>
           <dgm:bulletEnabled val="1"/>
         </dgm:presLayoutVars>
       </dgm:prSet>
       <dgm:spPr/>
     </dgm:pt>
-    <dgm:pt modelId="{3F1E6E0A-4E30-4584-AB14-0854EEE7770E}" type="pres">
-      <dgm:prSet presAssocID="{264E157C-7884-448D-812D-6DC960DD84BD}" presName="sibTrans" presStyleLbl="sibTrans2D1" presStyleIdx="0" presStyleCnt="5"/>
+    <dgm:pt modelId="{F504D745-09E2-4F83-89D5-03F3D2A75889}" type="pres">
+      <dgm:prSet presAssocID="{DD1E9127-438E-44E8-B1AE-23C0F67DBBD5}" presName="sibTrans" presStyleLbl="sibTrans2D1" presStyleIdx="0" presStyleCnt="5"/>
       <dgm:spPr/>
     </dgm:pt>
-    <dgm:pt modelId="{33CA5F7C-6619-4503-B9F7-34D85998DE74}" type="pres">
-      <dgm:prSet presAssocID="{264E157C-7884-448D-812D-6DC960DD84BD}" presName="connectorText" presStyleLbl="sibTrans2D1" presStyleIdx="0" presStyleCnt="5"/>
+    <dgm:pt modelId="{4F51BE3D-2C51-4205-9820-2CB5D4F8BDFD}" type="pres">
+      <dgm:prSet presAssocID="{DD1E9127-438E-44E8-B1AE-23C0F67DBBD5}" presName="connectorText" presStyleLbl="sibTrans2D1" presStyleIdx="0" presStyleCnt="5"/>
       <dgm:spPr/>
     </dgm:pt>
-    <dgm:pt modelId="{3D9D0C5C-EB3D-4EF4-B13F-A4A1C922AD77}" type="pres">
-      <dgm:prSet presAssocID="{DB9B50F6-881B-42AB-AC02-66E1B3BE2B87}" presName="node" presStyleLbl="node1" presStyleIdx="1" presStyleCnt="5">
+    <dgm:pt modelId="{20A9C2FE-6FAC-48E0-BCCF-86A44D9EFD81}" type="pres">
+      <dgm:prSet presAssocID="{5DAFE5AF-FF55-4E4F-BA23-C5C1FF201593}" presName="node" presStyleLbl="node1" presStyleIdx="1" presStyleCnt="5">
         <dgm:presLayoutVars>
           <dgm:bulletEnabled val="1"/>
         </dgm:presLayoutVars>
       </dgm:prSet>
       <dgm:spPr/>
     </dgm:pt>
-    <dgm:pt modelId="{6411B9E6-AC5D-4F08-AF2B-28F756CA0998}" type="pres">
-      <dgm:prSet presAssocID="{26E3A2E0-7E74-43AC-9B0F-B29C336507A1}" presName="sibTrans" presStyleLbl="sibTrans2D1" presStyleIdx="1" presStyleCnt="5"/>
+    <dgm:pt modelId="{09F840B2-B8C1-4516-9578-423E385141CB}" type="pres">
+      <dgm:prSet presAssocID="{50B0BE9F-A167-4D2A-A85F-949AC98106E7}" presName="sibTrans" presStyleLbl="sibTrans2D1" presStyleIdx="1" presStyleCnt="5"/>
       <dgm:spPr/>
     </dgm:pt>
-    <dgm:pt modelId="{45E4FAD3-E92F-4E4A-B450-C9A10485FA85}" type="pres">
-      <dgm:prSet presAssocID="{26E3A2E0-7E74-43AC-9B0F-B29C336507A1}" presName="connectorText" presStyleLbl="sibTrans2D1" presStyleIdx="1" presStyleCnt="5"/>
+    <dgm:pt modelId="{D6422543-8557-4259-AEE1-B6E44198BF59}" type="pres">
+      <dgm:prSet presAssocID="{50B0BE9F-A167-4D2A-A85F-949AC98106E7}" presName="connectorText" presStyleLbl="sibTrans2D1" presStyleIdx="1" presStyleCnt="5"/>
       <dgm:spPr/>
     </dgm:pt>
-    <dgm:pt modelId="{36E86C8C-B50F-4AFF-A161-D56945049EA6}" type="pres">
-      <dgm:prSet presAssocID="{C118E0FF-B465-4B8F-B3C4-5E65203F5545}" presName="node" presStyleLbl="node1" presStyleIdx="2" presStyleCnt="5">
+    <dgm:pt modelId="{512B899C-35DE-49C3-BFAA-FB254B345C28}" type="pres">
+      <dgm:prSet presAssocID="{2AD74F87-084C-45DC-B4FE-B16B41D14166}" presName="node" presStyleLbl="node1" presStyleIdx="2" presStyleCnt="5">
         <dgm:presLayoutVars>
           <dgm:bulletEnabled val="1"/>
         </dgm:presLayoutVars>
       </dgm:prSet>
       <dgm:spPr/>
     </dgm:pt>
-    <dgm:pt modelId="{FE6D5C23-5581-4D35-9D5E-15060DE81448}" type="pres">
-      <dgm:prSet presAssocID="{364B8363-E624-4697-B75F-60B49648FCC5}" presName="sibTrans" presStyleLbl="sibTrans2D1" presStyleIdx="2" presStyleCnt="5"/>
+    <dgm:pt modelId="{49C64482-97FB-4B79-B727-ABC0618346C7}" type="pres">
+      <dgm:prSet presAssocID="{6587E555-C29A-4460-969B-18FD83DBB236}" presName="sibTrans" presStyleLbl="sibTrans2D1" presStyleIdx="2" presStyleCnt="5"/>
       <dgm:spPr/>
     </dgm:pt>
-    <dgm:pt modelId="{D3AAFFDA-9D44-4ED9-B1C7-34DF79AC8956}" type="pres">
-      <dgm:prSet presAssocID="{364B8363-E624-4697-B75F-60B49648FCC5}" presName="connectorText" presStyleLbl="sibTrans2D1" presStyleIdx="2" presStyleCnt="5"/>
+    <dgm:pt modelId="{060799B9-93E7-4776-B5B4-AC85DBA4D0C6}" type="pres">
+      <dgm:prSet presAssocID="{6587E555-C29A-4460-969B-18FD83DBB236}" presName="connectorText" presStyleLbl="sibTrans2D1" presStyleIdx="2" presStyleCnt="5"/>
       <dgm:spPr/>
     </dgm:pt>
-    <dgm:pt modelId="{5729C66D-7FE3-44F2-9E8F-0306F2CDA3AC}" type="pres">
-      <dgm:prSet presAssocID="{050CFA2F-CCD2-445B-BF9A-1D5B1769EB85}" presName="node" presStyleLbl="node1" presStyleIdx="3" presStyleCnt="5">
+    <dgm:pt modelId="{8470668F-1D1F-48C1-9630-0B14444AB3EE}" type="pres">
+      <dgm:prSet presAssocID="{980534B3-138A-4BF0-811C-2880A364E5E3}" presName="node" presStyleLbl="node1" presStyleIdx="3" presStyleCnt="5">
         <dgm:presLayoutVars>
           <dgm:bulletEnabled val="1"/>
         </dgm:presLayoutVars>
       </dgm:prSet>
       <dgm:spPr/>
     </dgm:pt>
-    <dgm:pt modelId="{83916250-02E7-4CC4-90DC-15ED29D797B5}" type="pres">
-      <dgm:prSet presAssocID="{77D1C0ED-4F9A-465E-BE38-8D5C1208DDB1}" presName="sibTrans" presStyleLbl="sibTrans2D1" presStyleIdx="3" presStyleCnt="5"/>
+    <dgm:pt modelId="{63ABB13E-0A21-42EA-ABA0-BABDDEAB4741}" type="pres">
+      <dgm:prSet presAssocID="{69ECA4A4-C40E-4711-9862-D9EDFEA58DFD}" presName="sibTrans" presStyleLbl="sibTrans2D1" presStyleIdx="3" presStyleCnt="5"/>
       <dgm:spPr/>
     </dgm:pt>
-    <dgm:pt modelId="{9BC74B8B-038D-4A14-9D7B-5A276A29146D}" type="pres">
-      <dgm:prSet presAssocID="{77D1C0ED-4F9A-465E-BE38-8D5C1208DDB1}" presName="connectorText" presStyleLbl="sibTrans2D1" presStyleIdx="3" presStyleCnt="5"/>
+    <dgm:pt modelId="{1E2935DD-58B1-43EA-B891-7093C2F2A043}" type="pres">
+      <dgm:prSet presAssocID="{69ECA4A4-C40E-4711-9862-D9EDFEA58DFD}" presName="connectorText" presStyleLbl="sibTrans2D1" presStyleIdx="3" presStyleCnt="5"/>
       <dgm:spPr/>
     </dgm:pt>
-    <dgm:pt modelId="{81EE6246-BFF1-439B-82C8-16521A9E3B22}" type="pres">
-      <dgm:prSet presAssocID="{5E3E81DB-2D37-4530-ABD5-26F8B12C262C}" presName="node" presStyleLbl="node1" presStyleIdx="4" presStyleCnt="5">
+    <dgm:pt modelId="{2967063F-5EC8-41F9-A97E-CEC3E0366EE8}" type="pres">
+      <dgm:prSet presAssocID="{28B58F8B-BA5B-4E28-911B-D5D3E9926F0A}" presName="node" presStyleLbl="node1" presStyleIdx="4" presStyleCnt="5">
         <dgm:presLayoutVars>
           <dgm:bulletEnabled val="1"/>
         </dgm:presLayoutVars>
       </dgm:prSet>
       <dgm:spPr/>
     </dgm:pt>
-    <dgm:pt modelId="{C425D504-CD43-4AD4-A977-B7E79351B53B}" type="pres">
-      <dgm:prSet presAssocID="{383AB8AC-AB2C-46FE-8287-4A3E40CB7DD8}" presName="sibTrans" presStyleLbl="sibTrans2D1" presStyleIdx="4" presStyleCnt="5"/>
+    <dgm:pt modelId="{ACF48D52-2113-4AF0-BD2E-01B600682D7E}" type="pres">
+      <dgm:prSet presAssocID="{C2A30FED-D09D-45BB-B356-CDFA7382C98E}" presName="sibTrans" presStyleLbl="sibTrans2D1" presStyleIdx="4" presStyleCnt="5"/>
       <dgm:spPr/>
     </dgm:pt>
-    <dgm:pt modelId="{0D50950E-3917-4F8A-A2F2-FE930925D7F4}" type="pres">
-      <dgm:prSet presAssocID="{383AB8AC-AB2C-46FE-8287-4A3E40CB7DD8}" presName="connectorText" presStyleLbl="sibTrans2D1" presStyleIdx="4" presStyleCnt="5"/>
+    <dgm:pt modelId="{155931E5-6E61-4228-A0D8-4B7FE2BB6FF9}" type="pres">
+      <dgm:prSet presAssocID="{C2A30FED-D09D-45BB-B356-CDFA7382C98E}" presName="connectorText" presStyleLbl="sibTrans2D1" presStyleIdx="4" presStyleCnt="5"/>
       <dgm:spPr/>
     </dgm:pt>
   </dgm:ptLst>
   <dgm:cxnLst>
-    <dgm:cxn modelId="{4B7D2409-3740-49FD-AC25-EDF26E765F1C}" type="presOf" srcId="{264E157C-7884-448D-812D-6DC960DD84BD}" destId="{3F1E6E0A-4E30-4584-AB14-0854EEE7770E}" srcOrd="0" destOrd="0" presId="urn:microsoft.com/office/officeart/2005/8/layout/cycle2"/>
-    <dgm:cxn modelId="{D08E4B10-D311-44B7-A3D2-FDE26A5B0042}" srcId="{4A6167A9-B9B0-4AC9-B3BB-065E556FF90D}" destId="{A46EBA9A-81FF-48E8-BF4E-01956A42AF1A}" srcOrd="0" destOrd="0" parTransId="{6D38D8DE-3A09-4A37-8840-2AF36D828434}" sibTransId="{264E157C-7884-448D-812D-6DC960DD84BD}"/>
-    <dgm:cxn modelId="{29574E11-E7DC-4701-B843-4E6DEB90C88F}" type="presOf" srcId="{77D1C0ED-4F9A-465E-BE38-8D5C1208DDB1}" destId="{9BC74B8B-038D-4A14-9D7B-5A276A29146D}" srcOrd="1" destOrd="0" presId="urn:microsoft.com/office/officeart/2005/8/layout/cycle2"/>
-    <dgm:cxn modelId="{BC294D24-F3AC-4AD0-8236-E5163AE323C2}" srcId="{4A6167A9-B9B0-4AC9-B3BB-065E556FF90D}" destId="{C118E0FF-B465-4B8F-B3C4-5E65203F5545}" srcOrd="2" destOrd="0" parTransId="{2D822334-F39E-4A19-91E9-5ACED9808905}" sibTransId="{364B8363-E624-4697-B75F-60B49648FCC5}"/>
-    <dgm:cxn modelId="{DE0DF128-AE19-4142-BBF6-77FDC7E84102}" type="presOf" srcId="{264E157C-7884-448D-812D-6DC960DD84BD}" destId="{33CA5F7C-6619-4503-B9F7-34D85998DE74}" srcOrd="1" destOrd="0" presId="urn:microsoft.com/office/officeart/2005/8/layout/cycle2"/>
-    <dgm:cxn modelId="{18990C3A-291F-4759-AF80-603BDAD0A3B1}" srcId="{4A6167A9-B9B0-4AC9-B3BB-065E556FF90D}" destId="{050CFA2F-CCD2-445B-BF9A-1D5B1769EB85}" srcOrd="3" destOrd="0" parTransId="{90B84F9A-13C4-49D6-9E02-1507682C710E}" sibTransId="{77D1C0ED-4F9A-465E-BE38-8D5C1208DDB1}"/>
-    <dgm:cxn modelId="{7B75E73C-97A0-4E91-9C51-BBEB5949B67C}" type="presOf" srcId="{383AB8AC-AB2C-46FE-8287-4A3E40CB7DD8}" destId="{C425D504-CD43-4AD4-A977-B7E79351B53B}" srcOrd="0" destOrd="0" presId="urn:microsoft.com/office/officeart/2005/8/layout/cycle2"/>
-    <dgm:cxn modelId="{FD09BA5E-02AA-4010-97DC-55B9DD0CA0D0}" type="presOf" srcId="{77D1C0ED-4F9A-465E-BE38-8D5C1208DDB1}" destId="{83916250-02E7-4CC4-90DC-15ED29D797B5}" srcOrd="0" destOrd="0" presId="urn:microsoft.com/office/officeart/2005/8/layout/cycle2"/>
-    <dgm:cxn modelId="{73299D66-F889-452D-8C54-3159F2683B60}" type="presOf" srcId="{364B8363-E624-4697-B75F-60B49648FCC5}" destId="{FE6D5C23-5581-4D35-9D5E-15060DE81448}" srcOrd="0" destOrd="0" presId="urn:microsoft.com/office/officeart/2005/8/layout/cycle2"/>
-    <dgm:cxn modelId="{30DB9248-3AB9-4986-82E5-B51C8569BC04}" type="presOf" srcId="{383AB8AC-AB2C-46FE-8287-4A3E40CB7DD8}" destId="{0D50950E-3917-4F8A-A2F2-FE930925D7F4}" srcOrd="1" destOrd="0" presId="urn:microsoft.com/office/officeart/2005/8/layout/cycle2"/>
-    <dgm:cxn modelId="{A9000D6A-C4A0-461B-BE6C-801A361BA363}" type="presOf" srcId="{26E3A2E0-7E74-43AC-9B0F-B29C336507A1}" destId="{6411B9E6-AC5D-4F08-AF2B-28F756CA0998}" srcOrd="0" destOrd="0" presId="urn:microsoft.com/office/officeart/2005/8/layout/cycle2"/>
-    <dgm:cxn modelId="{16CB116B-1265-430B-8125-D63D99B19417}" type="presOf" srcId="{4A6167A9-B9B0-4AC9-B3BB-065E556FF90D}" destId="{9ED23FB5-8DB8-4574-8011-31D399561765}" srcOrd="0" destOrd="0" presId="urn:microsoft.com/office/officeart/2005/8/layout/cycle2"/>
-    <dgm:cxn modelId="{CD23478B-975C-46EB-B249-8422C28CAB78}" type="presOf" srcId="{DB9B50F6-881B-42AB-AC02-66E1B3BE2B87}" destId="{3D9D0C5C-EB3D-4EF4-B13F-A4A1C922AD77}" srcOrd="0" destOrd="0" presId="urn:microsoft.com/office/officeart/2005/8/layout/cycle2"/>
-    <dgm:cxn modelId="{63FD3690-8FBE-454D-8E3A-C3285ACCA0BD}" type="presOf" srcId="{050CFA2F-CCD2-445B-BF9A-1D5B1769EB85}" destId="{5729C66D-7FE3-44F2-9E8F-0306F2CDA3AC}" srcOrd="0" destOrd="0" presId="urn:microsoft.com/office/officeart/2005/8/layout/cycle2"/>
-    <dgm:cxn modelId="{A86DC1AC-AF59-44B1-89B9-D8E8700341DC}" type="presOf" srcId="{364B8363-E624-4697-B75F-60B49648FCC5}" destId="{D3AAFFDA-9D44-4ED9-B1C7-34DF79AC8956}" srcOrd="1" destOrd="0" presId="urn:microsoft.com/office/officeart/2005/8/layout/cycle2"/>
-    <dgm:cxn modelId="{5DEFC2C2-4A3D-49B7-919B-E6D1A0D802F2}" type="presOf" srcId="{5E3E81DB-2D37-4530-ABD5-26F8B12C262C}" destId="{81EE6246-BFF1-439B-82C8-16521A9E3B22}" srcOrd="0" destOrd="0" presId="urn:microsoft.com/office/officeart/2005/8/layout/cycle2"/>
-    <dgm:cxn modelId="{420261CE-2C7B-43E3-90E2-C25A5A544269}" type="presOf" srcId="{A46EBA9A-81FF-48E8-BF4E-01956A42AF1A}" destId="{99D1FDD7-DA14-4232-BDF0-6E1CAE4ED092}" srcOrd="0" destOrd="0" presId="urn:microsoft.com/office/officeart/2005/8/layout/cycle2"/>
-    <dgm:cxn modelId="{E003D3DF-5DA6-4C74-A6B4-5FE6FFD8337C}" type="presOf" srcId="{26E3A2E0-7E74-43AC-9B0F-B29C336507A1}" destId="{45E4FAD3-E92F-4E4A-B450-C9A10485FA85}" srcOrd="1" destOrd="0" presId="urn:microsoft.com/office/officeart/2005/8/layout/cycle2"/>
-    <dgm:cxn modelId="{7ECE49E5-B92F-4F2A-ADDC-A1096D93F577}" type="presOf" srcId="{C118E0FF-B465-4B8F-B3C4-5E65203F5545}" destId="{36E86C8C-B50F-4AFF-A161-D56945049EA6}" srcOrd="0" destOrd="0" presId="urn:microsoft.com/office/officeart/2005/8/layout/cycle2"/>
-    <dgm:cxn modelId="{D8993CF0-2C03-4851-A8EF-DE15D7E74010}" srcId="{4A6167A9-B9B0-4AC9-B3BB-065E556FF90D}" destId="{DB9B50F6-881B-42AB-AC02-66E1B3BE2B87}" srcOrd="1" destOrd="0" parTransId="{B4986D27-B7CB-4E4D-B0EF-4A07CBE699B6}" sibTransId="{26E3A2E0-7E74-43AC-9B0F-B29C336507A1}"/>
-    <dgm:cxn modelId="{84059CF3-F752-4A54-8F5A-C04D3263F342}" srcId="{4A6167A9-B9B0-4AC9-B3BB-065E556FF90D}" destId="{5E3E81DB-2D37-4530-ABD5-26F8B12C262C}" srcOrd="4" destOrd="0" parTransId="{50EB2E10-29FD-466E-B854-872C95A0F45F}" sibTransId="{383AB8AC-AB2C-46FE-8287-4A3E40CB7DD8}"/>
-    <dgm:cxn modelId="{80AB96D6-5170-41D9-9D7A-7D2E701A15A9}" type="presParOf" srcId="{9ED23FB5-8DB8-4574-8011-31D399561765}" destId="{99D1FDD7-DA14-4232-BDF0-6E1CAE4ED092}" srcOrd="0" destOrd="0" presId="urn:microsoft.com/office/officeart/2005/8/layout/cycle2"/>
-    <dgm:cxn modelId="{EEA46B62-9F78-47FD-A231-F32CC9F15296}" type="presParOf" srcId="{9ED23FB5-8DB8-4574-8011-31D399561765}" destId="{3F1E6E0A-4E30-4584-AB14-0854EEE7770E}" srcOrd="1" destOrd="0" presId="urn:microsoft.com/office/officeart/2005/8/layout/cycle2"/>
-    <dgm:cxn modelId="{E9FB1479-E22C-40D1-AD13-CAC512205531}" type="presParOf" srcId="{3F1E6E0A-4E30-4584-AB14-0854EEE7770E}" destId="{33CA5F7C-6619-4503-B9F7-34D85998DE74}" srcOrd="0" destOrd="0" presId="urn:microsoft.com/office/officeart/2005/8/layout/cycle2"/>
-    <dgm:cxn modelId="{7D367565-A270-45E5-9F75-29B308057496}" type="presParOf" srcId="{9ED23FB5-8DB8-4574-8011-31D399561765}" destId="{3D9D0C5C-EB3D-4EF4-B13F-A4A1C922AD77}" srcOrd="2" destOrd="0" presId="urn:microsoft.com/office/officeart/2005/8/layout/cycle2"/>
-    <dgm:cxn modelId="{935A59FC-22EC-4649-B60B-65879C31F1DA}" type="presParOf" srcId="{9ED23FB5-8DB8-4574-8011-31D399561765}" destId="{6411B9E6-AC5D-4F08-AF2B-28F756CA0998}" srcOrd="3" destOrd="0" presId="urn:microsoft.com/office/officeart/2005/8/layout/cycle2"/>
-    <dgm:cxn modelId="{8DE4365C-EA5F-4839-86FC-212D80405338}" type="presParOf" srcId="{6411B9E6-AC5D-4F08-AF2B-28F756CA0998}" destId="{45E4FAD3-E92F-4E4A-B450-C9A10485FA85}" srcOrd="0" destOrd="0" presId="urn:microsoft.com/office/officeart/2005/8/layout/cycle2"/>
-    <dgm:cxn modelId="{5D87860E-F008-47DF-800F-1F6179462E27}" type="presParOf" srcId="{9ED23FB5-8DB8-4574-8011-31D399561765}" destId="{36E86C8C-B50F-4AFF-A161-D56945049EA6}" srcOrd="4" destOrd="0" presId="urn:microsoft.com/office/officeart/2005/8/layout/cycle2"/>
-    <dgm:cxn modelId="{E7609114-3CFF-4025-8681-C7739E9E95B2}" type="presParOf" srcId="{9ED23FB5-8DB8-4574-8011-31D399561765}" destId="{FE6D5C23-5581-4D35-9D5E-15060DE81448}" srcOrd="5" destOrd="0" presId="urn:microsoft.com/office/officeart/2005/8/layout/cycle2"/>
-    <dgm:cxn modelId="{089B0EDF-8366-40F8-874C-503ECB2E1C55}" type="presParOf" srcId="{FE6D5C23-5581-4D35-9D5E-15060DE81448}" destId="{D3AAFFDA-9D44-4ED9-B1C7-34DF79AC8956}" srcOrd="0" destOrd="0" presId="urn:microsoft.com/office/officeart/2005/8/layout/cycle2"/>
-    <dgm:cxn modelId="{22B753C2-7210-49F0-A569-4AA4D6557595}" type="presParOf" srcId="{9ED23FB5-8DB8-4574-8011-31D399561765}" destId="{5729C66D-7FE3-44F2-9E8F-0306F2CDA3AC}" srcOrd="6" destOrd="0" presId="urn:microsoft.com/office/officeart/2005/8/layout/cycle2"/>
-    <dgm:cxn modelId="{D5487C8C-13E0-4103-A72C-31AE0F50BD72}" type="presParOf" srcId="{9ED23FB5-8DB8-4574-8011-31D399561765}" destId="{83916250-02E7-4CC4-90DC-15ED29D797B5}" srcOrd="7" destOrd="0" presId="urn:microsoft.com/office/officeart/2005/8/layout/cycle2"/>
-    <dgm:cxn modelId="{96472571-2A82-42FF-8886-603A2CEE5776}" type="presParOf" srcId="{83916250-02E7-4CC4-90DC-15ED29D797B5}" destId="{9BC74B8B-038D-4A14-9D7B-5A276A29146D}" srcOrd="0" destOrd="0" presId="urn:microsoft.com/office/officeart/2005/8/layout/cycle2"/>
-    <dgm:cxn modelId="{AB5709DF-A925-4271-83F4-CD48CB5EE62B}" type="presParOf" srcId="{9ED23FB5-8DB8-4574-8011-31D399561765}" destId="{81EE6246-BFF1-439B-82C8-16521A9E3B22}" srcOrd="8" destOrd="0" presId="urn:microsoft.com/office/officeart/2005/8/layout/cycle2"/>
-    <dgm:cxn modelId="{F40A63C0-CBAC-4316-BF1F-9AC78D1EFA06}" type="presParOf" srcId="{9ED23FB5-8DB8-4574-8011-31D399561765}" destId="{C425D504-CD43-4AD4-A977-B7E79351B53B}" srcOrd="9" destOrd="0" presId="urn:microsoft.com/office/officeart/2005/8/layout/cycle2"/>
-    <dgm:cxn modelId="{9EC4E414-D304-4174-AFBF-C679AF2CD08B}" type="presParOf" srcId="{C425D504-CD43-4AD4-A977-B7E79351B53B}" destId="{0D50950E-3917-4F8A-A2F2-FE930925D7F4}" srcOrd="0" destOrd="0" presId="urn:microsoft.com/office/officeart/2005/8/layout/cycle2"/>
+    <dgm:cxn modelId="{493A7804-88D3-4517-AF00-90B027E2EB07}" type="presOf" srcId="{6587E555-C29A-4460-969B-18FD83DBB236}" destId="{060799B9-93E7-4776-B5B4-AC85DBA4D0C6}" srcOrd="1" destOrd="0" presId="urn:microsoft.com/office/officeart/2005/8/layout/cycle2"/>
+    <dgm:cxn modelId="{3B37E409-268F-478E-8138-C9566C09806C}" type="presOf" srcId="{DD1E9127-438E-44E8-B1AE-23C0F67DBBD5}" destId="{4F51BE3D-2C51-4205-9820-2CB5D4F8BDFD}" srcOrd="1" destOrd="0" presId="urn:microsoft.com/office/officeart/2005/8/layout/cycle2"/>
+    <dgm:cxn modelId="{B1BFFD14-95A2-4117-AF45-2FC6D0627E6C}" type="presOf" srcId="{33593B13-573B-46CE-8FCA-7C2A68872B1D}" destId="{EE3C674C-5639-4358-B549-4476C8B30A68}" srcOrd="0" destOrd="0" presId="urn:microsoft.com/office/officeart/2005/8/layout/cycle2"/>
+    <dgm:cxn modelId="{31C0BD1D-61B4-491E-91B1-32069F9EF284}" type="presOf" srcId="{C2A30FED-D09D-45BB-B356-CDFA7382C98E}" destId="{155931E5-6E61-4228-A0D8-4B7FE2BB6FF9}" srcOrd="1" destOrd="0" presId="urn:microsoft.com/office/officeart/2005/8/layout/cycle2"/>
+    <dgm:cxn modelId="{ED38FE39-2FAB-413D-8491-2CC092332AEF}" type="presOf" srcId="{5DAFE5AF-FF55-4E4F-BA23-C5C1FF201593}" destId="{20A9C2FE-6FAC-48E0-BCCF-86A44D9EFD81}" srcOrd="0" destOrd="0" presId="urn:microsoft.com/office/officeart/2005/8/layout/cycle2"/>
+    <dgm:cxn modelId="{65FC3145-9A4C-4A4F-AF14-49764628EBD3}" srcId="{33593B13-573B-46CE-8FCA-7C2A68872B1D}" destId="{5DAFE5AF-FF55-4E4F-BA23-C5C1FF201593}" srcOrd="1" destOrd="0" parTransId="{64EA23CE-89CA-4C2D-B973-8D82BD9FFD7D}" sibTransId="{50B0BE9F-A167-4D2A-A85F-949AC98106E7}"/>
+    <dgm:cxn modelId="{1737366B-069F-4EDE-8128-3A7BCB7D06C4}" srcId="{33593B13-573B-46CE-8FCA-7C2A68872B1D}" destId="{980534B3-138A-4BF0-811C-2880A364E5E3}" srcOrd="3" destOrd="0" parTransId="{224624C8-B18C-4596-9933-9EE084321652}" sibTransId="{69ECA4A4-C40E-4711-9862-D9EDFEA58DFD}"/>
+    <dgm:cxn modelId="{E803366D-49F0-4105-B60C-3D88E135EFFD}" type="presOf" srcId="{50B0BE9F-A167-4D2A-A85F-949AC98106E7}" destId="{09F840B2-B8C1-4516-9578-423E385141CB}" srcOrd="0" destOrd="0" presId="urn:microsoft.com/office/officeart/2005/8/layout/cycle2"/>
+    <dgm:cxn modelId="{32AE1A4E-4571-4C6E-B236-266D82823E68}" type="presOf" srcId="{C2A30FED-D09D-45BB-B356-CDFA7382C98E}" destId="{ACF48D52-2113-4AF0-BD2E-01B600682D7E}" srcOrd="0" destOrd="0" presId="urn:microsoft.com/office/officeart/2005/8/layout/cycle2"/>
+    <dgm:cxn modelId="{C3934173-8B2F-44C2-8DEF-FF7AB0FB9B1E}" srcId="{33593B13-573B-46CE-8FCA-7C2A68872B1D}" destId="{28B58F8B-BA5B-4E28-911B-D5D3E9926F0A}" srcOrd="4" destOrd="0" parTransId="{41078E34-4901-47A6-81AA-E80BE5B426E6}" sibTransId="{C2A30FED-D09D-45BB-B356-CDFA7382C98E}"/>
+    <dgm:cxn modelId="{6101CE7D-0EF2-435E-8C8D-8813BC041090}" type="presOf" srcId="{69ECA4A4-C40E-4711-9862-D9EDFEA58DFD}" destId="{63ABB13E-0A21-42EA-ABA0-BABDDEAB4741}" srcOrd="0" destOrd="0" presId="urn:microsoft.com/office/officeart/2005/8/layout/cycle2"/>
+    <dgm:cxn modelId="{E7A82480-0763-4C6B-A77E-F93681198357}" type="presOf" srcId="{69ECA4A4-C40E-4711-9862-D9EDFEA58DFD}" destId="{1E2935DD-58B1-43EA-B891-7093C2F2A043}" srcOrd="1" destOrd="0" presId="urn:microsoft.com/office/officeart/2005/8/layout/cycle2"/>
+    <dgm:cxn modelId="{7BE05E82-55AF-4F87-AD84-103C9E0037F8}" type="presOf" srcId="{2AD74F87-084C-45DC-B4FE-B16B41D14166}" destId="{512B899C-35DE-49C3-BFAA-FB254B345C28}" srcOrd="0" destOrd="0" presId="urn:microsoft.com/office/officeart/2005/8/layout/cycle2"/>
+    <dgm:cxn modelId="{7F1FA18C-6F30-4132-8EDB-A5CE5016207A}" type="presOf" srcId="{80EE36D8-EA2C-4AE8-AC80-C1F3854DF796}" destId="{98B95665-7430-4C57-9D11-EB344D6EA583}" srcOrd="0" destOrd="0" presId="urn:microsoft.com/office/officeart/2005/8/layout/cycle2"/>
+    <dgm:cxn modelId="{F527E9BE-0ECD-47C2-889C-DA282220CB6A}" type="presOf" srcId="{28B58F8B-BA5B-4E28-911B-D5D3E9926F0A}" destId="{2967063F-5EC8-41F9-A97E-CEC3E0366EE8}" srcOrd="0" destOrd="0" presId="urn:microsoft.com/office/officeart/2005/8/layout/cycle2"/>
+    <dgm:cxn modelId="{C0FA9EC9-5914-430F-8B21-358106290036}" type="presOf" srcId="{980534B3-138A-4BF0-811C-2880A364E5E3}" destId="{8470668F-1D1F-48C1-9630-0B14444AB3EE}" srcOrd="0" destOrd="0" presId="urn:microsoft.com/office/officeart/2005/8/layout/cycle2"/>
+    <dgm:cxn modelId="{1DE2A2D3-B3DA-4759-BAA4-74F421D90AA0}" type="presOf" srcId="{6587E555-C29A-4460-969B-18FD83DBB236}" destId="{49C64482-97FB-4B79-B727-ABC0618346C7}" srcOrd="0" destOrd="0" presId="urn:microsoft.com/office/officeart/2005/8/layout/cycle2"/>
+    <dgm:cxn modelId="{15307ADA-A073-4843-91CC-ED95E2E88AA5}" srcId="{33593B13-573B-46CE-8FCA-7C2A68872B1D}" destId="{2AD74F87-084C-45DC-B4FE-B16B41D14166}" srcOrd="2" destOrd="0" parTransId="{D2B409CA-1666-4320-9FF4-E329512AAC09}" sibTransId="{6587E555-C29A-4460-969B-18FD83DBB236}"/>
+    <dgm:cxn modelId="{640BABDB-0236-4445-8C6C-22B93A947949}" type="presOf" srcId="{DD1E9127-438E-44E8-B1AE-23C0F67DBBD5}" destId="{F504D745-09E2-4F83-89D5-03F3D2A75889}" srcOrd="0" destOrd="0" presId="urn:microsoft.com/office/officeart/2005/8/layout/cycle2"/>
+    <dgm:cxn modelId="{580841E5-E19D-4368-992B-9854D72AC34C}" srcId="{33593B13-573B-46CE-8FCA-7C2A68872B1D}" destId="{80EE36D8-EA2C-4AE8-AC80-C1F3854DF796}" srcOrd="0" destOrd="0" parTransId="{325F4D9E-28FE-42AE-8CCB-EF5DAB1DDDED}" sibTransId="{DD1E9127-438E-44E8-B1AE-23C0F67DBBD5}"/>
+    <dgm:cxn modelId="{D57652E7-C604-4771-8193-55E56A587182}" type="presOf" srcId="{50B0BE9F-A167-4D2A-A85F-949AC98106E7}" destId="{D6422543-8557-4259-AEE1-B6E44198BF59}" srcOrd="1" destOrd="0" presId="urn:microsoft.com/office/officeart/2005/8/layout/cycle2"/>
+    <dgm:cxn modelId="{13146367-ECC0-4BDC-AF13-C406378009AE}" type="presParOf" srcId="{EE3C674C-5639-4358-B549-4476C8B30A68}" destId="{98B95665-7430-4C57-9D11-EB344D6EA583}" srcOrd="0" destOrd="0" presId="urn:microsoft.com/office/officeart/2005/8/layout/cycle2"/>
+    <dgm:cxn modelId="{A3ED7CB0-892A-40EA-912B-0F2152CF525C}" type="presParOf" srcId="{EE3C674C-5639-4358-B549-4476C8B30A68}" destId="{F504D745-09E2-4F83-89D5-03F3D2A75889}" srcOrd="1" destOrd="0" presId="urn:microsoft.com/office/officeart/2005/8/layout/cycle2"/>
+    <dgm:cxn modelId="{D177A5C5-9F04-4D86-A180-35CCAEE3C45D}" type="presParOf" srcId="{F504D745-09E2-4F83-89D5-03F3D2A75889}" destId="{4F51BE3D-2C51-4205-9820-2CB5D4F8BDFD}" srcOrd="0" destOrd="0" presId="urn:microsoft.com/office/officeart/2005/8/layout/cycle2"/>
+    <dgm:cxn modelId="{AF74C2B6-41C9-4382-BC63-E2EB3278EC14}" type="presParOf" srcId="{EE3C674C-5639-4358-B549-4476C8B30A68}" destId="{20A9C2FE-6FAC-48E0-BCCF-86A44D9EFD81}" srcOrd="2" destOrd="0" presId="urn:microsoft.com/office/officeart/2005/8/layout/cycle2"/>
+    <dgm:cxn modelId="{560EFB18-6C91-49D8-9C48-198BA5BC8C49}" type="presParOf" srcId="{EE3C674C-5639-4358-B549-4476C8B30A68}" destId="{09F840B2-B8C1-4516-9578-423E385141CB}" srcOrd="3" destOrd="0" presId="urn:microsoft.com/office/officeart/2005/8/layout/cycle2"/>
+    <dgm:cxn modelId="{E72EB53C-6C66-4AB0-8630-38BE05281DAE}" type="presParOf" srcId="{09F840B2-B8C1-4516-9578-423E385141CB}" destId="{D6422543-8557-4259-AEE1-B6E44198BF59}" srcOrd="0" destOrd="0" presId="urn:microsoft.com/office/officeart/2005/8/layout/cycle2"/>
+    <dgm:cxn modelId="{071AC74B-8165-4B21-9540-052F3ECCF8BD}" type="presParOf" srcId="{EE3C674C-5639-4358-B549-4476C8B30A68}" destId="{512B899C-35DE-49C3-BFAA-FB254B345C28}" srcOrd="4" destOrd="0" presId="urn:microsoft.com/office/officeart/2005/8/layout/cycle2"/>
+    <dgm:cxn modelId="{A1B2C561-5563-4C77-8BB9-3CC6CF617393}" type="presParOf" srcId="{EE3C674C-5639-4358-B549-4476C8B30A68}" destId="{49C64482-97FB-4B79-B727-ABC0618346C7}" srcOrd="5" destOrd="0" presId="urn:microsoft.com/office/officeart/2005/8/layout/cycle2"/>
+    <dgm:cxn modelId="{2FB38A76-F14C-41CB-A099-60F3BD3DD83C}" type="presParOf" srcId="{49C64482-97FB-4B79-B727-ABC0618346C7}" destId="{060799B9-93E7-4776-B5B4-AC85DBA4D0C6}" srcOrd="0" destOrd="0" presId="urn:microsoft.com/office/officeart/2005/8/layout/cycle2"/>
+    <dgm:cxn modelId="{9B33E710-1D90-4F2A-8361-3A21DE82C32F}" type="presParOf" srcId="{EE3C674C-5639-4358-B549-4476C8B30A68}" destId="{8470668F-1D1F-48C1-9630-0B14444AB3EE}" srcOrd="6" destOrd="0" presId="urn:microsoft.com/office/officeart/2005/8/layout/cycle2"/>
+    <dgm:cxn modelId="{B6768F07-2BF5-4787-B402-F8BBDABB0820}" type="presParOf" srcId="{EE3C674C-5639-4358-B549-4476C8B30A68}" destId="{63ABB13E-0A21-42EA-ABA0-BABDDEAB4741}" srcOrd="7" destOrd="0" presId="urn:microsoft.com/office/officeart/2005/8/layout/cycle2"/>
+    <dgm:cxn modelId="{05F963D9-E838-4BA5-9FCB-6CFEAD330628}" type="presParOf" srcId="{63ABB13E-0A21-42EA-ABA0-BABDDEAB4741}" destId="{1E2935DD-58B1-43EA-B891-7093C2F2A043}" srcOrd="0" destOrd="0" presId="urn:microsoft.com/office/officeart/2005/8/layout/cycle2"/>
+    <dgm:cxn modelId="{DD93D178-B300-4FD5-9A3A-DD59B4CDA4E8}" type="presParOf" srcId="{EE3C674C-5639-4358-B549-4476C8B30A68}" destId="{2967063F-5EC8-41F9-A97E-CEC3E0366EE8}" srcOrd="8" destOrd="0" presId="urn:microsoft.com/office/officeart/2005/8/layout/cycle2"/>
+    <dgm:cxn modelId="{50D11DFB-A5F9-4E51-B48A-15E6285B1D53}" type="presParOf" srcId="{EE3C674C-5639-4358-B549-4476C8B30A68}" destId="{ACF48D52-2113-4AF0-BD2E-01B600682D7E}" srcOrd="9" destOrd="0" presId="urn:microsoft.com/office/officeart/2005/8/layout/cycle2"/>
+    <dgm:cxn modelId="{E06C0150-2B46-4EF1-8C3B-F114672D291F}" type="presParOf" srcId="{ACF48D52-2113-4AF0-BD2E-01B600682D7E}" destId="{155931E5-6E61-4228-A0D8-4B7FE2BB6FF9}" srcOrd="0" destOrd="0" presId="urn:microsoft.com/office/officeart/2005/8/layout/cycle2"/>
   </dgm:cxnLst>
   <dgm:bg/>
   <dgm:whole/>
@@ -4193,7 +4198,7 @@
 <file path=ppt/diagrams/data4.xml><?xml version="1.0" encoding="utf-8"?>
 <dgm:dataModel xmlns:dgm="http://schemas.openxmlformats.org/drawingml/2006/diagram" xmlns:a="http://schemas.openxmlformats.org/drawingml/2006/main">
   <dgm:ptLst>
-    <dgm:pt modelId="{125F9204-57BA-4943-A849-088E2B92BB33}" type="doc">
+    <dgm:pt modelId="{01EE1C1F-02CA-4D56-8037-678867217FA4}" type="doc">
       <dgm:prSet loTypeId="urn:microsoft.com/office/officeart/2005/8/layout/default" loCatId="list" qsTypeId="urn:microsoft.com/office/officeart/2005/8/quickstyle/simple1" qsCatId="simple" csTypeId="urn:microsoft.com/office/officeart/2005/8/colors/accent1_2" csCatId="accent1" phldr="1"/>
       <dgm:spPr/>
       <dgm:t>
@@ -4204,7 +4209,7 @@
         </a:p>
       </dgm:t>
     </dgm:pt>
-    <dgm:pt modelId="{AEEAA397-914F-4986-8D3A-61726FBEB356}">
+    <dgm:pt modelId="{706EBF28-6D24-4F44-B940-E16796CB4B0E}">
       <dgm:prSet phldrT="[Text]"/>
       <dgm:spPr/>
       <dgm:t>
@@ -4218,7 +4223,7 @@
         </a:p>
       </dgm:t>
     </dgm:pt>
-    <dgm:pt modelId="{62891D26-7FC1-40A7-BB21-961A054DD263}" type="parTrans" cxnId="{159CB189-22D9-4C93-BBBA-F27B9DA2C041}">
+    <dgm:pt modelId="{819CBBCC-6742-45ED-A5BE-9ECE6C599DCA}" type="parTrans" cxnId="{B82622EE-8E3A-406E-9DE0-33231F0F7407}">
       <dgm:prSet/>
       <dgm:spPr/>
       <dgm:t>
@@ -4229,7 +4234,7 @@
         </a:p>
       </dgm:t>
     </dgm:pt>
-    <dgm:pt modelId="{53249703-8B7B-4679-92DF-0D8679F2F500}" type="sibTrans" cxnId="{159CB189-22D9-4C93-BBBA-F27B9DA2C041}">
+    <dgm:pt modelId="{76C9569C-559F-49A9-BE20-4565BC7CF649}" type="sibTrans" cxnId="{B82622EE-8E3A-406E-9DE0-33231F0F7407}">
       <dgm:prSet/>
       <dgm:spPr/>
       <dgm:t>
@@ -4240,7 +4245,7 @@
         </a:p>
       </dgm:t>
     </dgm:pt>
-    <dgm:pt modelId="{B4C4D745-EAEF-44B4-8335-C790D506590E}">
+    <dgm:pt modelId="{1A7EC41E-56DC-4AF2-9D6E-BCA915035708}">
       <dgm:prSet phldrT="[Text]"/>
       <dgm:spPr/>
       <dgm:t>
@@ -4254,7 +4259,7 @@
         </a:p>
       </dgm:t>
     </dgm:pt>
-    <dgm:pt modelId="{D0E0E435-D0D1-4A0A-A4A7-8DF3288EDAEE}" type="parTrans" cxnId="{5DA9D26D-2EA3-47A6-A630-A30ABB055A46}">
+    <dgm:pt modelId="{4BFA1E5D-540E-40FD-8E1E-0946929F69A2}" type="parTrans" cxnId="{16876D2C-CCEC-4C4A-AA11-79DA823D031E}">
       <dgm:prSet/>
       <dgm:spPr/>
       <dgm:t>
@@ -4265,7 +4270,7 @@
         </a:p>
       </dgm:t>
     </dgm:pt>
-    <dgm:pt modelId="{FF04C971-7E85-4208-9FA3-DD4EFD120D5F}" type="sibTrans" cxnId="{5DA9D26D-2EA3-47A6-A630-A30ABB055A46}">
+    <dgm:pt modelId="{F8CB69E8-C621-4183-A89E-3A24CB2FA25B}" type="sibTrans" cxnId="{16876D2C-CCEC-4C4A-AA11-79DA823D031E}">
       <dgm:prSet/>
       <dgm:spPr/>
       <dgm:t>
@@ -4276,7 +4281,7 @@
         </a:p>
       </dgm:t>
     </dgm:pt>
-    <dgm:pt modelId="{55D034AE-4A8D-424F-8921-CA302106ECB2}">
+    <dgm:pt modelId="{B93CB4E0-32A0-4A82-ACE9-A22A2FE38405}">
       <dgm:prSet phldrT="[Text]"/>
       <dgm:spPr/>
       <dgm:t>
@@ -4290,7 +4295,7 @@
         </a:p>
       </dgm:t>
     </dgm:pt>
-    <dgm:pt modelId="{61DBA711-2FFA-4536-9B76-84122497A1FD}" type="parTrans" cxnId="{24022ED7-4AFF-4A7A-BBD6-E40A91C7EE69}">
+    <dgm:pt modelId="{D0A09781-6E36-426F-AC8B-A4D12D9BF2F2}" type="parTrans" cxnId="{48AE78D6-1386-4FEF-A7A1-DCFD05E099ED}">
       <dgm:prSet/>
       <dgm:spPr/>
       <dgm:t>
@@ -4301,7 +4306,7 @@
         </a:p>
       </dgm:t>
     </dgm:pt>
-    <dgm:pt modelId="{C1EA0F04-BF34-4B14-B72D-EB28E3BEFC55}" type="sibTrans" cxnId="{24022ED7-4AFF-4A7A-BBD6-E40A91C7EE69}">
+    <dgm:pt modelId="{F4F1A036-B8E3-44EB-987D-D289F5B002F1}" type="sibTrans" cxnId="{48AE78D6-1386-4FEF-A7A1-DCFD05E099ED}">
       <dgm:prSet/>
       <dgm:spPr/>
       <dgm:t>
@@ -4312,7 +4317,7 @@
         </a:p>
       </dgm:t>
     </dgm:pt>
-    <dgm:pt modelId="{9B8705F1-9115-4FDB-A56E-A763F4A7DFB0}">
+    <dgm:pt modelId="{087D6B36-461C-4225-BD92-360ACD251900}">
       <dgm:prSet phldrT="[Text]"/>
       <dgm:spPr/>
       <dgm:t>
@@ -4326,7 +4331,7 @@
         </a:p>
       </dgm:t>
     </dgm:pt>
-    <dgm:pt modelId="{29164381-3ACB-4165-9E1E-4B93EAC6718D}" type="parTrans" cxnId="{FF7FB041-CC3F-4245-8732-1CD0031E254C}">
+    <dgm:pt modelId="{F139FD63-C515-4EE2-9BCF-9931759A5C47}" type="parTrans" cxnId="{A249BA56-6BDC-4679-B198-0AF09325C19C}">
       <dgm:prSet/>
       <dgm:spPr/>
       <dgm:t>
@@ -4337,7 +4342,7 @@
         </a:p>
       </dgm:t>
     </dgm:pt>
-    <dgm:pt modelId="{CAF92508-6185-488C-92ED-7D2BE0B129D4}" type="sibTrans" cxnId="{FF7FB041-CC3F-4245-8732-1CD0031E254C}">
+    <dgm:pt modelId="{FFCF5351-3B01-406B-B30F-59E7D472EE42}" type="sibTrans" cxnId="{A249BA56-6BDC-4679-B198-0AF09325C19C}">
       <dgm:prSet/>
       <dgm:spPr/>
       <dgm:t>
@@ -4348,7 +4353,7 @@
         </a:p>
       </dgm:t>
     </dgm:pt>
-    <dgm:pt modelId="{18938518-13A1-4E5F-9BBF-142FDE05E817}">
+    <dgm:pt modelId="{433CE14E-C557-4848-8D91-A60557736433}">
       <dgm:prSet phldrT="[Text]" phldr="1"/>
       <dgm:spPr/>
       <dgm:t>
@@ -4359,7 +4364,7 @@
         </a:p>
       </dgm:t>
     </dgm:pt>
-    <dgm:pt modelId="{5212A46F-84A8-4A60-9DE9-AD60CE2DB4E3}" type="parTrans" cxnId="{B87CAC53-F1FF-4D5B-B449-D79483F8F498}">
+    <dgm:pt modelId="{ED99B8E8-0BBB-4E48-8F41-11054AFCB053}" type="parTrans" cxnId="{2B72DFAA-1A0E-4EC1-8FE9-A9C43056A0B2}">
       <dgm:prSet/>
       <dgm:spPr/>
       <dgm:t>
@@ -4370,7 +4375,7 @@
         </a:p>
       </dgm:t>
     </dgm:pt>
-    <dgm:pt modelId="{C41C2B0B-9C69-418C-A4F6-42059BD93020}" type="sibTrans" cxnId="{B87CAC53-F1FF-4D5B-B449-D79483F8F498}">
+    <dgm:pt modelId="{A18E1E39-C346-4D26-9515-610287D57D1F}" type="sibTrans" cxnId="{2B72DFAA-1A0E-4EC1-8FE9-A9C43056A0B2}">
       <dgm:prSet/>
       <dgm:spPr/>
       <dgm:t>
@@ -4381,8 +4386,8 @@
         </a:p>
       </dgm:t>
     </dgm:pt>
-    <dgm:pt modelId="{9FE26FAA-DC29-4E4B-91E2-7EB436E3E1E4}" type="pres">
-      <dgm:prSet presAssocID="{125F9204-57BA-4943-A849-088E2B92BB33}" presName="diagram" presStyleCnt="0">
+    <dgm:pt modelId="{6E6BD372-5617-4902-92AE-6723463C8101}" type="pres">
+      <dgm:prSet presAssocID="{01EE1C1F-02CA-4D56-8037-678867217FA4}" presName="diagram" presStyleCnt="0">
         <dgm:presLayoutVars>
           <dgm:dir/>
           <dgm:resizeHandles val="exact"/>
@@ -4390,56 +4395,56 @@
       </dgm:prSet>
       <dgm:spPr/>
     </dgm:pt>
-    <dgm:pt modelId="{43CFB00B-BF3E-4389-9568-FFCE2BEACA1A}" type="pres">
-      <dgm:prSet presAssocID="{AEEAA397-914F-4986-8D3A-61726FBEB356}" presName="node" presStyleLbl="node1" presStyleIdx="0" presStyleCnt="5">
+    <dgm:pt modelId="{04F1A756-B863-45A4-9C2D-70F570FA4B1F}" type="pres">
+      <dgm:prSet presAssocID="{706EBF28-6D24-4F44-B940-E16796CB4B0E}" presName="node" presStyleLbl="node1" presStyleIdx="0" presStyleCnt="5">
         <dgm:presLayoutVars>
           <dgm:bulletEnabled val="1"/>
         </dgm:presLayoutVars>
       </dgm:prSet>
       <dgm:spPr/>
     </dgm:pt>
-    <dgm:pt modelId="{FFB213A0-D675-4F06-A846-F6E6A6A0BE73}" type="pres">
-      <dgm:prSet presAssocID="{53249703-8B7B-4679-92DF-0D8679F2F500}" presName="sibTrans" presStyleCnt="0"/>
+    <dgm:pt modelId="{484B2C73-0146-4BAE-A28B-02B0D1AA7C40}" type="pres">
+      <dgm:prSet presAssocID="{76C9569C-559F-49A9-BE20-4565BC7CF649}" presName="sibTrans" presStyleCnt="0"/>
       <dgm:spPr/>
     </dgm:pt>
-    <dgm:pt modelId="{AF91FF73-FFAD-4A0B-A252-C7E86A0D553E}" type="pres">
-      <dgm:prSet presAssocID="{B4C4D745-EAEF-44B4-8335-C790D506590E}" presName="node" presStyleLbl="node1" presStyleIdx="1" presStyleCnt="5">
+    <dgm:pt modelId="{4D3B6BE7-E1F9-47A3-8F6C-8759D59274D7}" type="pres">
+      <dgm:prSet presAssocID="{1A7EC41E-56DC-4AF2-9D6E-BCA915035708}" presName="node" presStyleLbl="node1" presStyleIdx="1" presStyleCnt="5">
         <dgm:presLayoutVars>
           <dgm:bulletEnabled val="1"/>
         </dgm:presLayoutVars>
       </dgm:prSet>
       <dgm:spPr/>
     </dgm:pt>
-    <dgm:pt modelId="{02C7C7EE-8F33-46B4-9D9A-DB5F14A41069}" type="pres">
-      <dgm:prSet presAssocID="{FF04C971-7E85-4208-9FA3-DD4EFD120D5F}" presName="sibTrans" presStyleCnt="0"/>
+    <dgm:pt modelId="{83DB5C8A-DAB5-4BDB-B951-A6BE15898D81}" type="pres">
+      <dgm:prSet presAssocID="{F8CB69E8-C621-4183-A89E-3A24CB2FA25B}" presName="sibTrans" presStyleCnt="0"/>
       <dgm:spPr/>
     </dgm:pt>
-    <dgm:pt modelId="{DAF86D26-EA50-42DB-964B-F62275B3A11A}" type="pres">
-      <dgm:prSet presAssocID="{55D034AE-4A8D-424F-8921-CA302106ECB2}" presName="node" presStyleLbl="node1" presStyleIdx="2" presStyleCnt="5">
+    <dgm:pt modelId="{D70549BC-4C67-45DF-BD13-9807E2E3AF5B}" type="pres">
+      <dgm:prSet presAssocID="{B93CB4E0-32A0-4A82-ACE9-A22A2FE38405}" presName="node" presStyleLbl="node1" presStyleIdx="2" presStyleCnt="5">
         <dgm:presLayoutVars>
           <dgm:bulletEnabled val="1"/>
         </dgm:presLayoutVars>
       </dgm:prSet>
       <dgm:spPr/>
     </dgm:pt>
-    <dgm:pt modelId="{C04A6A1E-0D4E-4243-B062-A09583DD22D1}" type="pres">
-      <dgm:prSet presAssocID="{C1EA0F04-BF34-4B14-B72D-EB28E3BEFC55}" presName="sibTrans" presStyleCnt="0"/>
+    <dgm:pt modelId="{E056FCB1-3D06-4D91-A739-CC5811F44926}" type="pres">
+      <dgm:prSet presAssocID="{F4F1A036-B8E3-44EB-987D-D289F5B002F1}" presName="sibTrans" presStyleCnt="0"/>
       <dgm:spPr/>
     </dgm:pt>
-    <dgm:pt modelId="{C7260A02-F01E-437C-B2C3-E89370239EAB}" type="pres">
-      <dgm:prSet presAssocID="{9B8705F1-9115-4FDB-A56E-A763F4A7DFB0}" presName="node" presStyleLbl="node1" presStyleIdx="3" presStyleCnt="5">
+    <dgm:pt modelId="{BA4306C3-2617-47D9-A4CE-714EFFB52A87}" type="pres">
+      <dgm:prSet presAssocID="{087D6B36-461C-4225-BD92-360ACD251900}" presName="node" presStyleLbl="node1" presStyleIdx="3" presStyleCnt="5">
         <dgm:presLayoutVars>
           <dgm:bulletEnabled val="1"/>
         </dgm:presLayoutVars>
       </dgm:prSet>
       <dgm:spPr/>
     </dgm:pt>
-    <dgm:pt modelId="{29FDCE67-BBA2-405A-BA0A-0302CF730F61}" type="pres">
-      <dgm:prSet presAssocID="{CAF92508-6185-488C-92ED-7D2BE0B129D4}" presName="sibTrans" presStyleCnt="0"/>
+    <dgm:pt modelId="{2407871A-0F5A-4F3B-9CF5-5B70C7F21364}" type="pres">
+      <dgm:prSet presAssocID="{FFCF5351-3B01-406B-B30F-59E7D472EE42}" presName="sibTrans" presStyleCnt="0"/>
       <dgm:spPr/>
     </dgm:pt>
-    <dgm:pt modelId="{8FF10066-9DBB-4CBE-880C-516A7F5D7339}" type="pres">
-      <dgm:prSet presAssocID="{18938518-13A1-4E5F-9BBF-142FDE05E817}" presName="node" presStyleLbl="node1" presStyleIdx="4" presStyleCnt="5">
+    <dgm:pt modelId="{38264B62-710D-488C-852D-879531103709}" type="pres">
+      <dgm:prSet presAssocID="{433CE14E-C557-4848-8D91-A60557736433}" presName="node" presStyleLbl="node1" presStyleIdx="4" presStyleCnt="5">
         <dgm:presLayoutVars>
           <dgm:bulletEnabled val="1"/>
         </dgm:presLayoutVars>
@@ -4448,26 +4453,26 @@
     </dgm:pt>
   </dgm:ptLst>
   <dgm:cxnLst>
-    <dgm:cxn modelId="{F844A133-085C-4073-A931-B5C546FE8B3F}" type="presOf" srcId="{18938518-13A1-4E5F-9BBF-142FDE05E817}" destId="{8FF10066-9DBB-4CBE-880C-516A7F5D7339}" srcOrd="0" destOrd="0" presId="urn:microsoft.com/office/officeart/2005/8/layout/default"/>
-    <dgm:cxn modelId="{FF7FB041-CC3F-4245-8732-1CD0031E254C}" srcId="{125F9204-57BA-4943-A849-088E2B92BB33}" destId="{9B8705F1-9115-4FDB-A56E-A763F4A7DFB0}" srcOrd="3" destOrd="0" parTransId="{29164381-3ACB-4165-9E1E-4B93EAC6718D}" sibTransId="{CAF92508-6185-488C-92ED-7D2BE0B129D4}"/>
-    <dgm:cxn modelId="{5DA9D26D-2EA3-47A6-A630-A30ABB055A46}" srcId="{125F9204-57BA-4943-A849-088E2B92BB33}" destId="{B4C4D745-EAEF-44B4-8335-C790D506590E}" srcOrd="1" destOrd="0" parTransId="{D0E0E435-D0D1-4A0A-A4A7-8DF3288EDAEE}" sibTransId="{FF04C971-7E85-4208-9FA3-DD4EFD120D5F}"/>
-    <dgm:cxn modelId="{B87CAC53-F1FF-4D5B-B449-D79483F8F498}" srcId="{125F9204-57BA-4943-A849-088E2B92BB33}" destId="{18938518-13A1-4E5F-9BBF-142FDE05E817}" srcOrd="4" destOrd="0" parTransId="{5212A46F-84A8-4A60-9DE9-AD60CE2DB4E3}" sibTransId="{C41C2B0B-9C69-418C-A4F6-42059BD93020}"/>
-    <dgm:cxn modelId="{07668E76-62E7-4194-9088-896D840BAF4C}" type="presOf" srcId="{125F9204-57BA-4943-A849-088E2B92BB33}" destId="{9FE26FAA-DC29-4E4B-91E2-7EB436E3E1E4}" srcOrd="0" destOrd="0" presId="urn:microsoft.com/office/officeart/2005/8/layout/default"/>
-    <dgm:cxn modelId="{159CB189-22D9-4C93-BBBA-F27B9DA2C041}" srcId="{125F9204-57BA-4943-A849-088E2B92BB33}" destId="{AEEAA397-914F-4986-8D3A-61726FBEB356}" srcOrd="0" destOrd="0" parTransId="{62891D26-7FC1-40A7-BB21-961A054DD263}" sibTransId="{53249703-8B7B-4679-92DF-0D8679F2F500}"/>
-    <dgm:cxn modelId="{DC5F809C-D8BB-4CCB-A118-E6A093541FEF}" type="presOf" srcId="{AEEAA397-914F-4986-8D3A-61726FBEB356}" destId="{43CFB00B-BF3E-4389-9568-FFCE2BEACA1A}" srcOrd="0" destOrd="0" presId="urn:microsoft.com/office/officeart/2005/8/layout/default"/>
-    <dgm:cxn modelId="{EC55DCB1-D704-4ED1-84F3-4CC79CB76AD9}" type="presOf" srcId="{55D034AE-4A8D-424F-8921-CA302106ECB2}" destId="{DAF86D26-EA50-42DB-964B-F62275B3A11A}" srcOrd="0" destOrd="0" presId="urn:microsoft.com/office/officeart/2005/8/layout/default"/>
-    <dgm:cxn modelId="{471CA0D5-B962-47E9-A699-35C6FBEAFBF5}" type="presOf" srcId="{B4C4D745-EAEF-44B4-8335-C790D506590E}" destId="{AF91FF73-FFAD-4A0B-A252-C7E86A0D553E}" srcOrd="0" destOrd="0" presId="urn:microsoft.com/office/officeart/2005/8/layout/default"/>
-    <dgm:cxn modelId="{24022ED7-4AFF-4A7A-BBD6-E40A91C7EE69}" srcId="{125F9204-57BA-4943-A849-088E2B92BB33}" destId="{55D034AE-4A8D-424F-8921-CA302106ECB2}" srcOrd="2" destOrd="0" parTransId="{61DBA711-2FFA-4536-9B76-84122497A1FD}" sibTransId="{C1EA0F04-BF34-4B14-B72D-EB28E3BEFC55}"/>
-    <dgm:cxn modelId="{097850FD-6277-432B-B4A0-8177CFCFCCD7}" type="presOf" srcId="{9B8705F1-9115-4FDB-A56E-A763F4A7DFB0}" destId="{C7260A02-F01E-437C-B2C3-E89370239EAB}" srcOrd="0" destOrd="0" presId="urn:microsoft.com/office/officeart/2005/8/layout/default"/>
-    <dgm:cxn modelId="{8D6170F0-874A-4794-AA45-40F632CC6345}" type="presParOf" srcId="{9FE26FAA-DC29-4E4B-91E2-7EB436E3E1E4}" destId="{43CFB00B-BF3E-4389-9568-FFCE2BEACA1A}" srcOrd="0" destOrd="0" presId="urn:microsoft.com/office/officeart/2005/8/layout/default"/>
-    <dgm:cxn modelId="{4E04CD06-254A-4E6B-8085-FC54A36FA034}" type="presParOf" srcId="{9FE26FAA-DC29-4E4B-91E2-7EB436E3E1E4}" destId="{FFB213A0-D675-4F06-A846-F6E6A6A0BE73}" srcOrd="1" destOrd="0" presId="urn:microsoft.com/office/officeart/2005/8/layout/default"/>
-    <dgm:cxn modelId="{05BEC159-1CCD-4609-BC20-558014CABA56}" type="presParOf" srcId="{9FE26FAA-DC29-4E4B-91E2-7EB436E3E1E4}" destId="{AF91FF73-FFAD-4A0B-A252-C7E86A0D553E}" srcOrd="2" destOrd="0" presId="urn:microsoft.com/office/officeart/2005/8/layout/default"/>
-    <dgm:cxn modelId="{5074D31F-281D-4238-9AD4-949770446ADF}" type="presParOf" srcId="{9FE26FAA-DC29-4E4B-91E2-7EB436E3E1E4}" destId="{02C7C7EE-8F33-46B4-9D9A-DB5F14A41069}" srcOrd="3" destOrd="0" presId="urn:microsoft.com/office/officeart/2005/8/layout/default"/>
-    <dgm:cxn modelId="{01715FDE-DEA5-40CB-ABCD-0C63BCF2ECA4}" type="presParOf" srcId="{9FE26FAA-DC29-4E4B-91E2-7EB436E3E1E4}" destId="{DAF86D26-EA50-42DB-964B-F62275B3A11A}" srcOrd="4" destOrd="0" presId="urn:microsoft.com/office/officeart/2005/8/layout/default"/>
-    <dgm:cxn modelId="{42D4C746-933F-403D-A9DE-BA9BD2FC49A6}" type="presParOf" srcId="{9FE26FAA-DC29-4E4B-91E2-7EB436E3E1E4}" destId="{C04A6A1E-0D4E-4243-B062-A09583DD22D1}" srcOrd="5" destOrd="0" presId="urn:microsoft.com/office/officeart/2005/8/layout/default"/>
-    <dgm:cxn modelId="{A36F43E3-C8B2-46DC-8F20-8084C452E38E}" type="presParOf" srcId="{9FE26FAA-DC29-4E4B-91E2-7EB436E3E1E4}" destId="{C7260A02-F01E-437C-B2C3-E89370239EAB}" srcOrd="6" destOrd="0" presId="urn:microsoft.com/office/officeart/2005/8/layout/default"/>
-    <dgm:cxn modelId="{23795CFE-A8E7-42BB-8417-084A5CE3D75D}" type="presParOf" srcId="{9FE26FAA-DC29-4E4B-91E2-7EB436E3E1E4}" destId="{29FDCE67-BBA2-405A-BA0A-0302CF730F61}" srcOrd="7" destOrd="0" presId="urn:microsoft.com/office/officeart/2005/8/layout/default"/>
-    <dgm:cxn modelId="{4B79CC27-99A6-46BF-B9BC-ED3C3DC6477F}" type="presParOf" srcId="{9FE26FAA-DC29-4E4B-91E2-7EB436E3E1E4}" destId="{8FF10066-9DBB-4CBE-880C-516A7F5D7339}" srcOrd="8" destOrd="0" presId="urn:microsoft.com/office/officeart/2005/8/layout/default"/>
+    <dgm:cxn modelId="{13F3F617-292D-4E30-B362-581B5696D601}" type="presOf" srcId="{433CE14E-C557-4848-8D91-A60557736433}" destId="{38264B62-710D-488C-852D-879531103709}" srcOrd="0" destOrd="0" presId="urn:microsoft.com/office/officeart/2005/8/layout/default"/>
+    <dgm:cxn modelId="{16876D2C-CCEC-4C4A-AA11-79DA823D031E}" srcId="{01EE1C1F-02CA-4D56-8037-678867217FA4}" destId="{1A7EC41E-56DC-4AF2-9D6E-BCA915035708}" srcOrd="1" destOrd="0" parTransId="{4BFA1E5D-540E-40FD-8E1E-0946929F69A2}" sibTransId="{F8CB69E8-C621-4183-A89E-3A24CB2FA25B}"/>
+    <dgm:cxn modelId="{D7AB6762-A665-4679-9AEC-0C2F99CFBCFA}" type="presOf" srcId="{087D6B36-461C-4225-BD92-360ACD251900}" destId="{BA4306C3-2617-47D9-A4CE-714EFFB52A87}" srcOrd="0" destOrd="0" presId="urn:microsoft.com/office/officeart/2005/8/layout/default"/>
+    <dgm:cxn modelId="{A249BA56-6BDC-4679-B198-0AF09325C19C}" srcId="{01EE1C1F-02CA-4D56-8037-678867217FA4}" destId="{087D6B36-461C-4225-BD92-360ACD251900}" srcOrd="3" destOrd="0" parTransId="{F139FD63-C515-4EE2-9BCF-9931759A5C47}" sibTransId="{FFCF5351-3B01-406B-B30F-59E7D472EE42}"/>
+    <dgm:cxn modelId="{A4E3A679-2461-4698-A98D-469D105E2476}" type="presOf" srcId="{706EBF28-6D24-4F44-B940-E16796CB4B0E}" destId="{04F1A756-B863-45A4-9C2D-70F570FA4B1F}" srcOrd="0" destOrd="0" presId="urn:microsoft.com/office/officeart/2005/8/layout/default"/>
+    <dgm:cxn modelId="{A5809F98-FC59-439A-AE50-DB4DBEE0D797}" type="presOf" srcId="{1A7EC41E-56DC-4AF2-9D6E-BCA915035708}" destId="{4D3B6BE7-E1F9-47A3-8F6C-8759D59274D7}" srcOrd="0" destOrd="0" presId="urn:microsoft.com/office/officeart/2005/8/layout/default"/>
+    <dgm:cxn modelId="{C3CAB6A1-EEE3-44EA-B4AE-5334BD379655}" type="presOf" srcId="{B93CB4E0-32A0-4A82-ACE9-A22A2FE38405}" destId="{D70549BC-4C67-45DF-BD13-9807E2E3AF5B}" srcOrd="0" destOrd="0" presId="urn:microsoft.com/office/officeart/2005/8/layout/default"/>
+    <dgm:cxn modelId="{2B72DFAA-1A0E-4EC1-8FE9-A9C43056A0B2}" srcId="{01EE1C1F-02CA-4D56-8037-678867217FA4}" destId="{433CE14E-C557-4848-8D91-A60557736433}" srcOrd="4" destOrd="0" parTransId="{ED99B8E8-0BBB-4E48-8F41-11054AFCB053}" sibTransId="{A18E1E39-C346-4D26-9515-610287D57D1F}"/>
+    <dgm:cxn modelId="{48AE78D6-1386-4FEF-A7A1-DCFD05E099ED}" srcId="{01EE1C1F-02CA-4D56-8037-678867217FA4}" destId="{B93CB4E0-32A0-4A82-ACE9-A22A2FE38405}" srcOrd="2" destOrd="0" parTransId="{D0A09781-6E36-426F-AC8B-A4D12D9BF2F2}" sibTransId="{F4F1A036-B8E3-44EB-987D-D289F5B002F1}"/>
+    <dgm:cxn modelId="{B82622EE-8E3A-406E-9DE0-33231F0F7407}" srcId="{01EE1C1F-02CA-4D56-8037-678867217FA4}" destId="{706EBF28-6D24-4F44-B940-E16796CB4B0E}" srcOrd="0" destOrd="0" parTransId="{819CBBCC-6742-45ED-A5BE-9ECE6C599DCA}" sibTransId="{76C9569C-559F-49A9-BE20-4565BC7CF649}"/>
+    <dgm:cxn modelId="{F2FF05FF-5CD1-4BD2-927B-DDA5175C4D20}" type="presOf" srcId="{01EE1C1F-02CA-4D56-8037-678867217FA4}" destId="{6E6BD372-5617-4902-92AE-6723463C8101}" srcOrd="0" destOrd="0" presId="urn:microsoft.com/office/officeart/2005/8/layout/default"/>
+    <dgm:cxn modelId="{B577EEAB-93FD-46CB-A49F-FA05DC1E2C75}" type="presParOf" srcId="{6E6BD372-5617-4902-92AE-6723463C8101}" destId="{04F1A756-B863-45A4-9C2D-70F570FA4B1F}" srcOrd="0" destOrd="0" presId="urn:microsoft.com/office/officeart/2005/8/layout/default"/>
+    <dgm:cxn modelId="{C34AC6B6-DABD-4285-B96B-B5FA0B36499A}" type="presParOf" srcId="{6E6BD372-5617-4902-92AE-6723463C8101}" destId="{484B2C73-0146-4BAE-A28B-02B0D1AA7C40}" srcOrd="1" destOrd="0" presId="urn:microsoft.com/office/officeart/2005/8/layout/default"/>
+    <dgm:cxn modelId="{8A9BE257-4AB6-4E4A-B696-03B65AA25F5B}" type="presParOf" srcId="{6E6BD372-5617-4902-92AE-6723463C8101}" destId="{4D3B6BE7-E1F9-47A3-8F6C-8759D59274D7}" srcOrd="2" destOrd="0" presId="urn:microsoft.com/office/officeart/2005/8/layout/default"/>
+    <dgm:cxn modelId="{4CBD2C9B-843D-4954-8540-626ACB7A3920}" type="presParOf" srcId="{6E6BD372-5617-4902-92AE-6723463C8101}" destId="{83DB5C8A-DAB5-4BDB-B951-A6BE15898D81}" srcOrd="3" destOrd="0" presId="urn:microsoft.com/office/officeart/2005/8/layout/default"/>
+    <dgm:cxn modelId="{59D3226F-C609-4716-A5E1-A33A7EC06D02}" type="presParOf" srcId="{6E6BD372-5617-4902-92AE-6723463C8101}" destId="{D70549BC-4C67-45DF-BD13-9807E2E3AF5B}" srcOrd="4" destOrd="0" presId="urn:microsoft.com/office/officeart/2005/8/layout/default"/>
+    <dgm:cxn modelId="{022E87C8-E695-4BE2-84E7-1FC21B88DCD5}" type="presParOf" srcId="{6E6BD372-5617-4902-92AE-6723463C8101}" destId="{E056FCB1-3D06-4D91-A739-CC5811F44926}" srcOrd="5" destOrd="0" presId="urn:microsoft.com/office/officeart/2005/8/layout/default"/>
+    <dgm:cxn modelId="{84A8D43C-559E-47CF-907A-31B1F9902124}" type="presParOf" srcId="{6E6BD372-5617-4902-92AE-6723463C8101}" destId="{BA4306C3-2617-47D9-A4CE-714EFFB52A87}" srcOrd="6" destOrd="0" presId="urn:microsoft.com/office/officeart/2005/8/layout/default"/>
+    <dgm:cxn modelId="{45395619-5381-4802-B4BC-5E5EEFD694BC}" type="presParOf" srcId="{6E6BD372-5617-4902-92AE-6723463C8101}" destId="{2407871A-0F5A-4F3B-9CF5-5B70C7F21364}" srcOrd="7" destOrd="0" presId="urn:microsoft.com/office/officeart/2005/8/layout/default"/>
+    <dgm:cxn modelId="{EE194311-C0B4-40B5-8AB6-0C35411763D9}" type="presParOf" srcId="{6E6BD372-5617-4902-92AE-6723463C8101}" destId="{38264B62-710D-488C-852D-879531103709}" srcOrd="8" destOrd="0" presId="urn:microsoft.com/office/officeart/2005/8/layout/default"/>
   </dgm:cxnLst>
   <dgm:bg/>
   <dgm:whole/>
@@ -4487,7 +4492,7 @@
       <dsp:cNvGrpSpPr/>
     </dsp:nvGrpSpPr>
     <dsp:grpSpPr/>
-    <dsp:sp modelId="{4F8231EB-3CE0-4F91-9854-2FCA67C6C964}">
+    <dsp:sp modelId="{13928B8B-99D9-4F5B-AD51-C2D1B8C98831}">
       <dsp:nvSpPr>
         <dsp:cNvPr id="0" name=""/>
         <dsp:cNvSpPr/>
@@ -4527,7 +4532,7 @@
         <a:fontRef idx="minor"/>
       </dsp:style>
     </dsp:sp>
-    <dsp:sp modelId="{4DB0A476-0581-49D1-97DA-A4DE8E5F3911}">
+    <dsp:sp modelId="{B8538921-88AB-477C-9316-C6174802317E}">
       <dsp:nvSpPr>
         <dsp:cNvPr id="0" name=""/>
         <dsp:cNvSpPr/>
@@ -4580,7 +4585,7 @@
         </a:fontRef>
       </dsp:style>
     </dsp:sp>
-    <dsp:sp modelId="{5B6AE87D-8DC8-464B-B873-D5C573F577EA}">
+    <dsp:sp modelId="{6015518C-1A08-4E5E-9AE8-47929964CF72}">
       <dsp:nvSpPr>
         <dsp:cNvPr id="0" name=""/>
         <dsp:cNvSpPr/>
@@ -4640,7 +4645,7 @@
         <a:ext cx="2500245" cy="3556686"/>
       </dsp:txXfrm>
     </dsp:sp>
-    <dsp:sp modelId="{3ED45AF8-FE4C-4717-9FC0-0D99075E5BF5}">
+    <dsp:sp modelId="{BF6F942A-DAA1-467D-A813-D80E4A10A270}">
       <dsp:nvSpPr>
         <dsp:cNvPr id="0" name=""/>
         <dsp:cNvSpPr/>
@@ -4700,7 +4705,7 @@
         <a:ext cx="2500245" cy="845153"/>
       </dsp:txXfrm>
     </dsp:sp>
-    <dsp:sp modelId="{35C8319C-DF4C-4551-A942-0EDF4B164AD0}">
+    <dsp:sp modelId="{C5EED73C-4D07-4A80-BDBA-0F8E701CF91D}">
       <dsp:nvSpPr>
         <dsp:cNvPr id="0" name=""/>
         <dsp:cNvSpPr/>
@@ -4740,7 +4745,7 @@
         <a:fontRef idx="minor"/>
       </dsp:style>
     </dsp:sp>
-    <dsp:sp modelId="{84B26A6A-4B88-4BA7-ABF6-80AE6059761A}">
+    <dsp:sp modelId="{BB4733EE-AC16-4FC5-BFB3-A1ADC0880B0B}">
       <dsp:nvSpPr>
         <dsp:cNvPr id="0" name=""/>
         <dsp:cNvSpPr/>
@@ -4793,7 +4798,7 @@
         </a:fontRef>
       </dsp:style>
     </dsp:sp>
-    <dsp:sp modelId="{B5FB0697-2FC2-42F7-BDF3-E76985CDF035}">
+    <dsp:sp modelId="{4E7340F6-9A6E-433E-A406-2FA8DBAF00C2}">
       <dsp:nvSpPr>
         <dsp:cNvPr id="0" name=""/>
         <dsp:cNvSpPr/>
@@ -4853,7 +4858,7 @@
         <a:ext cx="2500245" cy="3556686"/>
       </dsp:txXfrm>
     </dsp:sp>
-    <dsp:sp modelId="{5EBEE6AC-A7EB-4506-AA0A-D5ED13ADA255}">
+    <dsp:sp modelId="{5B185A13-B5F2-4999-ACFC-EE52E3D69499}">
       <dsp:nvSpPr>
         <dsp:cNvPr id="0" name=""/>
         <dsp:cNvSpPr/>
@@ -4913,7 +4918,7 @@
         <a:ext cx="2500245" cy="845153"/>
       </dsp:txXfrm>
     </dsp:sp>
-    <dsp:sp modelId="{6C95D7F6-90A1-4713-86D4-456E56977F9E}">
+    <dsp:sp modelId="{171B63C5-631D-469A-9F4F-15BE63439720}">
       <dsp:nvSpPr>
         <dsp:cNvPr id="0" name=""/>
         <dsp:cNvSpPr/>
@@ -4953,7 +4958,7 @@
         <a:fontRef idx="minor"/>
       </dsp:style>
     </dsp:sp>
-    <dsp:sp modelId="{2F794272-4F57-4451-BBE4-8203F3ECED97}">
+    <dsp:sp modelId="{3C512A18-1021-4CAB-9F2D-6F9D12DF5A9D}">
       <dsp:nvSpPr>
         <dsp:cNvPr id="0" name=""/>
         <dsp:cNvSpPr/>
@@ -5006,7 +5011,7 @@
         </a:fontRef>
       </dsp:style>
     </dsp:sp>
-    <dsp:sp modelId="{5D696007-246F-4C35-9886-67C0E2A9E05E}">
+    <dsp:sp modelId="{E4E2A3B7-96F9-4989-A2C4-F2D2B219BA75}">
       <dsp:nvSpPr>
         <dsp:cNvPr id="0" name=""/>
         <dsp:cNvSpPr/>
@@ -5063,7 +5068,7 @@
         <a:ext cx="2500245" cy="3556686"/>
       </dsp:txXfrm>
     </dsp:sp>
-    <dsp:sp modelId="{B72821BF-50F1-4870-B73F-053D7C3F5FFE}">
+    <dsp:sp modelId="{F7B20A09-93B0-4B89-8BED-77C245789921}">
       <dsp:nvSpPr>
         <dsp:cNvPr id="0" name=""/>
         <dsp:cNvSpPr/>
@@ -5135,7 +5140,7 @@
       <dsp:cNvGrpSpPr/>
     </dsp:nvGrpSpPr>
     <dsp:grpSpPr/>
-    <dsp:sp modelId="{F848075B-122D-453D-A631-F3627336B129}">
+    <dsp:sp modelId="{3BBFCB52-02FC-4FBF-9261-DC3C26CF9450}">
       <dsp:nvSpPr>
         <dsp:cNvPr id="0" name=""/>
         <dsp:cNvSpPr/>
@@ -5215,7 +5220,7 @@
         <a:ext cx="2676411" cy="1297828"/>
       </dsp:txXfrm>
     </dsp:sp>
-    <dsp:sp modelId="{BE75C443-C2DB-477D-B893-B14DBDB7CDD3}">
+    <dsp:sp modelId="{97B19CC5-E5F5-41D7-B6CF-8FB86B4F6191}">
       <dsp:nvSpPr>
         <dsp:cNvPr id="0" name=""/>
         <dsp:cNvSpPr/>
@@ -5274,7 +5279,7 @@
         <a:fontRef idx="minor"/>
       </dsp:style>
     </dsp:sp>
-    <dsp:sp modelId="{7D6DCFF5-03A0-4B98-AE49-17B92EE6E429}">
+    <dsp:sp modelId="{FBFD10FE-FEB6-42DF-BFFF-FD6922243D9E}">
       <dsp:nvSpPr>
         <dsp:cNvPr id="0" name=""/>
         <dsp:cNvSpPr/>
@@ -5353,7 +5358,7 @@
         <a:ext cx="2124978" cy="1297828"/>
       </dsp:txXfrm>
     </dsp:sp>
-    <dsp:sp modelId="{786E06C5-DAEE-4C21-91B2-E3E3F6B45B37}">
+    <dsp:sp modelId="{BB25DAD5-CC61-4586-B127-D114D32E8C05}">
       <dsp:nvSpPr>
         <dsp:cNvPr id="0" name=""/>
         <dsp:cNvSpPr/>
@@ -5412,7 +5417,7 @@
         <a:fontRef idx="minor"/>
       </dsp:style>
     </dsp:sp>
-    <dsp:sp modelId="{DF2E0F93-0E94-48A9-8A74-73D0B71F6086}">
+    <dsp:sp modelId="{50BCA223-E11A-46C2-90D6-9753E8DA26C6}">
       <dsp:nvSpPr>
         <dsp:cNvPr id="0" name=""/>
         <dsp:cNvSpPr/>
@@ -5491,7 +5496,7 @@
         <a:ext cx="2124978" cy="1297828"/>
       </dsp:txXfrm>
     </dsp:sp>
-    <dsp:sp modelId="{C05D6E24-5975-4E7C-9E2C-D017BB42C878}">
+    <dsp:sp modelId="{31C77B65-7606-4162-9DE9-6E45F042A5C0}">
       <dsp:nvSpPr>
         <dsp:cNvPr id="0" name=""/>
         <dsp:cNvSpPr/>
@@ -5571,7 +5576,7 @@
         <a:ext cx="2676411" cy="1297828"/>
       </dsp:txXfrm>
     </dsp:sp>
-    <dsp:sp modelId="{5D65F3E8-6D91-45D9-9ED7-2E9BF89EA528}">
+    <dsp:sp modelId="{E366FA6F-D514-4722-ADD2-8B8C4E7DB876}">
       <dsp:nvSpPr>
         <dsp:cNvPr id="0" name=""/>
         <dsp:cNvSpPr/>
@@ -5630,7 +5635,7 @@
         <a:fontRef idx="minor"/>
       </dsp:style>
     </dsp:sp>
-    <dsp:sp modelId="{CDEBAF4D-8D8F-4092-A954-0C7F15AE902D}">
+    <dsp:sp modelId="{9ADBB84D-DE6C-4B9A-B5B0-B3B2A94CC975}">
       <dsp:nvSpPr>
         <dsp:cNvPr id="0" name=""/>
         <dsp:cNvSpPr/>
@@ -5706,7 +5711,7 @@
         <a:ext cx="2124978" cy="1297828"/>
       </dsp:txXfrm>
     </dsp:sp>
-    <dsp:sp modelId="{806B75C1-4C46-4B8E-9CE6-18E25F711339}">
+    <dsp:sp modelId="{D87CB2CE-737E-461A-B20C-8B63923DECC7}">
       <dsp:nvSpPr>
         <dsp:cNvPr id="0" name=""/>
         <dsp:cNvSpPr/>
@@ -5765,7 +5770,7 @@
         <a:fontRef idx="minor"/>
       </dsp:style>
     </dsp:sp>
-    <dsp:sp modelId="{FEFF3AFD-B1E3-4F9D-8AAF-35DCE9D25457}">
+    <dsp:sp modelId="{F3B2C1E5-3812-495B-A0F3-D6725C26DD31}">
       <dsp:nvSpPr>
         <dsp:cNvPr id="0" name=""/>
         <dsp:cNvSpPr/>
@@ -5853,7 +5858,7 @@
       <dsp:cNvGrpSpPr/>
     </dsp:nvGrpSpPr>
     <dsp:grpSpPr/>
-    <dsp:sp modelId="{99D1FDD7-DA14-4232-BDF0-6E1CAE4ED092}">
+    <dsp:sp modelId="{98B95665-7430-4C57-9D11-EB344D6EA583}">
       <dsp:nvSpPr>
         <dsp:cNvPr id="0" name=""/>
         <dsp:cNvSpPr/>
@@ -5931,7 +5936,7 @@
         <a:ext cx="1029485" cy="1029485"/>
       </dsp:txXfrm>
     </dsp:sp>
-    <dsp:sp modelId="{3F1E6E0A-4E30-4584-AB14-0854EEE7770E}">
+    <dsp:sp modelId="{F504D745-09E2-4F83-89D5-03F3D2A75889}">
       <dsp:nvSpPr>
         <dsp:cNvPr id="0" name=""/>
         <dsp:cNvSpPr/>
@@ -6001,7 +6006,7 @@
         <a:ext cx="272204" cy="294822"/>
       </dsp:txXfrm>
     </dsp:sp>
-    <dsp:sp modelId="{3D9D0C5C-EB3D-4EF4-B13F-A4A1C922AD77}">
+    <dsp:sp modelId="{20A9C2FE-6FAC-48E0-BCCF-86A44D9EFD81}">
       <dsp:nvSpPr>
         <dsp:cNvPr id="0" name=""/>
         <dsp:cNvSpPr/>
@@ -6079,7 +6084,7 @@
         <a:ext cx="1029485" cy="1029485"/>
       </dsp:txXfrm>
     </dsp:sp>
-    <dsp:sp modelId="{6411B9E6-AC5D-4F08-AF2B-28F756CA0998}">
+    <dsp:sp modelId="{09F840B2-B8C1-4516-9578-423E385141CB}">
       <dsp:nvSpPr>
         <dsp:cNvPr id="0" name=""/>
         <dsp:cNvSpPr/>
@@ -6149,7 +6154,7 @@
         <a:ext cx="272204" cy="294822"/>
       </dsp:txXfrm>
     </dsp:sp>
-    <dsp:sp modelId="{36E86C8C-B50F-4AFF-A161-D56945049EA6}">
+    <dsp:sp modelId="{512B899C-35DE-49C3-BFAA-FB254B345C28}">
       <dsp:nvSpPr>
         <dsp:cNvPr id="0" name=""/>
         <dsp:cNvSpPr/>
@@ -6227,7 +6232,7 @@
         <a:ext cx="1029485" cy="1029485"/>
       </dsp:txXfrm>
     </dsp:sp>
-    <dsp:sp modelId="{FE6D5C23-5581-4D35-9D5E-15060DE81448}">
+    <dsp:sp modelId="{49C64482-97FB-4B79-B727-ABC0618346C7}">
       <dsp:nvSpPr>
         <dsp:cNvPr id="0" name=""/>
         <dsp:cNvSpPr/>
@@ -6297,7 +6302,7 @@
         <a:ext cx="272204" cy="294822"/>
       </dsp:txXfrm>
     </dsp:sp>
-    <dsp:sp modelId="{5729C66D-7FE3-44F2-9E8F-0306F2CDA3AC}">
+    <dsp:sp modelId="{8470668F-1D1F-48C1-9630-0B14444AB3EE}">
       <dsp:nvSpPr>
         <dsp:cNvPr id="0" name=""/>
         <dsp:cNvSpPr/>
@@ -6375,7 +6380,7 @@
         <a:ext cx="1029485" cy="1029485"/>
       </dsp:txXfrm>
     </dsp:sp>
-    <dsp:sp modelId="{83916250-02E7-4CC4-90DC-15ED29D797B5}">
+    <dsp:sp modelId="{63ABB13E-0A21-42EA-ABA0-BABDDEAB4741}">
       <dsp:nvSpPr>
         <dsp:cNvPr id="0" name=""/>
         <dsp:cNvSpPr/>
@@ -6445,7 +6450,7 @@
         <a:ext cx="272204" cy="294822"/>
       </dsp:txXfrm>
     </dsp:sp>
-    <dsp:sp modelId="{81EE6246-BFF1-439B-82C8-16521A9E3B22}">
+    <dsp:sp modelId="{2967063F-5EC8-41F9-A97E-CEC3E0366EE8}">
       <dsp:nvSpPr>
         <dsp:cNvPr id="0" name=""/>
         <dsp:cNvSpPr/>
@@ -6523,7 +6528,7 @@
         <a:ext cx="1029485" cy="1029485"/>
       </dsp:txXfrm>
     </dsp:sp>
-    <dsp:sp modelId="{C425D504-CD43-4AD4-A977-B7E79351B53B}">
+    <dsp:sp modelId="{ACF48D52-2113-4AF0-BD2E-01B600682D7E}">
       <dsp:nvSpPr>
         <dsp:cNvPr id="0" name=""/>
         <dsp:cNvSpPr/>
@@ -6605,7 +6610,7 @@
       <dsp:cNvGrpSpPr/>
     </dsp:nvGrpSpPr>
     <dsp:grpSpPr/>
-    <dsp:sp modelId="{43CFB00B-BF3E-4389-9568-FFCE2BEACA1A}">
+    <dsp:sp modelId="{04F1A756-B863-45A4-9C2D-70F570FA4B1F}">
       <dsp:nvSpPr>
         <dsp:cNvPr id="0" name=""/>
         <dsp:cNvSpPr/>
@@ -6683,7 +6688,7 @@
         <a:ext cx="3413125" cy="2047875"/>
       </dsp:txXfrm>
     </dsp:sp>
-    <dsp:sp modelId="{AF91FF73-FFAD-4A0B-A252-C7E86A0D553E}">
+    <dsp:sp modelId="{4D3B6BE7-E1F9-47A3-8F6C-8759D59274D7}">
       <dsp:nvSpPr>
         <dsp:cNvPr id="0" name=""/>
         <dsp:cNvSpPr/>
@@ -6761,7 +6766,7 @@
         <a:ext cx="3413125" cy="2047875"/>
       </dsp:txXfrm>
     </dsp:sp>
-    <dsp:sp modelId="{DAF86D26-EA50-42DB-964B-F62275B3A11A}">
+    <dsp:sp modelId="{D70549BC-4C67-45DF-BD13-9807E2E3AF5B}">
       <dsp:nvSpPr>
         <dsp:cNvPr id="0" name=""/>
         <dsp:cNvSpPr/>
@@ -6839,7 +6844,7 @@
         <a:ext cx="3413125" cy="2047875"/>
       </dsp:txXfrm>
     </dsp:sp>
-    <dsp:sp modelId="{C7260A02-F01E-437C-B2C3-E89370239EAB}">
+    <dsp:sp modelId="{BA4306C3-2617-47D9-A4CE-714EFFB52A87}">
       <dsp:nvSpPr>
         <dsp:cNvPr id="0" name=""/>
         <dsp:cNvSpPr/>
@@ -6917,7 +6922,7 @@
         <a:ext cx="3413125" cy="2047875"/>
       </dsp:txXfrm>
     </dsp:sp>
-    <dsp:sp modelId="{8FF10066-9DBB-4CBE-880C-516A7F5D7339}">
+    <dsp:sp modelId="{38264B62-710D-488C-852D-879531103709}">
       <dsp:nvSpPr>
         <dsp:cNvPr id="0" name=""/>
         <dsp:cNvSpPr/>
@@ -12337,7 +12342,7 @@
           <p:cNvPr id="2" name="Title 1">
             <a:extLst>
               <a:ext uri="{FF2B5EF4-FFF2-40B4-BE49-F238E27FC236}">
-                <a16:creationId xmlns:a16="http://schemas.microsoft.com/office/drawing/2014/main" id="{BF95A096-5F67-8F7F-B075-F5C0D5258C70}"/>
+                <a16:creationId xmlns:a16="http://schemas.microsoft.com/office/drawing/2014/main" id="{B6DF8021-8EA2-9D81-060A-43D799C2517D}"/>
               </a:ext>
             </a:extLst>
           </p:cNvPr>
@@ -12374,7 +12379,7 @@
           <p:cNvPr id="3" name="Subtitle 2">
             <a:extLst>
               <a:ext uri="{FF2B5EF4-FFF2-40B4-BE49-F238E27FC236}">
-                <a16:creationId xmlns:a16="http://schemas.microsoft.com/office/drawing/2014/main" id="{15EB96B5-1720-12E8-7503-9AD95CEB175E}"/>
+                <a16:creationId xmlns:a16="http://schemas.microsoft.com/office/drawing/2014/main" id="{E6DAF411-17FD-FEB0-B995-86BBA6469656}"/>
               </a:ext>
             </a:extLst>
           </p:cNvPr>
@@ -12444,7 +12449,7 @@
           <p:cNvPr id="4" name="Date Placeholder 3">
             <a:extLst>
               <a:ext uri="{FF2B5EF4-FFF2-40B4-BE49-F238E27FC236}">
-                <a16:creationId xmlns:a16="http://schemas.microsoft.com/office/drawing/2014/main" id="{3E933C64-8E18-AD9E-713D-6014F4B4703D}"/>
+                <a16:creationId xmlns:a16="http://schemas.microsoft.com/office/drawing/2014/main" id="{79D197A0-A1A6-D390-5EA2-C3E44A592C14}"/>
               </a:ext>
             </a:extLst>
           </p:cNvPr>
@@ -12460,9 +12465,9 @@
           <a:bodyPr/>
           <a:lstStyle/>
           <a:p>
-            <a:fld id="{6DBE6787-96E5-46B4-8176-34774709BEBC}" type="datetimeFigureOut">
+            <a:fld id="{8D5ED259-4413-4035-A184-3DE577509D87}" type="datetimeFigureOut">
               <a:rPr lang="en-US" smtClean="0"/>
-              <a:t>7/14/2026</a:t>
+              <a:t>7/17/2026</a:t>
             </a:fld>
             <a:endParaRPr lang="en-US"/>
           </a:p>
@@ -12473,7 +12478,7 @@
           <p:cNvPr id="5" name="Footer Placeholder 4">
             <a:extLst>
               <a:ext uri="{FF2B5EF4-FFF2-40B4-BE49-F238E27FC236}">
-                <a16:creationId xmlns:a16="http://schemas.microsoft.com/office/drawing/2014/main" id="{9818C29F-3102-BB91-86D0-C5E015C6EE05}"/>
+                <a16:creationId xmlns:a16="http://schemas.microsoft.com/office/drawing/2014/main" id="{DFEDE2BD-0E57-A779-7360-C82C1CD3BBE4}"/>
               </a:ext>
             </a:extLst>
           </p:cNvPr>
@@ -12498,7 +12503,7 @@
           <p:cNvPr id="6" name="Slide Number Placeholder 5">
             <a:extLst>
               <a:ext uri="{FF2B5EF4-FFF2-40B4-BE49-F238E27FC236}">
-                <a16:creationId xmlns:a16="http://schemas.microsoft.com/office/drawing/2014/main" id="{B56C5BF0-6C74-65AE-D499-CF95DB8FFA33}"/>
+                <a16:creationId xmlns:a16="http://schemas.microsoft.com/office/drawing/2014/main" id="{49DFE1A3-E0DC-CEB8-5C62-B97EDD712BC6}"/>
               </a:ext>
             </a:extLst>
           </p:cNvPr>
@@ -12514,7 +12519,7 @@
           <a:bodyPr/>
           <a:lstStyle/>
           <a:p>
-            <a:fld id="{C9603FE5-0D18-4F9B-8689-7F6F154FF69D}" type="slidenum">
+            <a:fld id="{08F333A1-5376-4469-8242-0DD5F60818B1}" type="slidenum">
               <a:rPr lang="en-US" smtClean="0"/>
               <a:t>‹#›</a:t>
             </a:fld>
@@ -12525,7 +12530,7 @@
     </p:spTree>
     <p:extLst>
       <p:ext uri="{BB962C8B-B14F-4D97-AF65-F5344CB8AC3E}">
-        <p14:creationId xmlns:p14="http://schemas.microsoft.com/office/powerpoint/2010/main" val="2105881832"/>
+        <p14:creationId xmlns:p14="http://schemas.microsoft.com/office/powerpoint/2010/main" val="3985692728"/>
       </p:ext>
     </p:extLst>
   </p:cSld>
@@ -12557,7 +12562,7 @@
           <p:cNvPr id="2" name="Title 1">
             <a:extLst>
               <a:ext uri="{FF2B5EF4-FFF2-40B4-BE49-F238E27FC236}">
-                <a16:creationId xmlns:a16="http://schemas.microsoft.com/office/drawing/2014/main" id="{D78CDC85-23DA-4B72-890C-B7A05CAC9142}"/>
+                <a16:creationId xmlns:a16="http://schemas.microsoft.com/office/drawing/2014/main" id="{831BEF17-D523-E1EE-7A93-F434CDCF2A2F}"/>
               </a:ext>
             </a:extLst>
           </p:cNvPr>
@@ -12585,7 +12590,7 @@
           <p:cNvPr id="3" name="Vertical Text Placeholder 2">
             <a:extLst>
               <a:ext uri="{FF2B5EF4-FFF2-40B4-BE49-F238E27FC236}">
-                <a16:creationId xmlns:a16="http://schemas.microsoft.com/office/drawing/2014/main" id="{7AA1EE41-8410-4082-947C-CC016FAC6B2B}"/>
+                <a16:creationId xmlns:a16="http://schemas.microsoft.com/office/drawing/2014/main" id="{31C6D580-C398-63F8-1C1B-324EC92FCCD4}"/>
               </a:ext>
             </a:extLst>
           </p:cNvPr>
@@ -12642,7 +12647,7 @@
           <p:cNvPr id="4" name="Date Placeholder 3">
             <a:extLst>
               <a:ext uri="{FF2B5EF4-FFF2-40B4-BE49-F238E27FC236}">
-                <a16:creationId xmlns:a16="http://schemas.microsoft.com/office/drawing/2014/main" id="{10CB0EE5-9AA4-35C7-A8B8-134C789EDE37}"/>
+                <a16:creationId xmlns:a16="http://schemas.microsoft.com/office/drawing/2014/main" id="{0DD29D30-EEFA-846D-19DA-33DBFD3233EC}"/>
               </a:ext>
             </a:extLst>
           </p:cNvPr>
@@ -12658,9 +12663,9 @@
           <a:bodyPr/>
           <a:lstStyle/>
           <a:p>
-            <a:fld id="{6DBE6787-96E5-46B4-8176-34774709BEBC}" type="datetimeFigureOut">
+            <a:fld id="{8D5ED259-4413-4035-A184-3DE577509D87}" type="datetimeFigureOut">
               <a:rPr lang="en-US" smtClean="0"/>
-              <a:t>7/14/2026</a:t>
+              <a:t>7/17/2026</a:t>
             </a:fld>
             <a:endParaRPr lang="en-US"/>
           </a:p>
@@ -12671,7 +12676,7 @@
           <p:cNvPr id="5" name="Footer Placeholder 4">
             <a:extLst>
               <a:ext uri="{FF2B5EF4-FFF2-40B4-BE49-F238E27FC236}">
-                <a16:creationId xmlns:a16="http://schemas.microsoft.com/office/drawing/2014/main" id="{94286EA5-1C22-A9FC-0B20-EB70EFD7BD97}"/>
+                <a16:creationId xmlns:a16="http://schemas.microsoft.com/office/drawing/2014/main" id="{1EA78DE5-CB7E-525B-B99A-E5E4CF5D6F39}"/>
               </a:ext>
             </a:extLst>
           </p:cNvPr>
@@ -12696,7 +12701,7 @@
           <p:cNvPr id="6" name="Slide Number Placeholder 5">
             <a:extLst>
               <a:ext uri="{FF2B5EF4-FFF2-40B4-BE49-F238E27FC236}">
-                <a16:creationId xmlns:a16="http://schemas.microsoft.com/office/drawing/2014/main" id="{3D41DD5B-87E7-1C68-2563-B4707EC3F08C}"/>
+                <a16:creationId xmlns:a16="http://schemas.microsoft.com/office/drawing/2014/main" id="{9677612D-C38E-76CE-9920-1CC598C4A69B}"/>
               </a:ext>
             </a:extLst>
           </p:cNvPr>
@@ -12712,7 +12717,7 @@
           <a:bodyPr/>
           <a:lstStyle/>
           <a:p>
-            <a:fld id="{C9603FE5-0D18-4F9B-8689-7F6F154FF69D}" type="slidenum">
+            <a:fld id="{08F333A1-5376-4469-8242-0DD5F60818B1}" type="slidenum">
               <a:rPr lang="en-US" smtClean="0"/>
               <a:t>‹#›</a:t>
             </a:fld>
@@ -12723,7 +12728,7 @@
     </p:spTree>
     <p:extLst>
       <p:ext uri="{BB962C8B-B14F-4D97-AF65-F5344CB8AC3E}">
-        <p14:creationId xmlns:p14="http://schemas.microsoft.com/office/powerpoint/2010/main" val="921707011"/>
+        <p14:creationId xmlns:p14="http://schemas.microsoft.com/office/powerpoint/2010/main" val="799702992"/>
       </p:ext>
     </p:extLst>
   </p:cSld>
@@ -12755,7 +12760,7 @@
           <p:cNvPr id="2" name="Vertical Title 1">
             <a:extLst>
               <a:ext uri="{FF2B5EF4-FFF2-40B4-BE49-F238E27FC236}">
-                <a16:creationId xmlns:a16="http://schemas.microsoft.com/office/drawing/2014/main" id="{AD7920C4-6EC5-7276-0F5A-1C766CDC198F}"/>
+                <a16:creationId xmlns:a16="http://schemas.microsoft.com/office/drawing/2014/main" id="{B5E40302-6428-295F-1E75-414AFC875A4F}"/>
               </a:ext>
             </a:extLst>
           </p:cNvPr>
@@ -12788,7 +12793,7 @@
           <p:cNvPr id="3" name="Vertical Text Placeholder 2">
             <a:extLst>
               <a:ext uri="{FF2B5EF4-FFF2-40B4-BE49-F238E27FC236}">
-                <a16:creationId xmlns:a16="http://schemas.microsoft.com/office/drawing/2014/main" id="{C6F0B9FD-0464-C8BD-4EE7-7AACCD192E73}"/>
+                <a16:creationId xmlns:a16="http://schemas.microsoft.com/office/drawing/2014/main" id="{44BF8C5E-8586-2315-2C12-45AC8D2DB387}"/>
               </a:ext>
             </a:extLst>
           </p:cNvPr>
@@ -12850,7 +12855,7 @@
           <p:cNvPr id="4" name="Date Placeholder 3">
             <a:extLst>
               <a:ext uri="{FF2B5EF4-FFF2-40B4-BE49-F238E27FC236}">
-                <a16:creationId xmlns:a16="http://schemas.microsoft.com/office/drawing/2014/main" id="{F4DA8EC0-E884-A5BD-4C5A-4E7DEE50452B}"/>
+                <a16:creationId xmlns:a16="http://schemas.microsoft.com/office/drawing/2014/main" id="{28A1D39F-B049-02F1-B3C4-8FE4228149B5}"/>
               </a:ext>
             </a:extLst>
           </p:cNvPr>
@@ -12866,9 +12871,9 @@
           <a:bodyPr/>
           <a:lstStyle/>
           <a:p>
-            <a:fld id="{6DBE6787-96E5-46B4-8176-34774709BEBC}" type="datetimeFigureOut">
+            <a:fld id="{8D5ED259-4413-4035-A184-3DE577509D87}" type="datetimeFigureOut">
               <a:rPr lang="en-US" smtClean="0"/>
-              <a:t>7/14/2026</a:t>
+              <a:t>7/17/2026</a:t>
             </a:fld>
             <a:endParaRPr lang="en-US"/>
           </a:p>
@@ -12879,7 +12884,7 @@
           <p:cNvPr id="5" name="Footer Placeholder 4">
             <a:extLst>
               <a:ext uri="{FF2B5EF4-FFF2-40B4-BE49-F238E27FC236}">
-                <a16:creationId xmlns:a16="http://schemas.microsoft.com/office/drawing/2014/main" id="{10A50232-51F6-3AB1-F553-BAA0BCB9E9A2}"/>
+                <a16:creationId xmlns:a16="http://schemas.microsoft.com/office/drawing/2014/main" id="{54CDB9F4-F2E7-0431-DD4A-57337446EE82}"/>
               </a:ext>
             </a:extLst>
           </p:cNvPr>
@@ -12904,7 +12909,7 @@
           <p:cNvPr id="6" name="Slide Number Placeholder 5">
             <a:extLst>
               <a:ext uri="{FF2B5EF4-FFF2-40B4-BE49-F238E27FC236}">
-                <a16:creationId xmlns:a16="http://schemas.microsoft.com/office/drawing/2014/main" id="{39D8782F-2D9C-A6A3-4800-2FD7D5598E4B}"/>
+                <a16:creationId xmlns:a16="http://schemas.microsoft.com/office/drawing/2014/main" id="{B1A69AA2-ABF7-228E-ABC5-43BD60FE7441}"/>
               </a:ext>
             </a:extLst>
           </p:cNvPr>
@@ -12920,7 +12925,7 @@
           <a:bodyPr/>
           <a:lstStyle/>
           <a:p>
-            <a:fld id="{C9603FE5-0D18-4F9B-8689-7F6F154FF69D}" type="slidenum">
+            <a:fld id="{08F333A1-5376-4469-8242-0DD5F60818B1}" type="slidenum">
               <a:rPr lang="en-US" smtClean="0"/>
               <a:t>‹#›</a:t>
             </a:fld>
@@ -12931,7 +12936,7 @@
     </p:spTree>
     <p:extLst>
       <p:ext uri="{BB962C8B-B14F-4D97-AF65-F5344CB8AC3E}">
-        <p14:creationId xmlns:p14="http://schemas.microsoft.com/office/powerpoint/2010/main" val="3873627849"/>
+        <p14:creationId xmlns:p14="http://schemas.microsoft.com/office/powerpoint/2010/main" val="1852999714"/>
       </p:ext>
     </p:extLst>
   </p:cSld>
@@ -12963,7 +12968,7 @@
           <p:cNvPr id="2" name="Title 1">
             <a:extLst>
               <a:ext uri="{FF2B5EF4-FFF2-40B4-BE49-F238E27FC236}">
-                <a16:creationId xmlns:a16="http://schemas.microsoft.com/office/drawing/2014/main" id="{5E968989-33C8-6F8E-3914-351C2BECBA64}"/>
+                <a16:creationId xmlns:a16="http://schemas.microsoft.com/office/drawing/2014/main" id="{0AB307E2-37A0-3EF1-D251-893EE4BCF0E2}"/>
               </a:ext>
             </a:extLst>
           </p:cNvPr>
@@ -12991,7 +12996,7 @@
           <p:cNvPr id="3" name="Content Placeholder 2">
             <a:extLst>
               <a:ext uri="{FF2B5EF4-FFF2-40B4-BE49-F238E27FC236}">
-                <a16:creationId xmlns:a16="http://schemas.microsoft.com/office/drawing/2014/main" id="{C9D43F20-6435-DBDD-07A7-EFE6DCE0BDA0}"/>
+                <a16:creationId xmlns:a16="http://schemas.microsoft.com/office/drawing/2014/main" id="{5BAE57AA-4DB5-29A1-7BE4-7861A30CD85E}"/>
               </a:ext>
             </a:extLst>
           </p:cNvPr>
@@ -13048,7 +13053,7 @@
           <p:cNvPr id="4" name="Date Placeholder 3">
             <a:extLst>
               <a:ext uri="{FF2B5EF4-FFF2-40B4-BE49-F238E27FC236}">
-                <a16:creationId xmlns:a16="http://schemas.microsoft.com/office/drawing/2014/main" id="{DD2EB4CB-8437-8B0B-D093-5D9D058651C8}"/>
+                <a16:creationId xmlns:a16="http://schemas.microsoft.com/office/drawing/2014/main" id="{40DE2C89-9DE2-F044-AD2D-1E9831618114}"/>
               </a:ext>
             </a:extLst>
           </p:cNvPr>
@@ -13064,9 +13069,9 @@
           <a:bodyPr/>
           <a:lstStyle/>
           <a:p>
-            <a:fld id="{6DBE6787-96E5-46B4-8176-34774709BEBC}" type="datetimeFigureOut">
+            <a:fld id="{8D5ED259-4413-4035-A184-3DE577509D87}" type="datetimeFigureOut">
               <a:rPr lang="en-US" smtClean="0"/>
-              <a:t>7/14/2026</a:t>
+              <a:t>7/17/2026</a:t>
             </a:fld>
             <a:endParaRPr lang="en-US"/>
           </a:p>
@@ -13077,7 +13082,7 @@
           <p:cNvPr id="5" name="Footer Placeholder 4">
             <a:extLst>
               <a:ext uri="{FF2B5EF4-FFF2-40B4-BE49-F238E27FC236}">
-                <a16:creationId xmlns:a16="http://schemas.microsoft.com/office/drawing/2014/main" id="{B02D6B81-F38B-BCF6-4631-C006A5EE8C48}"/>
+                <a16:creationId xmlns:a16="http://schemas.microsoft.com/office/drawing/2014/main" id="{595DDECA-2B16-751A-0630-8791702F54CD}"/>
               </a:ext>
             </a:extLst>
           </p:cNvPr>
@@ -13102,7 +13107,7 @@
           <p:cNvPr id="6" name="Slide Number Placeholder 5">
             <a:extLst>
               <a:ext uri="{FF2B5EF4-FFF2-40B4-BE49-F238E27FC236}">
-                <a16:creationId xmlns:a16="http://schemas.microsoft.com/office/drawing/2014/main" id="{F42A6790-E259-794C-B763-3B41CA5508C3}"/>
+                <a16:creationId xmlns:a16="http://schemas.microsoft.com/office/drawing/2014/main" id="{A0D80F81-9385-18F1-ABC6-8D56A0FAD254}"/>
               </a:ext>
             </a:extLst>
           </p:cNvPr>
@@ -13118,7 +13123,7 @@
           <a:bodyPr/>
           <a:lstStyle/>
           <a:p>
-            <a:fld id="{C9603FE5-0D18-4F9B-8689-7F6F154FF69D}" type="slidenum">
+            <a:fld id="{08F333A1-5376-4469-8242-0DD5F60818B1}" type="slidenum">
               <a:rPr lang="en-US" smtClean="0"/>
               <a:t>‹#›</a:t>
             </a:fld>
@@ -13129,7 +13134,7 @@
     </p:spTree>
     <p:extLst>
       <p:ext uri="{BB962C8B-B14F-4D97-AF65-F5344CB8AC3E}">
-        <p14:creationId xmlns:p14="http://schemas.microsoft.com/office/powerpoint/2010/main" val="828460796"/>
+        <p14:creationId xmlns:p14="http://schemas.microsoft.com/office/powerpoint/2010/main" val="3376797504"/>
       </p:ext>
     </p:extLst>
   </p:cSld>
@@ -13161,7 +13166,7 @@
           <p:cNvPr id="2" name="Title 1">
             <a:extLst>
               <a:ext uri="{FF2B5EF4-FFF2-40B4-BE49-F238E27FC236}">
-                <a16:creationId xmlns:a16="http://schemas.microsoft.com/office/drawing/2014/main" id="{49A51779-2D50-91D0-6422-13F22E9285FE}"/>
+                <a16:creationId xmlns:a16="http://schemas.microsoft.com/office/drawing/2014/main" id="{3A6D2D9D-A4EF-35E9-1B25-A761111D5FAA}"/>
               </a:ext>
             </a:extLst>
           </p:cNvPr>
@@ -13198,7 +13203,7 @@
           <p:cNvPr id="3" name="Text Placeholder 2">
             <a:extLst>
               <a:ext uri="{FF2B5EF4-FFF2-40B4-BE49-F238E27FC236}">
-                <a16:creationId xmlns:a16="http://schemas.microsoft.com/office/drawing/2014/main" id="{A22FC370-5117-9D12-EABC-990773313487}"/>
+                <a16:creationId xmlns:a16="http://schemas.microsoft.com/office/drawing/2014/main" id="{86BDAA91-E2DD-4E17-F2DB-69A0E409B16F}"/>
               </a:ext>
             </a:extLst>
           </p:cNvPr>
@@ -13323,7 +13328,7 @@
           <p:cNvPr id="4" name="Date Placeholder 3">
             <a:extLst>
               <a:ext uri="{FF2B5EF4-FFF2-40B4-BE49-F238E27FC236}">
-                <a16:creationId xmlns:a16="http://schemas.microsoft.com/office/drawing/2014/main" id="{AE886747-B730-CB2B-5088-34A1CDF3730C}"/>
+                <a16:creationId xmlns:a16="http://schemas.microsoft.com/office/drawing/2014/main" id="{5C29181F-36DB-6490-0054-C8856BD38783}"/>
               </a:ext>
             </a:extLst>
           </p:cNvPr>
@@ -13339,9 +13344,9 @@
           <a:bodyPr/>
           <a:lstStyle/>
           <a:p>
-            <a:fld id="{6DBE6787-96E5-46B4-8176-34774709BEBC}" type="datetimeFigureOut">
+            <a:fld id="{8D5ED259-4413-4035-A184-3DE577509D87}" type="datetimeFigureOut">
               <a:rPr lang="en-US" smtClean="0"/>
-              <a:t>7/14/2026</a:t>
+              <a:t>7/17/2026</a:t>
             </a:fld>
             <a:endParaRPr lang="en-US"/>
           </a:p>
@@ -13352,7 +13357,7 @@
           <p:cNvPr id="5" name="Footer Placeholder 4">
             <a:extLst>
               <a:ext uri="{FF2B5EF4-FFF2-40B4-BE49-F238E27FC236}">
-                <a16:creationId xmlns:a16="http://schemas.microsoft.com/office/drawing/2014/main" id="{8C8A3F50-82D4-4A6A-318F-A187E0CB2372}"/>
+                <a16:creationId xmlns:a16="http://schemas.microsoft.com/office/drawing/2014/main" id="{8FE6CFE1-1A58-D77A-AB43-8D0FB538B282}"/>
               </a:ext>
             </a:extLst>
           </p:cNvPr>
@@ -13377,7 +13382,7 @@
           <p:cNvPr id="6" name="Slide Number Placeholder 5">
             <a:extLst>
               <a:ext uri="{FF2B5EF4-FFF2-40B4-BE49-F238E27FC236}">
-                <a16:creationId xmlns:a16="http://schemas.microsoft.com/office/drawing/2014/main" id="{F02A62D9-49A2-8E92-0FDB-22D523EA714E}"/>
+                <a16:creationId xmlns:a16="http://schemas.microsoft.com/office/drawing/2014/main" id="{DA07AE88-13B6-6792-2238-9753CE2E74F4}"/>
               </a:ext>
             </a:extLst>
           </p:cNvPr>
@@ -13393,7 +13398,7 @@
           <a:bodyPr/>
           <a:lstStyle/>
           <a:p>
-            <a:fld id="{C9603FE5-0D18-4F9B-8689-7F6F154FF69D}" type="slidenum">
+            <a:fld id="{08F333A1-5376-4469-8242-0DD5F60818B1}" type="slidenum">
               <a:rPr lang="en-US" smtClean="0"/>
               <a:t>‹#›</a:t>
             </a:fld>
@@ -13404,7 +13409,7 @@
     </p:spTree>
     <p:extLst>
       <p:ext uri="{BB962C8B-B14F-4D97-AF65-F5344CB8AC3E}">
-        <p14:creationId xmlns:p14="http://schemas.microsoft.com/office/powerpoint/2010/main" val="2394763280"/>
+        <p14:creationId xmlns:p14="http://schemas.microsoft.com/office/powerpoint/2010/main" val="3146162986"/>
       </p:ext>
     </p:extLst>
   </p:cSld>
@@ -13436,7 +13441,7 @@
           <p:cNvPr id="2" name="Title 1">
             <a:extLst>
               <a:ext uri="{FF2B5EF4-FFF2-40B4-BE49-F238E27FC236}">
-                <a16:creationId xmlns:a16="http://schemas.microsoft.com/office/drawing/2014/main" id="{92724490-7924-9BE7-1406-F115032A0E12}"/>
+                <a16:creationId xmlns:a16="http://schemas.microsoft.com/office/drawing/2014/main" id="{76286ED0-344F-33D3-F352-2FC0B8D4817B}"/>
               </a:ext>
             </a:extLst>
           </p:cNvPr>
@@ -13464,7 +13469,7 @@
           <p:cNvPr id="3" name="Content Placeholder 2">
             <a:extLst>
               <a:ext uri="{FF2B5EF4-FFF2-40B4-BE49-F238E27FC236}">
-                <a16:creationId xmlns:a16="http://schemas.microsoft.com/office/drawing/2014/main" id="{3B546F9B-FB49-ECC1-5A30-BAA30D3D1B5C}"/>
+                <a16:creationId xmlns:a16="http://schemas.microsoft.com/office/drawing/2014/main" id="{D0C424AF-BC8C-348A-A6EF-C2BBA90B855E}"/>
               </a:ext>
             </a:extLst>
           </p:cNvPr>
@@ -13526,7 +13531,7 @@
           <p:cNvPr id="4" name="Content Placeholder 3">
             <a:extLst>
               <a:ext uri="{FF2B5EF4-FFF2-40B4-BE49-F238E27FC236}">
-                <a16:creationId xmlns:a16="http://schemas.microsoft.com/office/drawing/2014/main" id="{EECB4D03-0522-2FD2-3520-0C7F8D20E603}"/>
+                <a16:creationId xmlns:a16="http://schemas.microsoft.com/office/drawing/2014/main" id="{1A0B6694-497D-B3C4-7685-CC2526A95FBD}"/>
               </a:ext>
             </a:extLst>
           </p:cNvPr>
@@ -13588,7 +13593,7 @@
           <p:cNvPr id="5" name="Date Placeholder 4">
             <a:extLst>
               <a:ext uri="{FF2B5EF4-FFF2-40B4-BE49-F238E27FC236}">
-                <a16:creationId xmlns:a16="http://schemas.microsoft.com/office/drawing/2014/main" id="{61B1AD9B-04F2-19F2-86F4-D227B578CBBD}"/>
+                <a16:creationId xmlns:a16="http://schemas.microsoft.com/office/drawing/2014/main" id="{654F7408-6E03-1839-D959-488A5255390F}"/>
               </a:ext>
             </a:extLst>
           </p:cNvPr>
@@ -13604,9 +13609,9 @@
           <a:bodyPr/>
           <a:lstStyle/>
           <a:p>
-            <a:fld id="{6DBE6787-96E5-46B4-8176-34774709BEBC}" type="datetimeFigureOut">
+            <a:fld id="{8D5ED259-4413-4035-A184-3DE577509D87}" type="datetimeFigureOut">
               <a:rPr lang="en-US" smtClean="0"/>
-              <a:t>7/14/2026</a:t>
+              <a:t>7/17/2026</a:t>
             </a:fld>
             <a:endParaRPr lang="en-US"/>
           </a:p>
@@ -13617,7 +13622,7 @@
           <p:cNvPr id="6" name="Footer Placeholder 5">
             <a:extLst>
               <a:ext uri="{FF2B5EF4-FFF2-40B4-BE49-F238E27FC236}">
-                <a16:creationId xmlns:a16="http://schemas.microsoft.com/office/drawing/2014/main" id="{D6B0552E-3645-7FE2-B048-61D7FC5451BD}"/>
+                <a16:creationId xmlns:a16="http://schemas.microsoft.com/office/drawing/2014/main" id="{51FD635F-DDA5-F134-FBC1-97100E670DED}"/>
               </a:ext>
             </a:extLst>
           </p:cNvPr>
@@ -13642,7 +13647,7 @@
           <p:cNvPr id="7" name="Slide Number Placeholder 6">
             <a:extLst>
               <a:ext uri="{FF2B5EF4-FFF2-40B4-BE49-F238E27FC236}">
-                <a16:creationId xmlns:a16="http://schemas.microsoft.com/office/drawing/2014/main" id="{F2B97A6A-EE39-BCED-C64F-747DD4E62A0D}"/>
+                <a16:creationId xmlns:a16="http://schemas.microsoft.com/office/drawing/2014/main" id="{2296624A-C881-15EA-7497-89D46E82AA2B}"/>
               </a:ext>
             </a:extLst>
           </p:cNvPr>
@@ -13658,7 +13663,7 @@
           <a:bodyPr/>
           <a:lstStyle/>
           <a:p>
-            <a:fld id="{C9603FE5-0D18-4F9B-8689-7F6F154FF69D}" type="slidenum">
+            <a:fld id="{08F333A1-5376-4469-8242-0DD5F60818B1}" type="slidenum">
               <a:rPr lang="en-US" smtClean="0"/>
               <a:t>‹#›</a:t>
             </a:fld>
@@ -13669,7 +13674,7 @@
     </p:spTree>
     <p:extLst>
       <p:ext uri="{BB962C8B-B14F-4D97-AF65-F5344CB8AC3E}">
-        <p14:creationId xmlns:p14="http://schemas.microsoft.com/office/powerpoint/2010/main" val="2855023618"/>
+        <p14:creationId xmlns:p14="http://schemas.microsoft.com/office/powerpoint/2010/main" val="2803255438"/>
       </p:ext>
     </p:extLst>
   </p:cSld>
@@ -13701,7 +13706,7 @@
           <p:cNvPr id="2" name="Title 1">
             <a:extLst>
               <a:ext uri="{FF2B5EF4-FFF2-40B4-BE49-F238E27FC236}">
-                <a16:creationId xmlns:a16="http://schemas.microsoft.com/office/drawing/2014/main" id="{B2AC1AE0-122B-7DF4-FBF1-81D8AA8931AB}"/>
+                <a16:creationId xmlns:a16="http://schemas.microsoft.com/office/drawing/2014/main" id="{4CE9A670-747C-BA50-5D0A-58A5CA071DC1}"/>
               </a:ext>
             </a:extLst>
           </p:cNvPr>
@@ -13734,7 +13739,7 @@
           <p:cNvPr id="3" name="Text Placeholder 2">
             <a:extLst>
               <a:ext uri="{FF2B5EF4-FFF2-40B4-BE49-F238E27FC236}">
-                <a16:creationId xmlns:a16="http://schemas.microsoft.com/office/drawing/2014/main" id="{08131C0A-C4F7-42B3-A97B-DFC42864089C}"/>
+                <a16:creationId xmlns:a16="http://schemas.microsoft.com/office/drawing/2014/main" id="{FFACA58C-4AC9-CA92-0747-0F841B3C2E02}"/>
               </a:ext>
             </a:extLst>
           </p:cNvPr>
@@ -13805,7 +13810,7 @@
           <p:cNvPr id="4" name="Content Placeholder 3">
             <a:extLst>
               <a:ext uri="{FF2B5EF4-FFF2-40B4-BE49-F238E27FC236}">
-                <a16:creationId xmlns:a16="http://schemas.microsoft.com/office/drawing/2014/main" id="{A4ECDB4E-CB4D-4182-1F94-E0F6B30567F0}"/>
+                <a16:creationId xmlns:a16="http://schemas.microsoft.com/office/drawing/2014/main" id="{11D29A03-2AF6-2AE1-653A-B198462C174D}"/>
               </a:ext>
             </a:extLst>
           </p:cNvPr>
@@ -13867,7 +13872,7 @@
           <p:cNvPr id="5" name="Text Placeholder 4">
             <a:extLst>
               <a:ext uri="{FF2B5EF4-FFF2-40B4-BE49-F238E27FC236}">
-                <a16:creationId xmlns:a16="http://schemas.microsoft.com/office/drawing/2014/main" id="{7D674AA6-7576-706D-A843-8D020629080B}"/>
+                <a16:creationId xmlns:a16="http://schemas.microsoft.com/office/drawing/2014/main" id="{4A1A7E4F-6F08-097E-20C9-A3CBE7948CC8}"/>
               </a:ext>
             </a:extLst>
           </p:cNvPr>
@@ -13938,7 +13943,7 @@
           <p:cNvPr id="6" name="Content Placeholder 5">
             <a:extLst>
               <a:ext uri="{FF2B5EF4-FFF2-40B4-BE49-F238E27FC236}">
-                <a16:creationId xmlns:a16="http://schemas.microsoft.com/office/drawing/2014/main" id="{A395980A-884B-C74A-B271-6318CEC9CF4B}"/>
+                <a16:creationId xmlns:a16="http://schemas.microsoft.com/office/drawing/2014/main" id="{02EBA116-0F6B-6875-1735-1675909595FB}"/>
               </a:ext>
             </a:extLst>
           </p:cNvPr>
@@ -14000,7 +14005,7 @@
           <p:cNvPr id="7" name="Date Placeholder 6">
             <a:extLst>
               <a:ext uri="{FF2B5EF4-FFF2-40B4-BE49-F238E27FC236}">
-                <a16:creationId xmlns:a16="http://schemas.microsoft.com/office/drawing/2014/main" id="{64F409AB-83D6-F213-122F-DE59A980DCC8}"/>
+                <a16:creationId xmlns:a16="http://schemas.microsoft.com/office/drawing/2014/main" id="{07E18329-DDED-C0DB-7B8C-97AE4F3AD6CB}"/>
               </a:ext>
             </a:extLst>
           </p:cNvPr>
@@ -14016,9 +14021,9 @@
           <a:bodyPr/>
           <a:lstStyle/>
           <a:p>
-            <a:fld id="{6DBE6787-96E5-46B4-8176-34774709BEBC}" type="datetimeFigureOut">
+            <a:fld id="{8D5ED259-4413-4035-A184-3DE577509D87}" type="datetimeFigureOut">
               <a:rPr lang="en-US" smtClean="0"/>
-              <a:t>7/14/2026</a:t>
+              <a:t>7/17/2026</a:t>
             </a:fld>
             <a:endParaRPr lang="en-US"/>
           </a:p>
@@ -14029,7 +14034,7 @@
           <p:cNvPr id="8" name="Footer Placeholder 7">
             <a:extLst>
               <a:ext uri="{FF2B5EF4-FFF2-40B4-BE49-F238E27FC236}">
-                <a16:creationId xmlns:a16="http://schemas.microsoft.com/office/drawing/2014/main" id="{B2F9E065-7EA9-D8BB-3963-CE0B77FE5716}"/>
+                <a16:creationId xmlns:a16="http://schemas.microsoft.com/office/drawing/2014/main" id="{D4E764A6-0E50-44C2-B5C1-2C66376C7619}"/>
               </a:ext>
             </a:extLst>
           </p:cNvPr>
@@ -14054,7 +14059,7 @@
           <p:cNvPr id="9" name="Slide Number Placeholder 8">
             <a:extLst>
               <a:ext uri="{FF2B5EF4-FFF2-40B4-BE49-F238E27FC236}">
-                <a16:creationId xmlns:a16="http://schemas.microsoft.com/office/drawing/2014/main" id="{AF99970C-3EE9-BFF4-0590-29122943E0D9}"/>
+                <a16:creationId xmlns:a16="http://schemas.microsoft.com/office/drawing/2014/main" id="{78D22AFC-2C68-97D8-B083-6E8744E32DBF}"/>
               </a:ext>
             </a:extLst>
           </p:cNvPr>
@@ -14070,7 +14075,7 @@
           <a:bodyPr/>
           <a:lstStyle/>
           <a:p>
-            <a:fld id="{C9603FE5-0D18-4F9B-8689-7F6F154FF69D}" type="slidenum">
+            <a:fld id="{08F333A1-5376-4469-8242-0DD5F60818B1}" type="slidenum">
               <a:rPr lang="en-US" smtClean="0"/>
               <a:t>‹#›</a:t>
             </a:fld>
@@ -14081,7 +14086,7 @@
     </p:spTree>
     <p:extLst>
       <p:ext uri="{BB962C8B-B14F-4D97-AF65-F5344CB8AC3E}">
-        <p14:creationId xmlns:p14="http://schemas.microsoft.com/office/powerpoint/2010/main" val="31826673"/>
+        <p14:creationId xmlns:p14="http://schemas.microsoft.com/office/powerpoint/2010/main" val="2862265895"/>
       </p:ext>
     </p:extLst>
   </p:cSld>
@@ -14113,7 +14118,7 @@
           <p:cNvPr id="2" name="Title 1">
             <a:extLst>
               <a:ext uri="{FF2B5EF4-FFF2-40B4-BE49-F238E27FC236}">
-                <a16:creationId xmlns:a16="http://schemas.microsoft.com/office/drawing/2014/main" id="{35B80394-7848-BF1F-8083-9597D88A6E78}"/>
+                <a16:creationId xmlns:a16="http://schemas.microsoft.com/office/drawing/2014/main" id="{EFF6EB35-DD7B-71C4-BB5D-03E436EBD880}"/>
               </a:ext>
             </a:extLst>
           </p:cNvPr>
@@ -14141,7 +14146,7 @@
           <p:cNvPr id="3" name="Date Placeholder 2">
             <a:extLst>
               <a:ext uri="{FF2B5EF4-FFF2-40B4-BE49-F238E27FC236}">
-                <a16:creationId xmlns:a16="http://schemas.microsoft.com/office/drawing/2014/main" id="{DE8C9F9F-3B8C-FB77-4609-F39904833EF3}"/>
+                <a16:creationId xmlns:a16="http://schemas.microsoft.com/office/drawing/2014/main" id="{DDFFEEB9-81E9-4B0D-C1D7-67009D53EAAD}"/>
               </a:ext>
             </a:extLst>
           </p:cNvPr>
@@ -14157,9 +14162,9 @@
           <a:bodyPr/>
           <a:lstStyle/>
           <a:p>
-            <a:fld id="{6DBE6787-96E5-46B4-8176-34774709BEBC}" type="datetimeFigureOut">
+            <a:fld id="{8D5ED259-4413-4035-A184-3DE577509D87}" type="datetimeFigureOut">
               <a:rPr lang="en-US" smtClean="0"/>
-              <a:t>7/14/2026</a:t>
+              <a:t>7/17/2026</a:t>
             </a:fld>
             <a:endParaRPr lang="en-US"/>
           </a:p>
@@ -14170,7 +14175,7 @@
           <p:cNvPr id="4" name="Footer Placeholder 3">
             <a:extLst>
               <a:ext uri="{FF2B5EF4-FFF2-40B4-BE49-F238E27FC236}">
-                <a16:creationId xmlns:a16="http://schemas.microsoft.com/office/drawing/2014/main" id="{65DEDCED-BD31-F9FF-6608-04867CE90A3E}"/>
+                <a16:creationId xmlns:a16="http://schemas.microsoft.com/office/drawing/2014/main" id="{B106A4AF-E4DC-E5C9-49CA-C816647C1695}"/>
               </a:ext>
             </a:extLst>
           </p:cNvPr>
@@ -14195,7 +14200,7 @@
           <p:cNvPr id="5" name="Slide Number Placeholder 4">
             <a:extLst>
               <a:ext uri="{FF2B5EF4-FFF2-40B4-BE49-F238E27FC236}">
-                <a16:creationId xmlns:a16="http://schemas.microsoft.com/office/drawing/2014/main" id="{14FCB2FD-A032-4062-EF2A-7DDCF01884FC}"/>
+                <a16:creationId xmlns:a16="http://schemas.microsoft.com/office/drawing/2014/main" id="{B99E9E49-DF9B-F029-CC02-1457FBB985BB}"/>
               </a:ext>
             </a:extLst>
           </p:cNvPr>
@@ -14211,7 +14216,7 @@
           <a:bodyPr/>
           <a:lstStyle/>
           <a:p>
-            <a:fld id="{C9603FE5-0D18-4F9B-8689-7F6F154FF69D}" type="slidenum">
+            <a:fld id="{08F333A1-5376-4469-8242-0DD5F60818B1}" type="slidenum">
               <a:rPr lang="en-US" smtClean="0"/>
               <a:t>‹#›</a:t>
             </a:fld>
@@ -14222,7 +14227,7 @@
     </p:spTree>
     <p:extLst>
       <p:ext uri="{BB962C8B-B14F-4D97-AF65-F5344CB8AC3E}">
-        <p14:creationId xmlns:p14="http://schemas.microsoft.com/office/powerpoint/2010/main" val="3648507705"/>
+        <p14:creationId xmlns:p14="http://schemas.microsoft.com/office/powerpoint/2010/main" val="641698905"/>
       </p:ext>
     </p:extLst>
   </p:cSld>
@@ -14254,7 +14259,7 @@
           <p:cNvPr id="2" name="Date Placeholder 1">
             <a:extLst>
               <a:ext uri="{FF2B5EF4-FFF2-40B4-BE49-F238E27FC236}">
-                <a16:creationId xmlns:a16="http://schemas.microsoft.com/office/drawing/2014/main" id="{655BB445-1973-EEF0-9567-09138AB28F6F}"/>
+                <a16:creationId xmlns:a16="http://schemas.microsoft.com/office/drawing/2014/main" id="{27FB507C-560C-8637-5097-C4097D127274}"/>
               </a:ext>
             </a:extLst>
           </p:cNvPr>
@@ -14270,9 +14275,9 @@
           <a:bodyPr/>
           <a:lstStyle/>
           <a:p>
-            <a:fld id="{6DBE6787-96E5-46B4-8176-34774709BEBC}" type="datetimeFigureOut">
+            <a:fld id="{8D5ED259-4413-4035-A184-3DE577509D87}" type="datetimeFigureOut">
               <a:rPr lang="en-US" smtClean="0"/>
-              <a:t>7/14/2026</a:t>
+              <a:t>7/17/2026</a:t>
             </a:fld>
             <a:endParaRPr lang="en-US"/>
           </a:p>
@@ -14283,7 +14288,7 @@
           <p:cNvPr id="3" name="Footer Placeholder 2">
             <a:extLst>
               <a:ext uri="{FF2B5EF4-FFF2-40B4-BE49-F238E27FC236}">
-                <a16:creationId xmlns:a16="http://schemas.microsoft.com/office/drawing/2014/main" id="{183737E1-D254-E1F9-16DF-71689FD6FDEB}"/>
+                <a16:creationId xmlns:a16="http://schemas.microsoft.com/office/drawing/2014/main" id="{B03F3423-3C65-5996-FC52-F0471614C42A}"/>
               </a:ext>
             </a:extLst>
           </p:cNvPr>
@@ -14308,7 +14313,7 @@
           <p:cNvPr id="4" name="Slide Number Placeholder 3">
             <a:extLst>
               <a:ext uri="{FF2B5EF4-FFF2-40B4-BE49-F238E27FC236}">
-                <a16:creationId xmlns:a16="http://schemas.microsoft.com/office/drawing/2014/main" id="{5F880B3C-506E-BB4A-D629-10C8D644878A}"/>
+                <a16:creationId xmlns:a16="http://schemas.microsoft.com/office/drawing/2014/main" id="{6F7A7BC3-DA78-BE94-0657-6706BF5792C9}"/>
               </a:ext>
             </a:extLst>
           </p:cNvPr>
@@ -14324,7 +14329,7 @@
           <a:bodyPr/>
           <a:lstStyle/>
           <a:p>
-            <a:fld id="{C9603FE5-0D18-4F9B-8689-7F6F154FF69D}" type="slidenum">
+            <a:fld id="{08F333A1-5376-4469-8242-0DD5F60818B1}" type="slidenum">
               <a:rPr lang="en-US" smtClean="0"/>
               <a:t>‹#›</a:t>
             </a:fld>
@@ -14335,7 +14340,7 @@
     </p:spTree>
     <p:extLst>
       <p:ext uri="{BB962C8B-B14F-4D97-AF65-F5344CB8AC3E}">
-        <p14:creationId xmlns:p14="http://schemas.microsoft.com/office/powerpoint/2010/main" val="1432416075"/>
+        <p14:creationId xmlns:p14="http://schemas.microsoft.com/office/powerpoint/2010/main" val="3901180675"/>
       </p:ext>
     </p:extLst>
   </p:cSld>
@@ -14367,7 +14372,7 @@
           <p:cNvPr id="2" name="Title 1">
             <a:extLst>
               <a:ext uri="{FF2B5EF4-FFF2-40B4-BE49-F238E27FC236}">
-                <a16:creationId xmlns:a16="http://schemas.microsoft.com/office/drawing/2014/main" id="{1813341A-0BD1-95F2-2A2D-21C661FE963F}"/>
+                <a16:creationId xmlns:a16="http://schemas.microsoft.com/office/drawing/2014/main" id="{5D05D14C-D01A-2B25-E5D0-4C7A56625A90}"/>
               </a:ext>
             </a:extLst>
           </p:cNvPr>
@@ -14404,7 +14409,7 @@
           <p:cNvPr id="3" name="Content Placeholder 2">
             <a:extLst>
               <a:ext uri="{FF2B5EF4-FFF2-40B4-BE49-F238E27FC236}">
-                <a16:creationId xmlns:a16="http://schemas.microsoft.com/office/drawing/2014/main" id="{3A2BBDE8-7B49-25C9-C642-B6DAF54F8C05}"/>
+                <a16:creationId xmlns:a16="http://schemas.microsoft.com/office/drawing/2014/main" id="{17DA2014-40F8-44F9-40B0-1EB72ED94FD0}"/>
               </a:ext>
             </a:extLst>
           </p:cNvPr>
@@ -14494,7 +14499,7 @@
           <p:cNvPr id="4" name="Text Placeholder 3">
             <a:extLst>
               <a:ext uri="{FF2B5EF4-FFF2-40B4-BE49-F238E27FC236}">
-                <a16:creationId xmlns:a16="http://schemas.microsoft.com/office/drawing/2014/main" id="{25FCA0E3-162C-1FD7-D420-E7D70DA74B41}"/>
+                <a16:creationId xmlns:a16="http://schemas.microsoft.com/office/drawing/2014/main" id="{8E15533C-434E-EFF8-C4EF-0EC574E289FA}"/>
               </a:ext>
             </a:extLst>
           </p:cNvPr>
@@ -14565,7 +14570,7 @@
           <p:cNvPr id="5" name="Date Placeholder 4">
             <a:extLst>
               <a:ext uri="{FF2B5EF4-FFF2-40B4-BE49-F238E27FC236}">
-                <a16:creationId xmlns:a16="http://schemas.microsoft.com/office/drawing/2014/main" id="{F7D8E10A-19CB-C3BF-E3FC-D2B57AFA9068}"/>
+                <a16:creationId xmlns:a16="http://schemas.microsoft.com/office/drawing/2014/main" id="{613DC24F-5385-BC6F-0A2D-7EB4D5BA7D09}"/>
               </a:ext>
             </a:extLst>
           </p:cNvPr>
@@ -14581,9 +14586,9 @@
           <a:bodyPr/>
           <a:lstStyle/>
           <a:p>
-            <a:fld id="{6DBE6787-96E5-46B4-8176-34774709BEBC}" type="datetimeFigureOut">
+            <a:fld id="{8D5ED259-4413-4035-A184-3DE577509D87}" type="datetimeFigureOut">
               <a:rPr lang="en-US" smtClean="0"/>
-              <a:t>7/14/2026</a:t>
+              <a:t>7/17/2026</a:t>
             </a:fld>
             <a:endParaRPr lang="en-US"/>
           </a:p>
@@ -14594,7 +14599,7 @@
           <p:cNvPr id="6" name="Footer Placeholder 5">
             <a:extLst>
               <a:ext uri="{FF2B5EF4-FFF2-40B4-BE49-F238E27FC236}">
-                <a16:creationId xmlns:a16="http://schemas.microsoft.com/office/drawing/2014/main" id="{5DC4A0E7-FBD7-7DD9-7BF5-BD51517D7AED}"/>
+                <a16:creationId xmlns:a16="http://schemas.microsoft.com/office/drawing/2014/main" id="{8F0C5EFB-0F0A-188E-3CB5-D0318D717E9F}"/>
               </a:ext>
             </a:extLst>
           </p:cNvPr>
@@ -14619,7 +14624,7 @@
           <p:cNvPr id="7" name="Slide Number Placeholder 6">
             <a:extLst>
               <a:ext uri="{FF2B5EF4-FFF2-40B4-BE49-F238E27FC236}">
-                <a16:creationId xmlns:a16="http://schemas.microsoft.com/office/drawing/2014/main" id="{70DF70E3-8ED1-E065-E793-6B2326413AB3}"/>
+                <a16:creationId xmlns:a16="http://schemas.microsoft.com/office/drawing/2014/main" id="{CD43C2A9-BD5C-CA41-D1AF-7F9BDEF97971}"/>
               </a:ext>
             </a:extLst>
           </p:cNvPr>
@@ -14635,7 +14640,7 @@
           <a:bodyPr/>
           <a:lstStyle/>
           <a:p>
-            <a:fld id="{C9603FE5-0D18-4F9B-8689-7F6F154FF69D}" type="slidenum">
+            <a:fld id="{08F333A1-5376-4469-8242-0DD5F60818B1}" type="slidenum">
               <a:rPr lang="en-US" smtClean="0"/>
               <a:t>‹#›</a:t>
             </a:fld>
@@ -14646,7 +14651,7 @@
     </p:spTree>
     <p:extLst>
       <p:ext uri="{BB962C8B-B14F-4D97-AF65-F5344CB8AC3E}">
-        <p14:creationId xmlns:p14="http://schemas.microsoft.com/office/powerpoint/2010/main" val="585391209"/>
+        <p14:creationId xmlns:p14="http://schemas.microsoft.com/office/powerpoint/2010/main" val="3831753220"/>
       </p:ext>
     </p:extLst>
   </p:cSld>
@@ -14678,7 +14683,7 @@
           <p:cNvPr id="2" name="Title 1">
             <a:extLst>
               <a:ext uri="{FF2B5EF4-FFF2-40B4-BE49-F238E27FC236}">
-                <a16:creationId xmlns:a16="http://schemas.microsoft.com/office/drawing/2014/main" id="{7882822D-F8EA-B2C2-9901-4456A7FAA3C7}"/>
+                <a16:creationId xmlns:a16="http://schemas.microsoft.com/office/drawing/2014/main" id="{91F576D8-022C-C463-BC2E-250339270BAC}"/>
               </a:ext>
             </a:extLst>
           </p:cNvPr>
@@ -14715,7 +14720,7 @@
           <p:cNvPr id="3" name="Picture Placeholder 2">
             <a:extLst>
               <a:ext uri="{FF2B5EF4-FFF2-40B4-BE49-F238E27FC236}">
-                <a16:creationId xmlns:a16="http://schemas.microsoft.com/office/drawing/2014/main" id="{F572047C-8443-54E5-D007-CE9F2F97F0E9}"/>
+                <a16:creationId xmlns:a16="http://schemas.microsoft.com/office/drawing/2014/main" id="{63685AFD-7115-C41F-9600-C15CCDCA302F}"/>
               </a:ext>
             </a:extLst>
           </p:cNvPr>
@@ -14782,7 +14787,7 @@
           <p:cNvPr id="4" name="Text Placeholder 3">
             <a:extLst>
               <a:ext uri="{FF2B5EF4-FFF2-40B4-BE49-F238E27FC236}">
-                <a16:creationId xmlns:a16="http://schemas.microsoft.com/office/drawing/2014/main" id="{230407A5-D5E9-C861-168D-E5EDD731F9B7}"/>
+                <a16:creationId xmlns:a16="http://schemas.microsoft.com/office/drawing/2014/main" id="{7B061B91-ECA8-2FB6-EADC-0A51697DDC59}"/>
               </a:ext>
             </a:extLst>
           </p:cNvPr>
@@ -14853,7 +14858,7 @@
           <p:cNvPr id="5" name="Date Placeholder 4">
             <a:extLst>
               <a:ext uri="{FF2B5EF4-FFF2-40B4-BE49-F238E27FC236}">
-                <a16:creationId xmlns:a16="http://schemas.microsoft.com/office/drawing/2014/main" id="{CBDEB7DD-A610-2B6A-A96A-EAC261BCD8B2}"/>
+                <a16:creationId xmlns:a16="http://schemas.microsoft.com/office/drawing/2014/main" id="{9494A265-5BD8-354B-59B1-7AC293776E22}"/>
               </a:ext>
             </a:extLst>
           </p:cNvPr>
@@ -14869,9 +14874,9 @@
           <a:bodyPr/>
           <a:lstStyle/>
           <a:p>
-            <a:fld id="{6DBE6787-96E5-46B4-8176-34774709BEBC}" type="datetimeFigureOut">
+            <a:fld id="{8D5ED259-4413-4035-A184-3DE577509D87}" type="datetimeFigureOut">
               <a:rPr lang="en-US" smtClean="0"/>
-              <a:t>7/14/2026</a:t>
+              <a:t>7/17/2026</a:t>
             </a:fld>
             <a:endParaRPr lang="en-US"/>
           </a:p>
@@ -14882,7 +14887,7 @@
           <p:cNvPr id="6" name="Footer Placeholder 5">
             <a:extLst>
               <a:ext uri="{FF2B5EF4-FFF2-40B4-BE49-F238E27FC236}">
-                <a16:creationId xmlns:a16="http://schemas.microsoft.com/office/drawing/2014/main" id="{951F8EF7-C935-D8DF-C95B-17BF62495932}"/>
+                <a16:creationId xmlns:a16="http://schemas.microsoft.com/office/drawing/2014/main" id="{C6F3C8D8-D7F2-436F-AD25-8B87FBCF1292}"/>
               </a:ext>
             </a:extLst>
           </p:cNvPr>
@@ -14907,7 +14912,7 @@
           <p:cNvPr id="7" name="Slide Number Placeholder 6">
             <a:extLst>
               <a:ext uri="{FF2B5EF4-FFF2-40B4-BE49-F238E27FC236}">
-                <a16:creationId xmlns:a16="http://schemas.microsoft.com/office/drawing/2014/main" id="{8CF1CA5F-D236-E175-7AD8-2D0D30BFD111}"/>
+                <a16:creationId xmlns:a16="http://schemas.microsoft.com/office/drawing/2014/main" id="{2666949A-C6AE-1650-723A-78C4F5ED47AC}"/>
               </a:ext>
             </a:extLst>
           </p:cNvPr>
@@ -14923,7 +14928,7 @@
           <a:bodyPr/>
           <a:lstStyle/>
           <a:p>
-            <a:fld id="{C9603FE5-0D18-4F9B-8689-7F6F154FF69D}" type="slidenum">
+            <a:fld id="{08F333A1-5376-4469-8242-0DD5F60818B1}" type="slidenum">
               <a:rPr lang="en-US" smtClean="0"/>
               <a:t>‹#›</a:t>
             </a:fld>
@@ -14934,7 +14939,7 @@
     </p:spTree>
     <p:extLst>
       <p:ext uri="{BB962C8B-B14F-4D97-AF65-F5344CB8AC3E}">
-        <p14:creationId xmlns:p14="http://schemas.microsoft.com/office/powerpoint/2010/main" val="3747218366"/>
+        <p14:creationId xmlns:p14="http://schemas.microsoft.com/office/powerpoint/2010/main" val="3296449448"/>
       </p:ext>
     </p:extLst>
   </p:cSld>
@@ -14971,7 +14976,7 @@
           <p:cNvPr id="2" name="Title Placeholder 1">
             <a:extLst>
               <a:ext uri="{FF2B5EF4-FFF2-40B4-BE49-F238E27FC236}">
-                <a16:creationId xmlns:a16="http://schemas.microsoft.com/office/drawing/2014/main" id="{FC66E9F8-6184-BF27-3EC5-7855CC357734}"/>
+                <a16:creationId xmlns:a16="http://schemas.microsoft.com/office/drawing/2014/main" id="{9E5C5F7A-8C5E-91F1-9367-2D26A2ED22B5}"/>
               </a:ext>
             </a:extLst>
           </p:cNvPr>
@@ -15009,7 +15014,7 @@
           <p:cNvPr id="3" name="Text Placeholder 2">
             <a:extLst>
               <a:ext uri="{FF2B5EF4-FFF2-40B4-BE49-F238E27FC236}">
-                <a16:creationId xmlns:a16="http://schemas.microsoft.com/office/drawing/2014/main" id="{FCE6FC6A-1F17-2496-7F25-7E0DE04F372E}"/>
+                <a16:creationId xmlns:a16="http://schemas.microsoft.com/office/drawing/2014/main" id="{6CF878C9-B211-6F0D-331B-EA9338C97206}"/>
               </a:ext>
             </a:extLst>
           </p:cNvPr>
@@ -15076,7 +15081,7 @@
           <p:cNvPr id="4" name="Date Placeholder 3">
             <a:extLst>
               <a:ext uri="{FF2B5EF4-FFF2-40B4-BE49-F238E27FC236}">
-                <a16:creationId xmlns:a16="http://schemas.microsoft.com/office/drawing/2014/main" id="{6F416260-5BD1-6EF9-57DB-0E5A9A12F011}"/>
+                <a16:creationId xmlns:a16="http://schemas.microsoft.com/office/drawing/2014/main" id="{51BF61A7-518B-76A7-159B-500D5612CCAB}"/>
               </a:ext>
             </a:extLst>
           </p:cNvPr>
@@ -15110,9 +15115,9 @@
             </a:lvl1pPr>
           </a:lstStyle>
           <a:p>
-            <a:fld id="{6DBE6787-96E5-46B4-8176-34774709BEBC}" type="datetimeFigureOut">
+            <a:fld id="{8D5ED259-4413-4035-A184-3DE577509D87}" type="datetimeFigureOut">
               <a:rPr lang="en-US" smtClean="0"/>
-              <a:t>7/14/2026</a:t>
+              <a:t>7/17/2026</a:t>
             </a:fld>
             <a:endParaRPr lang="en-US"/>
           </a:p>
@@ -15123,7 +15128,7 @@
           <p:cNvPr id="5" name="Footer Placeholder 4">
             <a:extLst>
               <a:ext uri="{FF2B5EF4-FFF2-40B4-BE49-F238E27FC236}">
-                <a16:creationId xmlns:a16="http://schemas.microsoft.com/office/drawing/2014/main" id="{2BACD63F-75F0-EB95-B070-3F08842BEAE5}"/>
+                <a16:creationId xmlns:a16="http://schemas.microsoft.com/office/drawing/2014/main" id="{9476DDB3-C1F5-CEEE-2F1E-70AB510EEBF1}"/>
               </a:ext>
             </a:extLst>
           </p:cNvPr>
@@ -15166,7 +15171,7 @@
           <p:cNvPr id="6" name="Slide Number Placeholder 5">
             <a:extLst>
               <a:ext uri="{FF2B5EF4-FFF2-40B4-BE49-F238E27FC236}">
-                <a16:creationId xmlns:a16="http://schemas.microsoft.com/office/drawing/2014/main" id="{2520C50C-A373-9FB3-3DA6-66D29B7724A8}"/>
+                <a16:creationId xmlns:a16="http://schemas.microsoft.com/office/drawing/2014/main" id="{3200F705-067A-45E7-AEFB-45DD44BE3247}"/>
               </a:ext>
             </a:extLst>
           </p:cNvPr>
@@ -15200,7 +15205,7 @@
             </a:lvl1pPr>
           </a:lstStyle>
           <a:p>
-            <a:fld id="{C9603FE5-0D18-4F9B-8689-7F6F154FF69D}" type="slidenum">
+            <a:fld id="{08F333A1-5376-4469-8242-0DD5F60818B1}" type="slidenum">
               <a:rPr lang="en-US" smtClean="0"/>
               <a:t>‹#›</a:t>
             </a:fld>
@@ -15211,7 +15216,7 @@
     </p:spTree>
     <p:extLst>
       <p:ext uri="{BB962C8B-B14F-4D97-AF65-F5344CB8AC3E}">
-        <p14:creationId xmlns:p14="http://schemas.microsoft.com/office/powerpoint/2010/main" val="39020618"/>
+        <p14:creationId xmlns:p14="http://schemas.microsoft.com/office/powerpoint/2010/main" val="3237104651"/>
       </p:ext>
     </p:extLst>
   </p:cSld>
@@ -15534,7 +15539,7 @@
           <p:cNvPr id="2" name="TextBox 1">
             <a:extLst>
               <a:ext uri="{FF2B5EF4-FFF2-40B4-BE49-F238E27FC236}">
-                <a16:creationId xmlns:a16="http://schemas.microsoft.com/office/drawing/2014/main" id="{4FA8854F-12AD-4A9D-EA1A-08A3DB8B9127}"/>
+                <a16:creationId xmlns:a16="http://schemas.microsoft.com/office/drawing/2014/main" id="{352A020A-5A71-BB15-6FF6-E07EA1511621}"/>
               </a:ext>
             </a:extLst>
           </p:cNvPr>
@@ -15569,7 +15574,7 @@
           <p:cNvPr id="3" name="Diagram 2">
             <a:extLst>
               <a:ext uri="{FF2B5EF4-FFF2-40B4-BE49-F238E27FC236}">
-                <a16:creationId xmlns:a16="http://schemas.microsoft.com/office/drawing/2014/main" id="{169DE273-7F49-D9D4-EB64-645204C893BC}"/>
+                <a16:creationId xmlns:a16="http://schemas.microsoft.com/office/drawing/2014/main" id="{50B667E8-6BDA-7376-14B8-30685254D48C}"/>
               </a:ext>
             </a:extLst>
           </p:cNvPr>
@@ -15577,7 +15582,7 @@
           <p:nvPr>
             <p:extLst>
               <p:ext uri="{D42A27DB-BD31-4B8C-83A1-F6EECF244321}">
-                <p14:modId xmlns:p14="http://schemas.microsoft.com/office/powerpoint/2010/main" val="2151217746"/>
+                <p14:modId xmlns:p14="http://schemas.microsoft.com/office/powerpoint/2010/main" val="118368093"/>
               </p:ext>
             </p:extLst>
           </p:nvPr>
@@ -15595,7 +15600,7 @@
     </p:spTree>
     <p:extLst>
       <p:ext uri="{BB962C8B-B14F-4D97-AF65-F5344CB8AC3E}">
-        <p14:creationId xmlns:p14="http://schemas.microsoft.com/office/powerpoint/2010/main" val="2679079497"/>
+        <p14:creationId xmlns:p14="http://schemas.microsoft.com/office/powerpoint/2010/main" val="777919745"/>
       </p:ext>
     </p:extLst>
   </p:cSld>
@@ -15627,7 +15632,7 @@
           <p:cNvPr id="2" name="TextBox 1">
             <a:extLst>
               <a:ext uri="{FF2B5EF4-FFF2-40B4-BE49-F238E27FC236}">
-                <a16:creationId xmlns:a16="http://schemas.microsoft.com/office/drawing/2014/main" id="{1E3F3A23-3D36-9ED3-D907-ECDF6619891E}"/>
+                <a16:creationId xmlns:a16="http://schemas.microsoft.com/office/drawing/2014/main" id="{A5E6BE6A-640C-4EE0-5649-826BAEFEEDFE}"/>
               </a:ext>
             </a:extLst>
           </p:cNvPr>
@@ -15662,7 +15667,7 @@
           <p:cNvPr id="3" name="Diagram 2">
             <a:extLst>
               <a:ext uri="{FF2B5EF4-FFF2-40B4-BE49-F238E27FC236}">
-                <a16:creationId xmlns:a16="http://schemas.microsoft.com/office/drawing/2014/main" id="{F860175D-3AAF-2FEC-7BE9-8B74EF985C35}"/>
+                <a16:creationId xmlns:a16="http://schemas.microsoft.com/office/drawing/2014/main" id="{8771C72C-F2B6-712F-CC14-A7F856128C31}"/>
               </a:ext>
             </a:extLst>
           </p:cNvPr>
@@ -15670,7 +15675,7 @@
           <p:nvPr>
             <p:extLst>
               <p:ext uri="{D42A27DB-BD31-4B8C-83A1-F6EECF244321}">
-                <p14:modId xmlns:p14="http://schemas.microsoft.com/office/powerpoint/2010/main" val="1418559345"/>
+                <p14:modId xmlns:p14="http://schemas.microsoft.com/office/powerpoint/2010/main" val="3398794066"/>
               </p:ext>
             </p:extLst>
           </p:nvPr>
@@ -15688,7 +15693,7 @@
     </p:spTree>
     <p:extLst>
       <p:ext uri="{BB962C8B-B14F-4D97-AF65-F5344CB8AC3E}">
-        <p14:creationId xmlns:p14="http://schemas.microsoft.com/office/powerpoint/2010/main" val="1218557896"/>
+        <p14:creationId xmlns:p14="http://schemas.microsoft.com/office/powerpoint/2010/main" val="2218489371"/>
       </p:ext>
     </p:extLst>
   </p:cSld>
@@ -15720,7 +15725,7 @@
           <p:cNvPr id="2" name="TextBox 1">
             <a:extLst>
               <a:ext uri="{FF2B5EF4-FFF2-40B4-BE49-F238E27FC236}">
-                <a16:creationId xmlns:a16="http://schemas.microsoft.com/office/drawing/2014/main" id="{88295E78-5AAA-4AC6-E128-C8E0E35B9F56}"/>
+                <a16:creationId xmlns:a16="http://schemas.microsoft.com/office/drawing/2014/main" id="{A8019349-7F8D-C769-E569-FDD75081048B}"/>
               </a:ext>
             </a:extLst>
           </p:cNvPr>
@@ -15755,7 +15760,7 @@
           <p:cNvPr id="3" name="Diagram 2">
             <a:extLst>
               <a:ext uri="{FF2B5EF4-FFF2-40B4-BE49-F238E27FC236}">
-                <a16:creationId xmlns:a16="http://schemas.microsoft.com/office/drawing/2014/main" id="{284C2B9E-88B0-352F-F653-1DEF4B42A7D6}"/>
+                <a16:creationId xmlns:a16="http://schemas.microsoft.com/office/drawing/2014/main" id="{FFAFCC7D-6897-A3F5-5B9A-5C8AA6DCE1CB}"/>
               </a:ext>
             </a:extLst>
           </p:cNvPr>
@@ -15763,7 +15768,7 @@
           <p:nvPr>
             <p:extLst>
               <p:ext uri="{D42A27DB-BD31-4B8C-83A1-F6EECF244321}">
-                <p14:modId xmlns:p14="http://schemas.microsoft.com/office/powerpoint/2010/main" val="2031517339"/>
+                <p14:modId xmlns:p14="http://schemas.microsoft.com/office/powerpoint/2010/main" val="1232186203"/>
               </p:ext>
             </p:extLst>
           </p:nvPr>
@@ -15781,7 +15786,7 @@
     </p:spTree>
     <p:extLst>
       <p:ext uri="{BB962C8B-B14F-4D97-AF65-F5344CB8AC3E}">
-        <p14:creationId xmlns:p14="http://schemas.microsoft.com/office/powerpoint/2010/main" val="2125521360"/>
+        <p14:creationId xmlns:p14="http://schemas.microsoft.com/office/powerpoint/2010/main" val="352582794"/>
       </p:ext>
     </p:extLst>
   </p:cSld>
@@ -15813,7 +15818,7 @@
           <p:cNvPr id="2" name="TextBox 1">
             <a:extLst>
               <a:ext uri="{FF2B5EF4-FFF2-40B4-BE49-F238E27FC236}">
-                <a16:creationId xmlns:a16="http://schemas.microsoft.com/office/drawing/2014/main" id="{2EB8FD8C-FA03-54F2-1F0D-59C99F74B618}"/>
+                <a16:creationId xmlns:a16="http://schemas.microsoft.com/office/drawing/2014/main" id="{1DBF10E0-ADF4-12D8-030F-49D8F00D8E0C}"/>
               </a:ext>
             </a:extLst>
           </p:cNvPr>
@@ -15848,7 +15853,7 @@
           <p:cNvPr id="3" name="Diagram 2">
             <a:extLst>
               <a:ext uri="{FF2B5EF4-FFF2-40B4-BE49-F238E27FC236}">
-                <a16:creationId xmlns:a16="http://schemas.microsoft.com/office/drawing/2014/main" id="{EB018FAA-C365-A739-5618-A4C0EAB7033F}"/>
+                <a16:creationId xmlns:a16="http://schemas.microsoft.com/office/drawing/2014/main" id="{24C8071F-8313-8455-A9D9-22E48DF81314}"/>
               </a:ext>
             </a:extLst>
           </p:cNvPr>
@@ -15856,7 +15861,7 @@
           <p:nvPr>
             <p:extLst>
               <p:ext uri="{D42A27DB-BD31-4B8C-83A1-F6EECF244321}">
-                <p14:modId xmlns:p14="http://schemas.microsoft.com/office/powerpoint/2010/main" val="2799367445"/>
+                <p14:modId xmlns:p14="http://schemas.microsoft.com/office/powerpoint/2010/main" val="1600531343"/>
               </p:ext>
             </p:extLst>
           </p:nvPr>
@@ -15874,7 +15879,7 @@
     </p:spTree>
     <p:extLst>
       <p:ext uri="{BB962C8B-B14F-4D97-AF65-F5344CB8AC3E}">
-        <p14:creationId xmlns:p14="http://schemas.microsoft.com/office/powerpoint/2010/main" val="2329326382"/>
+        <p14:creationId xmlns:p14="http://schemas.microsoft.com/office/powerpoint/2010/main" val="4263044043"/>
       </p:ext>
     </p:extLst>
   </p:cSld>
